--- a/第6章-栅格数据处理及分析/第1节-栅格与矢量数据转换.pptx
+++ b/第6章-栅格数据处理及分析/第1节-栅格与矢量数据转换.pptx
@@ -6,30 +6,31 @@
     <p:sldMasterId id="2147484986" r:id="rId2"/>
   </p:sldMasterIdLst>
   <p:notesMasterIdLst>
-    <p:notesMasterId r:id="rId16"/>
+    <p:notesMasterId r:id="rId17"/>
   </p:notesMasterIdLst>
   <p:handoutMasterIdLst>
-    <p:handoutMasterId r:id="rId17"/>
+    <p:handoutMasterId r:id="rId18"/>
   </p:handoutMasterIdLst>
   <p:sldIdLst>
     <p:sldId id="2708" r:id="rId3"/>
-    <p:sldId id="2794" r:id="rId4"/>
-    <p:sldId id="2795" r:id="rId5"/>
-    <p:sldId id="2759" r:id="rId6"/>
-    <p:sldId id="2789" r:id="rId7"/>
-    <p:sldId id="2787" r:id="rId8"/>
-    <p:sldId id="2798" r:id="rId9"/>
-    <p:sldId id="2797" r:id="rId10"/>
-    <p:sldId id="2790" r:id="rId11"/>
-    <p:sldId id="2775" r:id="rId12"/>
-    <p:sldId id="2792" r:id="rId13"/>
-    <p:sldId id="2793" r:id="rId14"/>
-    <p:sldId id="2722" r:id="rId15"/>
+    <p:sldId id="2799" r:id="rId4"/>
+    <p:sldId id="2794" r:id="rId5"/>
+    <p:sldId id="2795" r:id="rId6"/>
+    <p:sldId id="2759" r:id="rId7"/>
+    <p:sldId id="2789" r:id="rId8"/>
+    <p:sldId id="2787" r:id="rId9"/>
+    <p:sldId id="2798" r:id="rId10"/>
+    <p:sldId id="2797" r:id="rId11"/>
+    <p:sldId id="2790" r:id="rId12"/>
+    <p:sldId id="2775" r:id="rId13"/>
+    <p:sldId id="2792" r:id="rId14"/>
+    <p:sldId id="2793" r:id="rId15"/>
+    <p:sldId id="2722" r:id="rId16"/>
   </p:sldIdLst>
-  <p:sldSz cx="9144000" cy="6858000" type="screen4x3"/>
+  <p:sldSz cx="12192000" cy="6858000"/>
   <p:notesSz cx="7099300" cy="10234613"/>
   <p:custDataLst>
-    <p:tags r:id="rId18"/>
+    <p:tags r:id="rId19"/>
   </p:custDataLst>
   <p:defaultTextStyle>
     <a:defPPr>
@@ -159,257 +160,257 @@
   <p:extLst>
     <p:ext uri="{EFAFB233-063F-42B5-8137-9DF3F51BA10A}">
       <p15:sldGuideLst xmlns:p15="http://schemas.microsoft.com/office/powerpoint/2012/main">
-        <p15:guide id="1" orient="horz" pos="663">
+        <p15:guide id="1" orient="horz" pos="663" userDrawn="1">
           <p15:clr>
             <a:srgbClr val="A4A3A4"/>
           </p15:clr>
         </p15:guide>
-        <p15:guide id="2" orient="horz" pos="1412">
+        <p15:guide id="2" orient="horz" pos="1412" userDrawn="1">
           <p15:clr>
             <a:srgbClr val="A4A3A4"/>
           </p15:clr>
         </p15:guide>
-        <p15:guide id="3" pos="181">
+        <p15:guide id="3" pos="241" userDrawn="1">
           <p15:clr>
             <a:srgbClr val="A4A3A4"/>
           </p15:clr>
         </p15:guide>
-        <p15:guide id="4" pos="5556">
+        <p15:guide id="4" pos="7408" userDrawn="1">
           <p15:clr>
             <a:srgbClr val="A4A3A4"/>
           </p15:clr>
         </p15:guide>
-        <p15:guide id="5" pos="2903">
+        <p15:guide id="5" pos="3871" userDrawn="1">
           <p15:clr>
             <a:srgbClr val="A4A3A4"/>
           </p15:clr>
         </p15:guide>
-        <p15:guide id="6" orient="horz" pos="700">
+        <p15:guide id="6" orient="horz" pos="700" userDrawn="1">
           <p15:clr>
             <a:srgbClr val="A4A3A4"/>
           </p15:clr>
         </p15:guide>
-        <p15:guide id="7" orient="horz" pos="4119">
+        <p15:guide id="7" orient="horz" pos="4119" userDrawn="1">
           <p15:clr>
             <a:srgbClr val="A4A3A4"/>
           </p15:clr>
         </p15:guide>
-        <p15:guide id="8" pos="311">
+        <p15:guide id="8" pos="415" userDrawn="1">
           <p15:clr>
             <a:srgbClr val="A4A3A4"/>
           </p15:clr>
         </p15:guide>
-        <p15:guide id="9" pos="5501">
+        <p15:guide id="9" pos="7335" userDrawn="1">
           <p15:clr>
             <a:srgbClr val="A4A3A4"/>
           </p15:clr>
         </p15:guide>
-        <p15:guide id="10" orient="horz" pos="462">
+        <p15:guide id="10" orient="horz" pos="462" userDrawn="1">
           <p15:clr>
             <a:srgbClr val="A4A3A4"/>
           </p15:clr>
         </p15:guide>
-        <p15:guide id="11" pos="77">
+        <p15:guide id="11" pos="103" userDrawn="1">
           <p15:clr>
             <a:srgbClr val="A4A3A4"/>
           </p15:clr>
         </p15:guide>
-        <p15:guide id="12" pos="72">
+        <p15:guide id="12" pos="96" userDrawn="1">
           <p15:clr>
             <a:srgbClr val="A4A3A4"/>
           </p15:clr>
         </p15:guide>
-        <p15:guide id="13" orient="horz" pos="2">
+        <p15:guide id="13" orient="horz" pos="2" userDrawn="1">
           <p15:clr>
             <a:srgbClr val="A4A3A4"/>
           </p15:clr>
         </p15:guide>
-        <p15:guide id="14" pos="807">
+        <p15:guide id="14" pos="1076" userDrawn="1">
           <p15:clr>
             <a:srgbClr val="A4A3A4"/>
           </p15:clr>
         </p15:guide>
-        <p15:guide id="15" pos="1463">
+        <p15:guide id="15" pos="1951" userDrawn="1">
           <p15:clr>
             <a:srgbClr val="A4A3A4"/>
           </p15:clr>
         </p15:guide>
-        <p15:guide id="16" pos="2079">
+        <p15:guide id="16" pos="2772" userDrawn="1">
           <p15:clr>
             <a:srgbClr val="A4A3A4"/>
           </p15:clr>
         </p15:guide>
-        <p15:guide id="17" pos="2714">
+        <p15:guide id="17" pos="3619" userDrawn="1">
           <p15:clr>
             <a:srgbClr val="A4A3A4"/>
           </p15:clr>
         </p15:guide>
-        <p15:guide id="18" pos="3370">
+        <p15:guide id="18" pos="4493" userDrawn="1">
           <p15:clr>
             <a:srgbClr val="A4A3A4"/>
           </p15:clr>
         </p15:guide>
-        <p15:guide id="19" pos="3985">
+        <p15:guide id="19" pos="5313" userDrawn="1">
           <p15:clr>
             <a:srgbClr val="A4A3A4"/>
           </p15:clr>
         </p15:guide>
-        <p15:guide id="20" pos="4631">
+        <p15:guide id="20" pos="6175" userDrawn="1">
           <p15:clr>
             <a:srgbClr val="A4A3A4"/>
           </p15:clr>
         </p15:guide>
-        <p15:guide id="21" orient="horz" pos="581">
+        <p15:guide id="21" orient="horz" pos="581" userDrawn="1">
           <p15:clr>
             <a:srgbClr val="A4A3A4"/>
           </p15:clr>
         </p15:guide>
-        <p15:guide id="22" orient="horz" pos="3230">
+        <p15:guide id="22" orient="horz" pos="3230" userDrawn="1">
           <p15:clr>
             <a:srgbClr val="A4A3A4"/>
           </p15:clr>
         </p15:guide>
-        <p15:guide id="23" orient="horz" pos="1230">
+        <p15:guide id="23" orient="horz" pos="1230" userDrawn="1">
           <p15:clr>
             <a:srgbClr val="A4A3A4"/>
           </p15:clr>
         </p15:guide>
-        <p15:guide id="24" orient="horz">
+        <p15:guide id="24" orient="horz" userDrawn="1">
           <p15:clr>
             <a:srgbClr val="A4A3A4"/>
           </p15:clr>
         </p15:guide>
-        <p15:guide id="25" orient="horz" pos="1450">
+        <p15:guide id="25" orient="horz" pos="1450" userDrawn="1">
           <p15:clr>
             <a:srgbClr val="A4A3A4"/>
           </p15:clr>
         </p15:guide>
-        <p15:guide id="26" pos="281">
+        <p15:guide id="26" pos="375" userDrawn="1">
           <p15:clr>
             <a:srgbClr val="A4A3A4"/>
           </p15:clr>
         </p15:guide>
-        <p15:guide id="27" orient="horz" pos="3095">
+        <p15:guide id="27" orient="horz" pos="3095" userDrawn="1">
           <p15:clr>
             <a:srgbClr val="A4A3A4"/>
           </p15:clr>
         </p15:guide>
-        <p15:guide id="28" orient="horz" pos="2372">
+        <p15:guide id="28" orient="horz" pos="2372" userDrawn="1">
           <p15:clr>
             <a:srgbClr val="A4A3A4"/>
           </p15:clr>
         </p15:guide>
-        <p15:guide id="29" orient="horz" pos="4159">
+        <p15:guide id="29" orient="horz" pos="4159" userDrawn="1">
           <p15:clr>
             <a:srgbClr val="A4A3A4"/>
           </p15:clr>
         </p15:guide>
-        <p15:guide id="30" pos="313">
+        <p15:guide id="30" pos="417" userDrawn="1">
           <p15:clr>
             <a:srgbClr val="A4A3A4"/>
           </p15:clr>
         </p15:guide>
-        <p15:guide id="31" pos="1655">
+        <p15:guide id="31" pos="2207" userDrawn="1">
           <p15:clr>
             <a:srgbClr val="A4A3A4"/>
           </p15:clr>
         </p15:guide>
-        <p15:guide id="32" pos="5727">
+        <p15:guide id="32" pos="7636" userDrawn="1">
           <p15:clr>
             <a:srgbClr val="A4A3A4"/>
           </p15:clr>
         </p15:guide>
-        <p15:guide id="33" orient="horz" pos="632">
+        <p15:guide id="33" orient="horz" pos="632" userDrawn="1">
           <p15:clr>
             <a:srgbClr val="A4A3A4"/>
           </p15:clr>
         </p15:guide>
-        <p15:guide id="34" orient="horz" pos="1461">
+        <p15:guide id="34" orient="horz" pos="1461" userDrawn="1">
           <p15:clr>
             <a:srgbClr val="A4A3A4"/>
           </p15:clr>
         </p15:guide>
-        <p15:guide id="35" orient="horz" pos="2262">
+        <p15:guide id="35" orient="horz" pos="2262" userDrawn="1">
           <p15:clr>
             <a:srgbClr val="A4A3A4"/>
           </p15:clr>
         </p15:guide>
-        <p15:guide id="36" orient="horz" pos="3072">
+        <p15:guide id="36" orient="horz" pos="3072" userDrawn="1">
           <p15:clr>
             <a:srgbClr val="A4A3A4"/>
           </p15:clr>
         </p15:guide>
-        <p15:guide id="37" pos="765">
+        <p15:guide id="37" pos="1020" userDrawn="1">
           <p15:clr>
             <a:srgbClr val="A4A3A4"/>
           </p15:clr>
         </p15:guide>
-        <p15:guide id="38" pos="5580">
+        <p15:guide id="38" pos="7440" userDrawn="1">
           <p15:clr>
             <a:srgbClr val="A4A3A4"/>
           </p15:clr>
         </p15:guide>
-        <p15:guide id="39" pos="5039">
+        <p15:guide id="39" pos="6719" userDrawn="1">
           <p15:clr>
             <a:srgbClr val="A4A3A4"/>
           </p15:clr>
         </p15:guide>
-        <p15:guide id="40" orient="horz" pos="621">
+        <p15:guide id="40" orient="horz" pos="621" userDrawn="1">
           <p15:clr>
             <a:srgbClr val="A4A3A4"/>
           </p15:clr>
         </p15:guide>
-        <p15:guide id="41" orient="horz" pos="38">
+        <p15:guide id="41" orient="horz" pos="38" userDrawn="1">
           <p15:clr>
             <a:srgbClr val="A4A3A4"/>
           </p15:clr>
         </p15:guide>
-        <p15:guide id="42" orient="horz" pos="4319">
+        <p15:guide id="42" orient="horz" pos="4319" userDrawn="1">
           <p15:clr>
             <a:srgbClr val="A4A3A4"/>
           </p15:clr>
         </p15:guide>
-        <p15:guide id="43" orient="horz" pos="39">
+        <p15:guide id="43" orient="horz" pos="39" userDrawn="1">
           <p15:clr>
             <a:srgbClr val="A4A3A4"/>
           </p15:clr>
         </p15:guide>
-        <p15:guide id="44" pos="3367">
+        <p15:guide id="44" pos="4489" userDrawn="1">
           <p15:clr>
             <a:srgbClr val="A4A3A4"/>
           </p15:clr>
         </p15:guide>
-        <p15:guide id="45" pos="4655">
+        <p15:guide id="45" pos="6207" userDrawn="1">
           <p15:clr>
             <a:srgbClr val="A4A3A4"/>
           </p15:clr>
         </p15:guide>
-        <p15:guide id="46" orient="horz" pos="1">
+        <p15:guide id="46" orient="horz" pos="1" userDrawn="1">
           <p15:clr>
             <a:srgbClr val="A4A3A4"/>
           </p15:clr>
         </p15:guide>
-        <p15:guide id="47" orient="horz" pos="4067">
+        <p15:guide id="47" orient="horz" pos="4067" userDrawn="1">
           <p15:clr>
             <a:srgbClr val="A4A3A4"/>
           </p15:clr>
         </p15:guide>
-        <p15:guide id="48" orient="horz" pos="601">
+        <p15:guide id="48" orient="horz" pos="601" userDrawn="1">
           <p15:clr>
             <a:srgbClr val="A4A3A4"/>
           </p15:clr>
         </p15:guide>
-        <p15:guide id="49" pos="149">
+        <p15:guide id="49" pos="199" userDrawn="1">
           <p15:clr>
             <a:srgbClr val="A4A3A4"/>
           </p15:clr>
         </p15:guide>
-        <p15:guide id="50" pos="5589">
+        <p15:guide id="50" pos="7452" userDrawn="1">
           <p15:clr>
             <a:srgbClr val="A4A3A4"/>
           </p15:clr>
         </p15:guide>
-        <p15:guide id="51" pos="3227">
+        <p15:guide id="51" pos="4303" userDrawn="1">
           <p15:clr>
             <a:srgbClr val="A4A3A4"/>
           </p15:clr>
@@ -9448,8 +9449,8 @@
         </p:nvSpPr>
         <p:spPr bwMode="auto">
           <a:xfrm>
-            <a:off x="993775" y="768350"/>
-            <a:ext cx="5116513" cy="3836988"/>
+            <a:off x="142875" y="768350"/>
+            <a:ext cx="6818313" cy="3836988"/>
           </a:xfrm>
           <a:prstGeom prst="rect">
             <a:avLst/>
@@ -9472,7 +9473,7 @@
               </a14:hiddenFill>
             </a:ext>
             <a:ext uri="{FAA26D3D-D897-4be2-8F04-BA451C77F1D7}">
-              <ma14:placeholderFlag xmlns="" xmlns:ma14="http://schemas.microsoft.com/office/mac/drawingml/2011/main" val="1"/>
+              <ma14:placeholderFlag xmlns:ma14="http://schemas.microsoft.com/office/mac/drawingml/2011/main" xmlns="" val="1"/>
             </a:ext>
           </a:extLst>
         </p:spPr>
@@ -9821,6 +9822,10 @@
           </p:nvPr>
         </p:nvSpPr>
         <p:spPr>
+          <a:xfrm>
+            <a:off x="142875" y="768350"/>
+            <a:ext cx="6818313" cy="3836988"/>
+          </a:xfrm>
           <a:ln/>
         </p:spPr>
       </p:sp>
@@ -9856,7 +9861,7 @@
               </a14:hiddenLine>
             </a:ext>
             <a:ext uri="{FAA26D3D-D897-4be2-8F04-BA451C77F1D7}">
-              <ma14:placeholderFlag xmlns="" xmlns:ma14="http://schemas.microsoft.com/office/mac/drawingml/2011/main" val="1"/>
+              <ma14:placeholderFlag xmlns:ma14="http://schemas.microsoft.com/office/mac/drawingml/2011/main" xmlns="" val="1"/>
             </a:ext>
           </a:extLst>
         </p:spPr>
@@ -9933,7 +9938,12 @@
             <p:ph type="sldImg"/>
           </p:nvPr>
         </p:nvSpPr>
-        <p:spPr/>
+        <p:spPr>
+          <a:xfrm>
+            <a:off x="142875" y="768350"/>
+            <a:ext cx="6818313" cy="3836988"/>
+          </a:xfrm>
+        </p:spPr>
       </p:sp>
       <p:sp>
         <p:nvSpPr>
@@ -9950,17 +9960,14 @@
           <a:bodyPr/>
           <a:lstStyle/>
           <a:p>
-            <a:r>
-              <a:rPr lang="zh-CN" altLang="en-US" dirty="0"/>
-              <a:t>画圈部分代表什么？</a:t>
-            </a:r>
+            <a:endParaRPr lang="zh-CN" altLang="en-US"/>
           </a:p>
         </p:txBody>
       </p:sp>
     </p:spTree>
     <p:extLst>
       <p:ext uri="{BB962C8B-B14F-4D97-AF65-F5344CB8AC3E}">
-        <p14:creationId xmlns:p14="http://schemas.microsoft.com/office/powerpoint/2010/main" val="316619528"/>
+        <p14:creationId xmlns:p14="http://schemas.microsoft.com/office/powerpoint/2010/main" val="162311528"/>
       </p:ext>
     </p:extLst>
   </p:cSld>
@@ -9997,7 +10004,12 @@
             <p:ph type="sldImg"/>
           </p:nvPr>
         </p:nvSpPr>
-        <p:spPr/>
+        <p:spPr>
+          <a:xfrm>
+            <a:off x="142875" y="768350"/>
+            <a:ext cx="6818313" cy="3836988"/>
+          </a:xfrm>
+        </p:spPr>
       </p:sp>
       <p:sp>
         <p:nvSpPr>
@@ -10014,14 +10026,17 @@
           <a:bodyPr/>
           <a:lstStyle/>
           <a:p>
-            <a:endParaRPr lang="zh-CN" altLang="en-US" dirty="0"/>
+            <a:r>
+              <a:rPr lang="zh-CN" altLang="en-US" dirty="0"/>
+              <a:t>画圈部分代表什么？</a:t>
+            </a:r>
           </a:p>
         </p:txBody>
       </p:sp>
     </p:spTree>
     <p:extLst>
       <p:ext uri="{BB962C8B-B14F-4D97-AF65-F5344CB8AC3E}">
-        <p14:creationId xmlns:p14="http://schemas.microsoft.com/office/powerpoint/2010/main" val="2756499995"/>
+        <p14:creationId xmlns:p14="http://schemas.microsoft.com/office/powerpoint/2010/main" val="316619528"/>
       </p:ext>
     </p:extLst>
   </p:cSld>
@@ -10058,7 +10073,12 @@
             <p:ph type="sldImg"/>
           </p:nvPr>
         </p:nvSpPr>
-        <p:spPr/>
+        <p:spPr>
+          <a:xfrm>
+            <a:off x="142875" y="768350"/>
+            <a:ext cx="6818313" cy="3836988"/>
+          </a:xfrm>
+        </p:spPr>
       </p:sp>
       <p:sp>
         <p:nvSpPr>
@@ -10082,7 +10102,7 @@
     </p:spTree>
     <p:extLst>
       <p:ext uri="{BB962C8B-B14F-4D97-AF65-F5344CB8AC3E}">
-        <p14:creationId xmlns:p14="http://schemas.microsoft.com/office/powerpoint/2010/main" val="410211701"/>
+        <p14:creationId xmlns:p14="http://schemas.microsoft.com/office/powerpoint/2010/main" val="2756499995"/>
       </p:ext>
     </p:extLst>
   </p:cSld>
@@ -10119,7 +10139,78 @@
             <p:ph type="sldImg"/>
           </p:nvPr>
         </p:nvSpPr>
+        <p:spPr>
+          <a:xfrm>
+            <a:off x="142875" y="768350"/>
+            <a:ext cx="6818313" cy="3836988"/>
+          </a:xfrm>
+        </p:spPr>
+      </p:sp>
+      <p:sp>
+        <p:nvSpPr>
+          <p:cNvPr id="3" name="备注占位符 2"/>
+          <p:cNvSpPr>
+            <a:spLocks noGrp="1"/>
+          </p:cNvSpPr>
+          <p:nvPr>
+            <p:ph type="body" idx="1"/>
+          </p:nvPr>
+        </p:nvSpPr>
         <p:spPr/>
+        <p:txBody>
+          <a:bodyPr/>
+          <a:lstStyle/>
+          <a:p>
+            <a:endParaRPr lang="zh-CN" altLang="en-US" dirty="0"/>
+          </a:p>
+        </p:txBody>
+      </p:sp>
+    </p:spTree>
+    <p:extLst>
+      <p:ext uri="{BB962C8B-B14F-4D97-AF65-F5344CB8AC3E}">
+        <p14:creationId xmlns:p14="http://schemas.microsoft.com/office/powerpoint/2010/main" val="410211701"/>
+      </p:ext>
+    </p:extLst>
+  </p:cSld>
+  <p:clrMapOvr>
+    <a:masterClrMapping/>
+  </p:clrMapOvr>
+</p:notes>
+</file>
+
+<file path=ppt/notesSlides/notesSlide14.xml><?xml version="1.0" encoding="utf-8"?>
+<p:notes xmlns:a="http://schemas.openxmlformats.org/drawingml/2006/main" xmlns:r="http://schemas.openxmlformats.org/officeDocument/2006/relationships" xmlns:p="http://schemas.openxmlformats.org/presentationml/2006/main">
+  <p:cSld>
+    <p:spTree>
+      <p:nvGrpSpPr>
+        <p:cNvPr id="1" name=""/>
+        <p:cNvGrpSpPr/>
+        <p:nvPr/>
+      </p:nvGrpSpPr>
+      <p:grpSpPr>
+        <a:xfrm>
+          <a:off x="0" y="0"/>
+          <a:ext cx="0" cy="0"/>
+          <a:chOff x="0" y="0"/>
+          <a:chExt cx="0" cy="0"/>
+        </a:xfrm>
+      </p:grpSpPr>
+      <p:sp>
+        <p:nvSpPr>
+          <p:cNvPr id="2" name="幻灯片图像占位符 1"/>
+          <p:cNvSpPr>
+            <a:spLocks noGrp="1" noRot="1" noChangeAspect="1"/>
+          </p:cNvSpPr>
+          <p:nvPr>
+            <p:ph type="sldImg"/>
+          </p:nvPr>
+        </p:nvSpPr>
+        <p:spPr>
+          <a:xfrm>
+            <a:off x="142875" y="768350"/>
+            <a:ext cx="6818313" cy="3836988"/>
+          </a:xfrm>
+        </p:spPr>
       </p:sp>
       <p:sp>
         <p:nvSpPr>
@@ -10154,6 +10245,93 @@
 </file>
 
 <file path=ppt/notesSlides/notesSlide2.xml><?xml version="1.0" encoding="utf-8"?>
+<p:notes xmlns:a="http://schemas.openxmlformats.org/drawingml/2006/main" xmlns:r="http://schemas.openxmlformats.org/officeDocument/2006/relationships" xmlns:p="http://schemas.openxmlformats.org/presentationml/2006/main">
+  <p:cSld>
+    <p:spTree>
+      <p:nvGrpSpPr>
+        <p:cNvPr id="1" name="">
+          <a:extLst>
+            <a:ext uri="{FF2B5EF4-FFF2-40B4-BE49-F238E27FC236}">
+              <a16:creationId xmlns:a16="http://schemas.microsoft.com/office/drawing/2014/main" id="{52404CDE-ACAC-BC76-18FE-858E5D617C11}"/>
+            </a:ext>
+          </a:extLst>
+        </p:cNvPr>
+        <p:cNvGrpSpPr/>
+        <p:nvPr/>
+      </p:nvGrpSpPr>
+      <p:grpSpPr>
+        <a:xfrm>
+          <a:off x="0" y="0"/>
+          <a:ext cx="0" cy="0"/>
+          <a:chOff x="0" y="0"/>
+          <a:chExt cx="0" cy="0"/>
+        </a:xfrm>
+      </p:grpSpPr>
+      <p:sp>
+        <p:nvSpPr>
+          <p:cNvPr id="2" name="幻灯片图像占位符 1">
+            <a:extLst>
+              <a:ext uri="{FF2B5EF4-FFF2-40B4-BE49-F238E27FC236}">
+                <a16:creationId xmlns:a16="http://schemas.microsoft.com/office/drawing/2014/main" id="{BA4BBDEB-0257-4360-C34B-A2E691BABFB3}"/>
+              </a:ext>
+            </a:extLst>
+          </p:cNvPr>
+          <p:cNvSpPr>
+            <a:spLocks noGrp="1" noRot="1" noChangeAspect="1"/>
+          </p:cNvSpPr>
+          <p:nvPr>
+            <p:ph type="sldImg"/>
+          </p:nvPr>
+        </p:nvSpPr>
+        <p:spPr>
+          <a:xfrm>
+            <a:off x="142875" y="768350"/>
+            <a:ext cx="6818313" cy="3836988"/>
+          </a:xfrm>
+        </p:spPr>
+      </p:sp>
+      <p:sp>
+        <p:nvSpPr>
+          <p:cNvPr id="3" name="备注占位符 2">
+            <a:extLst>
+              <a:ext uri="{FF2B5EF4-FFF2-40B4-BE49-F238E27FC236}">
+                <a16:creationId xmlns:a16="http://schemas.microsoft.com/office/drawing/2014/main" id="{660BC714-35E0-A306-123E-53EC3A4C963C}"/>
+              </a:ext>
+            </a:extLst>
+          </p:cNvPr>
+          <p:cNvSpPr>
+            <a:spLocks noGrp="1"/>
+          </p:cNvSpPr>
+          <p:nvPr>
+            <p:ph type="body" idx="1"/>
+          </p:nvPr>
+        </p:nvSpPr>
+        <p:spPr/>
+        <p:txBody>
+          <a:bodyPr/>
+          <a:lstStyle/>
+          <a:p>
+            <a:r>
+              <a:rPr lang="zh-CN" altLang="en-US" dirty="0"/>
+              <a:t>画圈的地方代表什么？</a:t>
+            </a:r>
+          </a:p>
+        </p:txBody>
+      </p:sp>
+    </p:spTree>
+    <p:extLst>
+      <p:ext uri="{BB962C8B-B14F-4D97-AF65-F5344CB8AC3E}">
+        <p14:creationId xmlns:p14="http://schemas.microsoft.com/office/powerpoint/2010/main" val="982981211"/>
+      </p:ext>
+    </p:extLst>
+  </p:cSld>
+  <p:clrMapOvr>
+    <a:masterClrMapping/>
+  </p:clrMapOvr>
+</p:notes>
+</file>
+
+<file path=ppt/notesSlides/notesSlide3.xml><?xml version="1.0" encoding="utf-8"?>
 <p:notes xmlns:a="http://schemas.openxmlformats.org/drawingml/2006/main" xmlns:r="http://schemas.openxmlformats.org/officeDocument/2006/relationships" xmlns:p="http://schemas.openxmlformats.org/presentationml/2006/main">
   <p:cSld>
     <p:spTree>
@@ -10192,7 +10370,12 @@
             <p:ph type="sldImg"/>
           </p:nvPr>
         </p:nvSpPr>
-        <p:spPr/>
+        <p:spPr>
+          <a:xfrm>
+            <a:off x="142875" y="768350"/>
+            <a:ext cx="6818313" cy="3836988"/>
+          </a:xfrm>
+        </p:spPr>
       </p:sp>
       <p:sp>
         <p:nvSpPr>
@@ -10247,7 +10430,7 @@
                 </a:solidFill>
               </a:rPr>
               <a:pPr/>
-              <a:t>2</a:t>
+              <a:t>3</a:t>
             </a:fld>
             <a:endParaRPr lang="zh-CN" altLang="en-US">
               <a:solidFill>
@@ -10270,7 +10453,7 @@
 </p:notes>
 </file>
 
-<file path=ppt/notesSlides/notesSlide3.xml><?xml version="1.0" encoding="utf-8"?>
+<file path=ppt/notesSlides/notesSlide4.xml><?xml version="1.0" encoding="utf-8"?>
 <p:notes xmlns:a="http://schemas.openxmlformats.org/drawingml/2006/main" xmlns:r="http://schemas.openxmlformats.org/officeDocument/2006/relationships" xmlns:p="http://schemas.openxmlformats.org/presentationml/2006/main">
   <p:cSld>
     <p:spTree>
@@ -10309,7 +10492,12 @@
             <p:ph type="sldImg"/>
           </p:nvPr>
         </p:nvSpPr>
-        <p:spPr/>
+        <p:spPr>
+          <a:xfrm>
+            <a:off x="142875" y="768350"/>
+            <a:ext cx="6818313" cy="3836988"/>
+          </a:xfrm>
+        </p:spPr>
       </p:sp>
       <p:sp>
         <p:nvSpPr>
@@ -10340,70 +10528,6 @@
     <p:extLst>
       <p:ext uri="{BB962C8B-B14F-4D97-AF65-F5344CB8AC3E}">
         <p14:creationId xmlns:p14="http://schemas.microsoft.com/office/powerpoint/2010/main" val="1365451815"/>
-      </p:ext>
-    </p:extLst>
-  </p:cSld>
-  <p:clrMapOvr>
-    <a:masterClrMapping/>
-  </p:clrMapOvr>
-</p:notes>
-</file>
-
-<file path=ppt/notesSlides/notesSlide4.xml><?xml version="1.0" encoding="utf-8"?>
-<p:notes xmlns:a="http://schemas.openxmlformats.org/drawingml/2006/main" xmlns:r="http://schemas.openxmlformats.org/officeDocument/2006/relationships" xmlns:p="http://schemas.openxmlformats.org/presentationml/2006/main">
-  <p:cSld>
-    <p:spTree>
-      <p:nvGrpSpPr>
-        <p:cNvPr id="1" name=""/>
-        <p:cNvGrpSpPr/>
-        <p:nvPr/>
-      </p:nvGrpSpPr>
-      <p:grpSpPr>
-        <a:xfrm>
-          <a:off x="0" y="0"/>
-          <a:ext cx="0" cy="0"/>
-          <a:chOff x="0" y="0"/>
-          <a:chExt cx="0" cy="0"/>
-        </a:xfrm>
-      </p:grpSpPr>
-      <p:sp>
-        <p:nvSpPr>
-          <p:cNvPr id="2" name="幻灯片图像占位符 1"/>
-          <p:cNvSpPr>
-            <a:spLocks noGrp="1" noRot="1" noChangeAspect="1"/>
-          </p:cNvSpPr>
-          <p:nvPr>
-            <p:ph type="sldImg"/>
-          </p:nvPr>
-        </p:nvSpPr>
-        <p:spPr/>
-      </p:sp>
-      <p:sp>
-        <p:nvSpPr>
-          <p:cNvPr id="3" name="备注占位符 2"/>
-          <p:cNvSpPr>
-            <a:spLocks noGrp="1"/>
-          </p:cNvSpPr>
-          <p:nvPr>
-            <p:ph type="body" idx="1"/>
-          </p:nvPr>
-        </p:nvSpPr>
-        <p:spPr/>
-        <p:txBody>
-          <a:bodyPr/>
-          <a:lstStyle/>
-          <a:p>
-            <a:r>
-              <a:rPr lang="zh-CN" altLang="en-US" dirty="0"/>
-              <a:t>画圈的地方代表什么？</a:t>
-            </a:r>
-          </a:p>
-        </p:txBody>
-      </p:sp>
-    </p:spTree>
-    <p:extLst>
-      <p:ext uri="{BB962C8B-B14F-4D97-AF65-F5344CB8AC3E}">
-        <p14:creationId xmlns:p14="http://schemas.microsoft.com/office/powerpoint/2010/main" val="531973046"/>
       </p:ext>
     </p:extLst>
   </p:cSld>
@@ -10440,7 +10564,12 @@
             <p:ph type="sldImg"/>
           </p:nvPr>
         </p:nvSpPr>
-        <p:spPr/>
+        <p:spPr>
+          <a:xfrm>
+            <a:off x="142875" y="768350"/>
+            <a:ext cx="6818313" cy="3836988"/>
+          </a:xfrm>
+        </p:spPr>
       </p:sp>
       <p:sp>
         <p:nvSpPr>
@@ -10457,6 +10586,75 @@
           <a:bodyPr/>
           <a:lstStyle/>
           <a:p>
+            <a:r>
+              <a:rPr lang="zh-CN" altLang="en-US" dirty="0"/>
+              <a:t>画圈的地方代表什么？</a:t>
+            </a:r>
+          </a:p>
+        </p:txBody>
+      </p:sp>
+    </p:spTree>
+    <p:extLst>
+      <p:ext uri="{BB962C8B-B14F-4D97-AF65-F5344CB8AC3E}">
+        <p14:creationId xmlns:p14="http://schemas.microsoft.com/office/powerpoint/2010/main" val="531973046"/>
+      </p:ext>
+    </p:extLst>
+  </p:cSld>
+  <p:clrMapOvr>
+    <a:masterClrMapping/>
+  </p:clrMapOvr>
+</p:notes>
+</file>
+
+<file path=ppt/notesSlides/notesSlide6.xml><?xml version="1.0" encoding="utf-8"?>
+<p:notes xmlns:a="http://schemas.openxmlformats.org/drawingml/2006/main" xmlns:r="http://schemas.openxmlformats.org/officeDocument/2006/relationships" xmlns:p="http://schemas.openxmlformats.org/presentationml/2006/main">
+  <p:cSld>
+    <p:spTree>
+      <p:nvGrpSpPr>
+        <p:cNvPr id="1" name=""/>
+        <p:cNvGrpSpPr/>
+        <p:nvPr/>
+      </p:nvGrpSpPr>
+      <p:grpSpPr>
+        <a:xfrm>
+          <a:off x="0" y="0"/>
+          <a:ext cx="0" cy="0"/>
+          <a:chOff x="0" y="0"/>
+          <a:chExt cx="0" cy="0"/>
+        </a:xfrm>
+      </p:grpSpPr>
+      <p:sp>
+        <p:nvSpPr>
+          <p:cNvPr id="2" name="幻灯片图像占位符 1"/>
+          <p:cNvSpPr>
+            <a:spLocks noGrp="1" noRot="1" noChangeAspect="1"/>
+          </p:cNvSpPr>
+          <p:nvPr>
+            <p:ph type="sldImg"/>
+          </p:nvPr>
+        </p:nvSpPr>
+        <p:spPr>
+          <a:xfrm>
+            <a:off x="142875" y="768350"/>
+            <a:ext cx="6818313" cy="3836988"/>
+          </a:xfrm>
+        </p:spPr>
+      </p:sp>
+      <p:sp>
+        <p:nvSpPr>
+          <p:cNvPr id="3" name="备注占位符 2"/>
+          <p:cNvSpPr>
+            <a:spLocks noGrp="1"/>
+          </p:cNvSpPr>
+          <p:nvPr>
+            <p:ph type="body" idx="1"/>
+          </p:nvPr>
+        </p:nvSpPr>
+        <p:spPr/>
+        <p:txBody>
+          <a:bodyPr/>
+          <a:lstStyle/>
+          <a:p>
             <a:endParaRPr lang="zh-CN" altLang="en-US" dirty="0"/>
           </a:p>
         </p:txBody>
@@ -10474,7 +10672,7 @@
 </p:notes>
 </file>
 
-<file path=ppt/notesSlides/notesSlide6.xml><?xml version="1.0" encoding="utf-8"?>
+<file path=ppt/notesSlides/notesSlide7.xml><?xml version="1.0" encoding="utf-8"?>
 <p:notes xmlns:a="http://schemas.openxmlformats.org/drawingml/2006/main" xmlns:r="http://schemas.openxmlformats.org/officeDocument/2006/relationships" xmlns:p="http://schemas.openxmlformats.org/presentationml/2006/main">
   <p:cSld>
     <p:spTree>
@@ -10513,7 +10711,12 @@
             <p:ph type="sldImg"/>
           </p:nvPr>
         </p:nvSpPr>
-        <p:spPr/>
+        <p:spPr>
+          <a:xfrm>
+            <a:off x="142875" y="768350"/>
+            <a:ext cx="6818313" cy="3836988"/>
+          </a:xfrm>
+        </p:spPr>
       </p:sp>
       <p:sp>
         <p:nvSpPr>
@@ -10553,7 +10756,7 @@
 </p:notes>
 </file>
 
-<file path=ppt/notesSlides/notesSlide7.xml><?xml version="1.0" encoding="utf-8"?>
+<file path=ppt/notesSlides/notesSlide8.xml><?xml version="1.0" encoding="utf-8"?>
 <p:notes xmlns:a="http://schemas.openxmlformats.org/drawingml/2006/main" xmlns:r="http://schemas.openxmlformats.org/officeDocument/2006/relationships" xmlns:p="http://schemas.openxmlformats.org/presentationml/2006/main">
   <p:cSld>
     <p:spTree>
@@ -10592,7 +10795,12 @@
             <p:ph type="sldImg"/>
           </p:nvPr>
         </p:nvSpPr>
-        <p:spPr/>
+        <p:spPr>
+          <a:xfrm>
+            <a:off x="142875" y="768350"/>
+            <a:ext cx="6818313" cy="3836988"/>
+          </a:xfrm>
+        </p:spPr>
       </p:sp>
       <p:sp>
         <p:nvSpPr>
@@ -10643,7 +10851,7 @@
 </p:notes>
 </file>
 
-<file path=ppt/notesSlides/notesSlide8.xml><?xml version="1.0" encoding="utf-8"?>
+<file path=ppt/notesSlides/notesSlide9.xml><?xml version="1.0" encoding="utf-8"?>
 <p:notes xmlns:a="http://schemas.openxmlformats.org/drawingml/2006/main" xmlns:r="http://schemas.openxmlformats.org/officeDocument/2006/relationships" xmlns:p="http://schemas.openxmlformats.org/presentationml/2006/main">
   <p:cSld>
     <p:spTree>
@@ -10682,7 +10890,12 @@
             <p:ph type="sldImg"/>
           </p:nvPr>
         </p:nvSpPr>
-        <p:spPr/>
+        <p:spPr>
+          <a:xfrm>
+            <a:off x="142875" y="768350"/>
+            <a:ext cx="6818313" cy="3836988"/>
+          </a:xfrm>
+        </p:spPr>
       </p:sp>
       <p:sp>
         <p:nvSpPr>
@@ -10713,67 +10926,6 @@
     <p:extLst>
       <p:ext uri="{BB962C8B-B14F-4D97-AF65-F5344CB8AC3E}">
         <p14:creationId xmlns:p14="http://schemas.microsoft.com/office/powerpoint/2010/main" val="3786053412"/>
-      </p:ext>
-    </p:extLst>
-  </p:cSld>
-  <p:clrMapOvr>
-    <a:masterClrMapping/>
-  </p:clrMapOvr>
-</p:notes>
-</file>
-
-<file path=ppt/notesSlides/notesSlide9.xml><?xml version="1.0" encoding="utf-8"?>
-<p:notes xmlns:a="http://schemas.openxmlformats.org/drawingml/2006/main" xmlns:r="http://schemas.openxmlformats.org/officeDocument/2006/relationships" xmlns:p="http://schemas.openxmlformats.org/presentationml/2006/main">
-  <p:cSld>
-    <p:spTree>
-      <p:nvGrpSpPr>
-        <p:cNvPr id="1" name=""/>
-        <p:cNvGrpSpPr/>
-        <p:nvPr/>
-      </p:nvGrpSpPr>
-      <p:grpSpPr>
-        <a:xfrm>
-          <a:off x="0" y="0"/>
-          <a:ext cx="0" cy="0"/>
-          <a:chOff x="0" y="0"/>
-          <a:chExt cx="0" cy="0"/>
-        </a:xfrm>
-      </p:grpSpPr>
-      <p:sp>
-        <p:nvSpPr>
-          <p:cNvPr id="2" name="幻灯片图像占位符 1"/>
-          <p:cNvSpPr>
-            <a:spLocks noGrp="1" noRot="1" noChangeAspect="1"/>
-          </p:cNvSpPr>
-          <p:nvPr>
-            <p:ph type="sldImg"/>
-          </p:nvPr>
-        </p:nvSpPr>
-        <p:spPr/>
-      </p:sp>
-      <p:sp>
-        <p:nvSpPr>
-          <p:cNvPr id="3" name="备注占位符 2"/>
-          <p:cNvSpPr>
-            <a:spLocks noGrp="1"/>
-          </p:cNvSpPr>
-          <p:nvPr>
-            <p:ph type="body" idx="1"/>
-          </p:nvPr>
-        </p:nvSpPr>
-        <p:spPr/>
-        <p:txBody>
-          <a:bodyPr/>
-          <a:lstStyle/>
-          <a:p>
-            <a:endParaRPr lang="zh-CN" altLang="en-US"/>
-          </a:p>
-        </p:txBody>
-      </p:sp>
-    </p:spTree>
-    <p:extLst>
-      <p:ext uri="{BB962C8B-B14F-4D97-AF65-F5344CB8AC3E}">
-        <p14:creationId xmlns:p14="http://schemas.microsoft.com/office/powerpoint/2010/main" val="162311528"/>
       </p:ext>
     </p:extLst>
   </p:cSld>
@@ -10819,7 +10971,7 @@
         <p:spPr bwMode="auto">
           <a:xfrm>
             <a:off x="0" y="2276475"/>
-            <a:ext cx="9144000" cy="2665413"/>
+            <a:ext cx="12192000" cy="369332"/>
           </a:xfrm>
           <a:prstGeom prst="rect">
             <a:avLst/>
@@ -10946,7 +11098,7 @@
             <a:pPr>
               <a:defRPr/>
             </a:pPr>
-            <a:endParaRPr kumimoji="0" lang="zh-CN" altLang="en-US">
+            <a:endParaRPr kumimoji="0" lang="zh-CN" altLang="en-US" sz="2400">
               <a:solidFill>
                 <a:prstClr val="white"/>
               </a:solidFill>
@@ -10966,7 +11118,7 @@
         <p:spPr bwMode="auto">
           <a:xfrm>
             <a:off x="0" y="2203450"/>
-            <a:ext cx="9144000" cy="71438"/>
+            <a:ext cx="12192000" cy="369332"/>
           </a:xfrm>
           <a:prstGeom prst="rect">
             <a:avLst/>
@@ -11093,7 +11245,7 @@
             <a:pPr>
               <a:defRPr/>
             </a:pPr>
-            <a:endParaRPr kumimoji="0" lang="zh-CN" altLang="en-US">
+            <a:endParaRPr kumimoji="0" lang="zh-CN" altLang="en-US" sz="2400">
               <a:solidFill>
                 <a:prstClr val="white"/>
               </a:solidFill>
@@ -11113,7 +11265,7 @@
         <p:spPr bwMode="auto">
           <a:xfrm>
             <a:off x="0" y="4870450"/>
-            <a:ext cx="9144000" cy="71438"/>
+            <a:ext cx="12192000" cy="369332"/>
           </a:xfrm>
           <a:prstGeom prst="rect">
             <a:avLst/>
@@ -11240,7 +11392,7 @@
             <a:pPr>
               <a:defRPr/>
             </a:pPr>
-            <a:endParaRPr kumimoji="0" lang="zh-CN" altLang="en-US">
+            <a:endParaRPr kumimoji="0" lang="zh-CN" altLang="en-US" sz="2400">
               <a:solidFill>
                 <a:prstClr val="white"/>
               </a:solidFill>
@@ -11261,8 +11413,8 @@
         </p:nvSpPr>
         <p:spPr>
           <a:xfrm>
-            <a:off x="1828800" y="1828800"/>
-            <a:ext cx="6934200" cy="2362200"/>
+            <a:off x="2438400" y="1828800"/>
+            <a:ext cx="9245600" cy="2362200"/>
           </a:xfrm>
           <a:noFill/>
         </p:spPr>
@@ -11293,8 +11445,8 @@
         </p:nvSpPr>
         <p:spPr>
           <a:xfrm>
-            <a:off x="1828800" y="4572000"/>
-            <a:ext cx="6934200" cy="1295400"/>
+            <a:off x="2438400" y="4572000"/>
+            <a:ext cx="9245600" cy="1295400"/>
           </a:xfrm>
           <a:prstGeom prst="rect">
             <a:avLst/>
@@ -11407,8 +11559,8 @@
         </p:nvSpPr>
         <p:spPr>
           <a:xfrm>
-            <a:off x="287338" y="981075"/>
-            <a:ext cx="7772400" cy="5184775"/>
+            <a:off x="383117" y="981076"/>
+            <a:ext cx="10363200" cy="5184775"/>
           </a:xfrm>
           <a:prstGeom prst="rect">
             <a:avLst/>
@@ -11522,8 +11674,8 @@
         </p:nvSpPr>
         <p:spPr>
           <a:xfrm>
-            <a:off x="6858000" y="-26988"/>
-            <a:ext cx="2286000" cy="6192838"/>
+            <a:off x="9144000" y="-26988"/>
+            <a:ext cx="3048000" cy="6192838"/>
           </a:xfrm>
         </p:spPr>
         <p:txBody>
@@ -11550,7 +11702,7 @@
         <p:spPr>
           <a:xfrm>
             <a:off x="0" y="-26988"/>
-            <a:ext cx="6705600" cy="6192838"/>
+            <a:ext cx="8940800" cy="6192838"/>
           </a:xfrm>
           <a:prstGeom prst="rect">
             <a:avLst/>
@@ -11665,7 +11817,7 @@
         <p:spPr>
           <a:xfrm>
             <a:off x="0" y="-26988"/>
-            <a:ext cx="9144000" cy="6192838"/>
+            <a:ext cx="12192000" cy="6192838"/>
           </a:xfrm>
           <a:prstGeom prst="rect">
             <a:avLst/>
@@ -11780,7 +11932,7 @@
         <p:spPr>
           <a:xfrm>
             <a:off x="0" y="-26988"/>
-            <a:ext cx="9144000" cy="792163"/>
+            <a:ext cx="12192000" cy="792163"/>
           </a:xfrm>
         </p:spPr>
         <p:txBody>
@@ -11806,8 +11958,8 @@
         </p:nvSpPr>
         <p:spPr>
           <a:xfrm>
-            <a:off x="685800" y="981075"/>
-            <a:ext cx="7772400" cy="5184775"/>
+            <a:off x="914400" y="981076"/>
+            <a:ext cx="10363200" cy="5184775"/>
           </a:xfrm>
           <a:prstGeom prst="rect">
             <a:avLst/>
@@ -11891,7 +12043,7 @@
         <p:spPr>
           <a:xfrm>
             <a:off x="0" y="-26988"/>
-            <a:ext cx="9144000" cy="792163"/>
+            <a:ext cx="12192000" cy="792163"/>
           </a:xfrm>
         </p:spPr>
         <p:txBody>
@@ -11917,8 +12069,8 @@
         </p:nvSpPr>
         <p:spPr>
           <a:xfrm>
-            <a:off x="685800" y="981075"/>
-            <a:ext cx="3810000" cy="5184775"/>
+            <a:off x="914400" y="981076"/>
+            <a:ext cx="5080000" cy="5184775"/>
           </a:xfrm>
           <a:prstGeom prst="rect">
             <a:avLst/>
@@ -11976,8 +12128,8 @@
         </p:nvSpPr>
         <p:spPr>
           <a:xfrm>
-            <a:off x="4648200" y="981075"/>
-            <a:ext cx="3810000" cy="5184775"/>
+            <a:off x="6197600" y="981076"/>
+            <a:ext cx="5080000" cy="5184775"/>
           </a:xfrm>
           <a:prstGeom prst="rect">
             <a:avLst/>
@@ -12097,7 +12249,7 @@
         <p:spPr bwMode="auto">
           <a:xfrm>
             <a:off x="0" y="-1"/>
-            <a:ext cx="9144000" cy="6858001"/>
+            <a:ext cx="12192000" cy="6858001"/>
           </a:xfrm>
           <a:prstGeom prst="rect">
             <a:avLst/>
@@ -12118,7 +12270,7 @@
         <p:spPr>
           <a:xfrm>
             <a:off x="0" y="0"/>
-            <a:ext cx="9144000" cy="1071546"/>
+            <a:ext cx="12192000" cy="1071546"/>
           </a:xfrm>
           <a:prstGeom prst="rect">
             <a:avLst/>
@@ -12224,8 +12376,8 @@
         </p:nvSpPr>
         <p:spPr>
           <a:xfrm>
-            <a:off x="457200" y="6356350"/>
-            <a:ext cx="2133600" cy="365125"/>
+            <a:off x="609600" y="6356351"/>
+            <a:ext cx="2844800" cy="365125"/>
           </a:xfrm>
           <a:prstGeom prst="rect">
             <a:avLst/>
@@ -12257,8 +12409,8 @@
         </p:nvSpPr>
         <p:spPr>
           <a:xfrm>
-            <a:off x="3124200" y="6356350"/>
-            <a:ext cx="2895600" cy="365125"/>
+            <a:off x="4165600" y="6356351"/>
+            <a:ext cx="3860800" cy="365125"/>
           </a:xfrm>
           <a:prstGeom prst="rect">
             <a:avLst/>
@@ -12323,8 +12475,8 @@
         </p:nvSpPr>
         <p:spPr>
           <a:xfrm>
-            <a:off x="457200" y="6356350"/>
-            <a:ext cx="2133600" cy="365125"/>
+            <a:off x="609600" y="6356351"/>
+            <a:ext cx="2844800" cy="365125"/>
           </a:xfrm>
           <a:prstGeom prst="rect">
             <a:avLst/>
@@ -12356,8 +12508,8 @@
         </p:nvSpPr>
         <p:spPr>
           <a:xfrm>
-            <a:off x="3124200" y="6356350"/>
-            <a:ext cx="2895600" cy="365125"/>
+            <a:off x="4165600" y="6356351"/>
+            <a:ext cx="3860800" cy="365125"/>
           </a:xfrm>
           <a:prstGeom prst="rect">
             <a:avLst/>
@@ -12422,8 +12574,8 @@
         </p:nvSpPr>
         <p:spPr>
           <a:xfrm>
-            <a:off x="6982264" y="6467404"/>
-            <a:ext cx="2133600" cy="365125"/>
+            <a:off x="9309685" y="6467405"/>
+            <a:ext cx="2844800" cy="365125"/>
           </a:xfrm>
           <a:prstGeom prst="rect">
             <a:avLst/>
@@ -12479,7 +12631,7 @@
         <p:spPr>
           <a:xfrm>
             <a:off x="0" y="6395396"/>
-            <a:ext cx="9144000" cy="0"/>
+            <a:ext cx="12192000" cy="0"/>
           </a:xfrm>
           <a:custGeom>
             <a:avLst/>
@@ -12548,7 +12700,7 @@
                 <a:spcPts val="0"/>
               </a:spcAft>
             </a:pPr>
-            <a:endParaRPr lang="zh-CN" altLang="en-US">
+            <a:endParaRPr lang="zh-CN" altLang="en-US" sz="2400">
               <a:solidFill>
                 <a:prstClr val="white"/>
               </a:solidFill>
@@ -12568,8 +12720,8 @@
         </p:nvSpPr>
         <p:spPr bwMode="auto">
           <a:xfrm>
-            <a:off x="0" y="8526"/>
-            <a:ext cx="8024813" cy="792162"/>
+            <a:off x="1" y="8526"/>
+            <a:ext cx="10699751" cy="792162"/>
           </a:xfrm>
           <a:prstGeom prst="rect">
             <a:avLst/>
@@ -12597,7 +12749,7 @@
               </a14:hiddenLine>
             </a:ext>
             <a:ext uri="{FAA26D3D-D897-4be2-8F04-BA451C77F1D7}">
-              <ma14:placeholderFlag xmlns:ma14="http://schemas.microsoft.com/office/mac/drawingml/2011/main" xmlns="" val="1"/>
+              <ma14:placeholderFlag xmlns="" xmlns:ma14="http://schemas.microsoft.com/office/mac/drawingml/2011/main" val="1"/>
             </a:ext>
           </a:extLst>
         </p:spPr>
@@ -12662,8 +12814,8 @@
         </p:nvSpPr>
         <p:spPr>
           <a:xfrm>
-            <a:off x="685800" y="2130425"/>
-            <a:ext cx="7772400" cy="1470025"/>
+            <a:off x="914400" y="2130426"/>
+            <a:ext cx="10363200" cy="1470025"/>
           </a:xfrm>
         </p:spPr>
         <p:txBody>
@@ -12689,8 +12841,8 @@
         </p:nvSpPr>
         <p:spPr>
           <a:xfrm>
-            <a:off x="1371600" y="3886200"/>
-            <a:ext cx="6400800" cy="1752600"/>
+            <a:off x="1828800" y="3886200"/>
+            <a:ext cx="8534400" cy="609398"/>
           </a:xfrm>
         </p:spPr>
         <p:txBody>
@@ -12821,8 +12973,8 @@
         </p:nvSpPr>
         <p:spPr>
           <a:xfrm>
-            <a:off x="287338" y="981075"/>
-            <a:ext cx="7772400" cy="5184775"/>
+            <a:off x="383117" y="981076"/>
+            <a:ext cx="10363200" cy="5184775"/>
           </a:xfrm>
           <a:prstGeom prst="rect">
             <a:avLst/>
@@ -13108,8 +13260,8 @@
         </p:nvSpPr>
         <p:spPr>
           <a:xfrm>
-            <a:off x="722313" y="4406900"/>
-            <a:ext cx="7772400" cy="1362075"/>
+            <a:off x="963084" y="4406901"/>
+            <a:ext cx="10363200" cy="1362075"/>
           </a:xfrm>
         </p:spPr>
         <p:txBody>
@@ -13139,8 +13291,8 @@
         </p:nvSpPr>
         <p:spPr>
           <a:xfrm>
-            <a:off x="722313" y="2906713"/>
-            <a:ext cx="7772400" cy="1500187"/>
+            <a:off x="963084" y="3945235"/>
+            <a:ext cx="10363200" cy="461665"/>
           </a:xfrm>
         </p:spPr>
         <p:txBody>
@@ -13294,8 +13446,8 @@
         </p:nvSpPr>
         <p:spPr>
           <a:xfrm>
-            <a:off x="325438" y="1087438"/>
-            <a:ext cx="4027487" cy="2270125"/>
+            <a:off x="433918" y="1087439"/>
+            <a:ext cx="5369983" cy="2332946"/>
           </a:xfrm>
         </p:spPr>
         <p:txBody>
@@ -13378,8 +13530,8 @@
         </p:nvSpPr>
         <p:spPr>
           <a:xfrm>
-            <a:off x="4505325" y="1087438"/>
-            <a:ext cx="4027488" cy="2270125"/>
+            <a:off x="6007100" y="1087439"/>
+            <a:ext cx="5369984" cy="2332946"/>
           </a:xfrm>
         </p:spPr>
         <p:txBody>
@@ -13530,8 +13682,8 @@
         </p:nvSpPr>
         <p:spPr>
           <a:xfrm>
-            <a:off x="457200" y="274638"/>
-            <a:ext cx="8229600" cy="1143000"/>
+            <a:off x="609600" y="274638"/>
+            <a:ext cx="10972800" cy="1143000"/>
           </a:xfrm>
         </p:spPr>
         <p:txBody>
@@ -13561,8 +13713,8 @@
         </p:nvSpPr>
         <p:spPr>
           <a:xfrm>
-            <a:off x="457200" y="1535113"/>
-            <a:ext cx="4040188" cy="639762"/>
+            <a:off x="609600" y="1639344"/>
+            <a:ext cx="5386917" cy="535531"/>
           </a:xfrm>
         </p:spPr>
         <p:txBody>
@@ -13626,8 +13778,8 @@
         </p:nvSpPr>
         <p:spPr>
           <a:xfrm>
-            <a:off x="457200" y="2174875"/>
-            <a:ext cx="4040188" cy="3951288"/>
+            <a:off x="609600" y="2174875"/>
+            <a:ext cx="5386917" cy="2043636"/>
           </a:xfrm>
         </p:spPr>
         <p:txBody>
@@ -13710,8 +13862,8 @@
         </p:nvSpPr>
         <p:spPr>
           <a:xfrm>
-            <a:off x="4645025" y="1535113"/>
-            <a:ext cx="4041775" cy="639762"/>
+            <a:off x="6193368" y="1639344"/>
+            <a:ext cx="5389033" cy="535531"/>
           </a:xfrm>
         </p:spPr>
         <p:txBody>
@@ -13775,8 +13927,8 @@
         </p:nvSpPr>
         <p:spPr>
           <a:xfrm>
-            <a:off x="4645025" y="2174875"/>
-            <a:ext cx="4041775" cy="3951288"/>
+            <a:off x="6193368" y="2174875"/>
+            <a:ext cx="5389033" cy="2043636"/>
           </a:xfrm>
         </p:spPr>
         <p:txBody>
@@ -14085,8 +14237,8 @@
         </p:nvSpPr>
         <p:spPr>
           <a:xfrm>
-            <a:off x="457200" y="273050"/>
-            <a:ext cx="3008313" cy="1162050"/>
+            <a:off x="609601" y="273050"/>
+            <a:ext cx="4011084" cy="1162050"/>
           </a:xfrm>
         </p:spPr>
         <p:txBody>
@@ -14116,8 +14268,8 @@
         </p:nvSpPr>
         <p:spPr>
           <a:xfrm>
-            <a:off x="3575050" y="273050"/>
-            <a:ext cx="5111750" cy="5853113"/>
+            <a:off x="4766733" y="273051"/>
+            <a:ext cx="6815667" cy="2665345"/>
           </a:xfrm>
         </p:spPr>
         <p:txBody>
@@ -14200,8 +14352,8 @@
         </p:nvSpPr>
         <p:spPr>
           <a:xfrm>
-            <a:off x="457200" y="1435100"/>
-            <a:ext cx="3008313" cy="4691063"/>
+            <a:off x="609601" y="1435101"/>
+            <a:ext cx="4011084" cy="350865"/>
           </a:xfrm>
         </p:spPr>
         <p:txBody>
@@ -14333,8 +14485,8 @@
         </p:nvSpPr>
         <p:spPr>
           <a:xfrm>
-            <a:off x="1792288" y="4800600"/>
-            <a:ext cx="5486400" cy="566738"/>
+            <a:off x="2389717" y="4800600"/>
+            <a:ext cx="7315200" cy="566738"/>
           </a:xfrm>
         </p:spPr>
         <p:txBody>
@@ -14364,8 +14516,8 @@
         </p:nvSpPr>
         <p:spPr>
           <a:xfrm>
-            <a:off x="1792288" y="612775"/>
-            <a:ext cx="5486400" cy="4114800"/>
+            <a:off x="2389717" y="612775"/>
+            <a:ext cx="7315200" cy="683264"/>
           </a:xfrm>
         </p:spPr>
         <p:txBody>
@@ -14426,8 +14578,8 @@
         </p:nvSpPr>
         <p:spPr>
           <a:xfrm>
-            <a:off x="1792288" y="5367338"/>
-            <a:ext cx="5486400" cy="804862"/>
+            <a:off x="2389717" y="5367338"/>
+            <a:ext cx="7315200" cy="350865"/>
           </a:xfrm>
         </p:spPr>
         <p:txBody>
@@ -14579,7 +14731,12 @@
             <p:ph type="body" orient="vert" idx="1"/>
           </p:nvPr>
         </p:nvSpPr>
-        <p:spPr/>
+        <p:spPr>
+          <a:xfrm>
+            <a:off x="7917676" y="1087439"/>
+            <a:ext cx="3459409" cy="2332946"/>
+          </a:xfrm>
+        </p:spPr>
         <p:txBody>
           <a:bodyPr vert="eaVert"/>
           <a:lstStyle/>
@@ -14700,8 +14857,8 @@
         </p:nvSpPr>
         <p:spPr>
           <a:xfrm>
-            <a:off x="6507163" y="115888"/>
-            <a:ext cx="2168525" cy="3241675"/>
+            <a:off x="8676218" y="115889"/>
+            <a:ext cx="2891367" cy="3241675"/>
           </a:xfrm>
         </p:spPr>
         <p:txBody>
@@ -14727,8 +14884,8 @@
         </p:nvSpPr>
         <p:spPr>
           <a:xfrm>
-            <a:off x="0" y="115888"/>
-            <a:ext cx="6354763" cy="3241675"/>
+            <a:off x="5530674" y="115889"/>
+            <a:ext cx="2942344" cy="3241675"/>
           </a:xfrm>
         </p:spPr>
         <p:txBody>
@@ -14851,8 +15008,8 @@
         </p:nvSpPr>
         <p:spPr>
           <a:xfrm>
-            <a:off x="722313" y="4406900"/>
-            <a:ext cx="7772400" cy="1362075"/>
+            <a:off x="963084" y="4406901"/>
+            <a:ext cx="10363200" cy="1362075"/>
           </a:xfrm>
         </p:spPr>
         <p:txBody>
@@ -14882,8 +15039,8 @@
         </p:nvSpPr>
         <p:spPr>
           <a:xfrm>
-            <a:off x="722313" y="2906713"/>
-            <a:ext cx="7772400" cy="1500187"/>
+            <a:off x="963084" y="2906713"/>
+            <a:ext cx="10363200" cy="1500187"/>
           </a:xfrm>
           <a:prstGeom prst="rect">
             <a:avLst/>
@@ -15006,8 +15163,8 @@
         </p:nvSpPr>
         <p:spPr>
           <a:xfrm>
-            <a:off x="685800" y="981075"/>
-            <a:ext cx="3810000" cy="5184775"/>
+            <a:off x="914400" y="981076"/>
+            <a:ext cx="5080000" cy="5184775"/>
           </a:xfrm>
           <a:prstGeom prst="rect">
             <a:avLst/>
@@ -15093,8 +15250,8 @@
         </p:nvSpPr>
         <p:spPr>
           <a:xfrm>
-            <a:off x="4648200" y="981075"/>
-            <a:ext cx="3810000" cy="5184775"/>
+            <a:off x="6197600" y="981076"/>
+            <a:ext cx="5080000" cy="5184775"/>
           </a:xfrm>
           <a:prstGeom prst="rect">
             <a:avLst/>
@@ -15258,8 +15415,8 @@
         </p:nvSpPr>
         <p:spPr>
           <a:xfrm>
-            <a:off x="457200" y="274638"/>
-            <a:ext cx="8229600" cy="1143000"/>
+            <a:off x="609600" y="274638"/>
+            <a:ext cx="10972800" cy="1143000"/>
           </a:xfrm>
         </p:spPr>
         <p:txBody>
@@ -15289,8 +15446,8 @@
         </p:nvSpPr>
         <p:spPr>
           <a:xfrm>
-            <a:off x="457200" y="1535113"/>
-            <a:ext cx="4040188" cy="639762"/>
+            <a:off x="609600" y="1535113"/>
+            <a:ext cx="5386917" cy="639762"/>
           </a:xfrm>
           <a:prstGeom prst="rect">
             <a:avLst/>
@@ -15357,8 +15514,8 @@
         </p:nvSpPr>
         <p:spPr>
           <a:xfrm>
-            <a:off x="457200" y="2174875"/>
-            <a:ext cx="4040188" cy="3951288"/>
+            <a:off x="609600" y="2174875"/>
+            <a:ext cx="5386917" cy="3951288"/>
           </a:xfrm>
           <a:prstGeom prst="rect">
             <a:avLst/>
@@ -15444,8 +15601,8 @@
         </p:nvSpPr>
         <p:spPr>
           <a:xfrm>
-            <a:off x="4645025" y="1535113"/>
-            <a:ext cx="4041775" cy="639762"/>
+            <a:off x="6193368" y="1535113"/>
+            <a:ext cx="5389033" cy="639762"/>
           </a:xfrm>
           <a:prstGeom prst="rect">
             <a:avLst/>
@@ -15512,8 +15669,8 @@
         </p:nvSpPr>
         <p:spPr>
           <a:xfrm>
-            <a:off x="4645025" y="2174875"/>
-            <a:ext cx="4041775" cy="3951288"/>
+            <a:off x="6193368" y="2174875"/>
+            <a:ext cx="5389033" cy="3951288"/>
           </a:xfrm>
           <a:prstGeom prst="rect">
             <a:avLst/>
@@ -15789,8 +15946,8 @@
         </p:nvSpPr>
         <p:spPr>
           <a:xfrm>
-            <a:off x="457200" y="273050"/>
-            <a:ext cx="3008313" cy="1162050"/>
+            <a:off x="609601" y="273050"/>
+            <a:ext cx="4011084" cy="1162050"/>
           </a:xfrm>
         </p:spPr>
         <p:txBody>
@@ -15820,8 +15977,8 @@
         </p:nvSpPr>
         <p:spPr>
           <a:xfrm>
-            <a:off x="3575050" y="273050"/>
-            <a:ext cx="5111750" cy="5853113"/>
+            <a:off x="4766733" y="273051"/>
+            <a:ext cx="6815667" cy="5853113"/>
           </a:xfrm>
           <a:prstGeom prst="rect">
             <a:avLst/>
@@ -15907,8 +16064,8 @@
         </p:nvSpPr>
         <p:spPr>
           <a:xfrm>
-            <a:off x="457200" y="1435100"/>
-            <a:ext cx="3008313" cy="4691063"/>
+            <a:off x="609601" y="1435101"/>
+            <a:ext cx="4011084" cy="4691063"/>
           </a:xfrm>
           <a:prstGeom prst="rect">
             <a:avLst/>
@@ -16031,8 +16188,8 @@
         </p:nvSpPr>
         <p:spPr>
           <a:xfrm>
-            <a:off x="1792288" y="4800600"/>
-            <a:ext cx="5486400" cy="566738"/>
+            <a:off x="2389717" y="4800600"/>
+            <a:ext cx="7315200" cy="566738"/>
           </a:xfrm>
         </p:spPr>
         <p:txBody>
@@ -16062,8 +16219,8 @@
         </p:nvSpPr>
         <p:spPr>
           <a:xfrm>
-            <a:off x="1792288" y="612775"/>
-            <a:ext cx="5486400" cy="4114800"/>
+            <a:off x="2389717" y="612775"/>
+            <a:ext cx="7315200" cy="4114800"/>
           </a:xfrm>
           <a:prstGeom prst="rect">
             <a:avLst/>
@@ -16127,8 +16284,8 @@
         </p:nvSpPr>
         <p:spPr>
           <a:xfrm>
-            <a:off x="1792288" y="5367338"/>
-            <a:ext cx="5486400" cy="804862"/>
+            <a:off x="2389717" y="5367338"/>
+            <a:ext cx="7315200" cy="804862"/>
           </a:xfrm>
           <a:prstGeom prst="rect">
             <a:avLst/>
@@ -16259,8 +16416,8 @@
         </p:nvSpPr>
         <p:spPr bwMode="auto">
           <a:xfrm>
-            <a:off x="182850" y="8526"/>
-            <a:ext cx="8024813" cy="792162"/>
+            <a:off x="243801" y="8526"/>
+            <a:ext cx="10699751" cy="792162"/>
           </a:xfrm>
           <a:prstGeom prst="rect">
             <a:avLst/>
@@ -16288,7 +16445,7 @@
               </a14:hiddenLine>
             </a:ext>
             <a:ext uri="{FAA26D3D-D897-4be2-8F04-BA451C77F1D7}">
-              <ma14:placeholderFlag xmlns:ma14="http://schemas.microsoft.com/office/mac/drawingml/2011/main" xmlns="" val="1"/>
+              <ma14:placeholderFlag xmlns="" xmlns:ma14="http://schemas.microsoft.com/office/mac/drawingml/2011/main" val="1"/>
             </a:ext>
           </a:extLst>
         </p:spPr>
@@ -16316,8 +16473,8 @@
         </p:nvSpPr>
         <p:spPr>
           <a:xfrm rot="5400000">
-            <a:off x="4513516" y="-3740963"/>
-            <a:ext cx="72000" cy="9099032"/>
+            <a:off x="6030021" y="-5257469"/>
+            <a:ext cx="72000" cy="12132043"/>
           </a:xfrm>
           <a:prstGeom prst="round2SameRect">
             <a:avLst>
@@ -16376,8 +16533,8 @@
         </p:nvSpPr>
         <p:spPr>
           <a:xfrm rot="5400000" flipH="1">
-            <a:off x="8530149" y="230704"/>
-            <a:ext cx="72000" cy="1155701"/>
+            <a:off x="11385532" y="38088"/>
+            <a:ext cx="72000" cy="1540935"/>
           </a:xfrm>
           <a:prstGeom prst="round2SameRect">
             <a:avLst>
@@ -16443,8 +16600,8 @@
         </p:nvSpPr>
         <p:spPr>
           <a:xfrm>
-            <a:off x="6553200" y="6356350"/>
-            <a:ext cx="2133600" cy="365125"/>
+            <a:off x="8737600" y="6356351"/>
+            <a:ext cx="2844800" cy="365125"/>
           </a:xfrm>
           <a:prstGeom prst="rect">
             <a:avLst/>
@@ -16956,8 +17113,8 @@
         </p:blipFill>
         <p:spPr bwMode="auto">
           <a:xfrm>
-            <a:off x="0" y="0"/>
-            <a:ext cx="9142413" cy="6856413"/>
+            <a:off x="1" y="1"/>
+            <a:ext cx="12189884" cy="6856413"/>
           </a:xfrm>
           <a:prstGeom prst="rect">
             <a:avLst/>
@@ -16983,8 +17140,8 @@
         </p:nvSpPr>
         <p:spPr bwMode="auto">
           <a:xfrm>
-            <a:off x="0" y="115888"/>
-            <a:ext cx="8675688" cy="649287"/>
+            <a:off x="0" y="115889"/>
+            <a:ext cx="11567584" cy="649287"/>
           </a:xfrm>
           <a:prstGeom prst="rect">
             <a:avLst/>
@@ -17031,8 +17188,8 @@
         </p:nvSpPr>
         <p:spPr bwMode="auto">
           <a:xfrm>
-            <a:off x="325438" y="1087438"/>
-            <a:ext cx="8207375" cy="2270125"/>
+            <a:off x="433918" y="1087439"/>
+            <a:ext cx="10943167" cy="2332946"/>
           </a:xfrm>
           <a:prstGeom prst="rect">
             <a:avLst/>
@@ -17157,8 +17314,8 @@
         </p:nvSpPr>
         <p:spPr bwMode="auto">
           <a:xfrm>
-            <a:off x="6902450" y="6499225"/>
-            <a:ext cx="2133600" cy="212725"/>
+            <a:off x="9203267" y="6499226"/>
+            <a:ext cx="2844800" cy="212725"/>
           </a:xfrm>
           <a:prstGeom prst="rect">
             <a:avLst/>
@@ -17719,7 +17876,7 @@
         </p:nvSpPr>
         <p:spPr bwMode="auto">
           <a:xfrm>
-            <a:off x="319693" y="1685331"/>
+            <a:off x="1843693" y="1685332"/>
             <a:ext cx="8501204" cy="1917543"/>
           </a:xfrm>
           <a:prstGeom prst="rect">
@@ -17753,25 +17910,11 @@
           <a:bodyPr anchor="ctr"/>
           <a:lstStyle/>
           <a:p>
-            <a:pPr marL="0" marR="0" lvl="0" indent="0" algn="ctr" defTabSz="914400" rtl="0" eaLnBrk="1" fontAlgn="base" latinLnBrk="0" hangingPunct="1">
-              <a:lnSpc>
-                <a:spcPct val="100000"/>
-              </a:lnSpc>
-              <a:spcBef>
-                <a:spcPct val="50000"/>
-              </a:spcBef>
-              <a:spcAft>
-                <a:spcPct val="0"/>
-              </a:spcAft>
-              <a:buClrTx/>
-              <a:buSzTx/>
-              <a:buFontTx/>
-              <a:buNone/>
-              <a:tabLst/>
+            <a:pPr>
               <a:defRPr/>
             </a:pPr>
             <a:r>
-              <a:rPr lang="zh-CN" altLang="en-US" sz="4800" b="1" dirty="0">
+              <a:rPr lang="zh-CN" altLang="en-US" sz="5400" b="1" dirty="0">
                 <a:solidFill>
                   <a:srgbClr val="FF0000"/>
                 </a:solidFill>
@@ -17780,16 +17923,10 @@
               </a:rPr>
               <a:t>栅格与矢量数据转换</a:t>
             </a:r>
-            <a:endParaRPr kumimoji="0" lang="zh-CN" altLang="zh-CN" sz="4800" b="1" i="0" u="none" strike="noStrike" kern="1200" cap="none" spc="0" normalizeH="0" baseline="0" noProof="0" dirty="0">
-              <a:ln>
-                <a:noFill/>
-              </a:ln>
+            <a:endParaRPr lang="zh-CN" altLang="zh-CN" sz="5400" b="1" dirty="0">
               <a:solidFill>
                 <a:srgbClr val="FF0000"/>
               </a:solidFill>
-              <a:effectLst/>
-              <a:uLnTx/>
-              <a:uFillTx/>
               <a:latin typeface="微软雅黑"/>
               <a:ea typeface="微软雅黑"/>
             </a:endParaRPr>
@@ -17806,7 +17943,7 @@
         </p:nvSpPr>
         <p:spPr bwMode="auto">
           <a:xfrm>
-            <a:off x="153909" y="3931738"/>
+            <a:off x="1677909" y="3931738"/>
             <a:ext cx="8809022" cy="1439862"/>
           </a:xfrm>
           <a:prstGeom prst="rect">
@@ -17840,140 +17977,89 @@
           <a:bodyPr/>
           <a:lstStyle/>
           <a:p>
-            <a:pPr marL="0" marR="0" lvl="0" indent="0" algn="ctr" defTabSz="914400" rtl="0" eaLnBrk="1" fontAlgn="base" latinLnBrk="0" hangingPunct="1">
+            <a:pPr>
               <a:lnSpc>
                 <a:spcPct val="150000"/>
               </a:lnSpc>
               <a:spcBef>
                 <a:spcPts val="0"/>
               </a:spcBef>
-              <a:spcAft>
-                <a:spcPct val="0"/>
-              </a:spcAft>
-              <a:buClrTx/>
               <a:buSzPct val="80000"/>
-              <a:buFontTx/>
-              <a:buNone/>
-              <a:tabLst/>
               <a:defRPr/>
             </a:pPr>
             <a:r>
-              <a:rPr kumimoji="0" lang="zh-CN" altLang="en-US" sz="2400" b="1" i="0" u="none" strike="noStrike" kern="1200" cap="none" spc="0" normalizeH="0" baseline="0" noProof="0" dirty="0">
-                <a:ln>
-                  <a:noFill/>
-                </a:ln>
+              <a:rPr lang="zh-CN" altLang="en-US" sz="2800" b="1" dirty="0">
                 <a:solidFill>
                   <a:srgbClr val="002060"/>
                 </a:solidFill>
-                <a:effectLst/>
-                <a:uLnTx/>
-                <a:uFillTx/>
                 <a:latin typeface="微软雅黑"/>
                 <a:ea typeface="微软雅黑"/>
                 <a:cs typeface="微软雅黑" charset="0"/>
               </a:rPr>
               <a:t>罗 新</a:t>
             </a:r>
-            <a:endParaRPr kumimoji="0" lang="en-US" altLang="zh-CN" sz="2400" b="1" i="0" u="none" strike="noStrike" kern="1200" cap="none" spc="0" normalizeH="0" baseline="0" noProof="0" dirty="0">
-              <a:ln>
-                <a:noFill/>
-              </a:ln>
+            <a:endParaRPr lang="en-US" altLang="zh-CN" sz="2800" b="1" dirty="0">
               <a:solidFill>
                 <a:srgbClr val="002060"/>
               </a:solidFill>
-              <a:effectLst/>
-              <a:uLnTx/>
-              <a:uFillTx/>
               <a:latin typeface="微软雅黑"/>
               <a:ea typeface="微软雅黑"/>
               <a:cs typeface="微软雅黑" charset="0"/>
             </a:endParaRPr>
           </a:p>
           <a:p>
-            <a:pPr marL="0" marR="0" lvl="0" indent="0" algn="ctr" defTabSz="914400" rtl="0" eaLnBrk="1" fontAlgn="base" latinLnBrk="0" hangingPunct="1">
+            <a:pPr>
               <a:lnSpc>
                 <a:spcPct val="150000"/>
               </a:lnSpc>
               <a:spcBef>
                 <a:spcPts val="0"/>
               </a:spcBef>
-              <a:spcAft>
-                <a:spcPct val="0"/>
-              </a:spcAft>
-              <a:buClrTx/>
               <a:buSzPct val="80000"/>
-              <a:buFontTx/>
-              <a:buNone/>
-              <a:tabLst/>
               <a:defRPr/>
             </a:pPr>
             <a:r>
-              <a:rPr kumimoji="0" lang="zh-CN" altLang="en-US" sz="2400" b="1" i="0" u="none" strike="noStrike" kern="1200" cap="none" spc="0" normalizeH="0" baseline="0" noProof="0" dirty="0">
-                <a:ln>
-                  <a:noFill/>
-                </a:ln>
+              <a:rPr lang="zh-CN" altLang="en-US" sz="2800" b="1" dirty="0">
                 <a:solidFill>
                   <a:srgbClr val="002060"/>
                 </a:solidFill>
-                <a:effectLst/>
-                <a:uLnTx/>
-                <a:uFillTx/>
                 <a:latin typeface="微软雅黑"/>
                 <a:ea typeface="微软雅黑"/>
                 <a:cs typeface="微软雅黑" charset="0"/>
               </a:rPr>
               <a:t>云南大学 地球科学学院</a:t>
             </a:r>
-            <a:endParaRPr kumimoji="0" lang="en-US" altLang="zh-CN" sz="2400" b="1" i="0" u="none" strike="noStrike" kern="1200" cap="none" spc="0" normalizeH="0" baseline="0" noProof="0" dirty="0">
-              <a:ln>
-                <a:noFill/>
-              </a:ln>
+            <a:endParaRPr lang="en-US" altLang="zh-CN" sz="2800" b="1" dirty="0">
               <a:solidFill>
                 <a:srgbClr val="002060"/>
               </a:solidFill>
-              <a:effectLst/>
-              <a:uLnTx/>
-              <a:uFillTx/>
               <a:latin typeface="微软雅黑"/>
               <a:ea typeface="微软雅黑"/>
               <a:cs typeface="微软雅黑" charset="0"/>
             </a:endParaRPr>
           </a:p>
           <a:p>
-            <a:pPr marL="0" marR="0" lvl="0" indent="0" algn="ctr" defTabSz="914400" rtl="0" eaLnBrk="1" fontAlgn="base" latinLnBrk="0" hangingPunct="1">
+            <a:pPr>
               <a:lnSpc>
                 <a:spcPct val="150000"/>
               </a:lnSpc>
               <a:spcBef>
                 <a:spcPts val="0"/>
               </a:spcBef>
-              <a:spcAft>
-                <a:spcPct val="0"/>
-              </a:spcAft>
-              <a:buClrTx/>
               <a:buSzPct val="80000"/>
-              <a:buFontTx/>
-              <a:buNone/>
-              <a:tabLst/>
               <a:defRPr/>
             </a:pPr>
-            <a:endParaRPr kumimoji="0" lang="zh-CN" altLang="en-US" sz="2800" b="1" i="0" u="none" strike="noStrike" kern="1200" cap="none" spc="0" normalizeH="0" baseline="0" noProof="0" dirty="0">
-              <a:ln>
-                <a:noFill/>
-              </a:ln>
+            <a:endParaRPr lang="zh-CN" altLang="en-US" sz="3200" b="1" dirty="0">
               <a:solidFill>
                 <a:srgbClr val="002060"/>
               </a:solidFill>
-              <a:effectLst/>
-              <a:uLnTx/>
-              <a:uFillTx/>
               <a:latin typeface="微软雅黑"/>
               <a:ea typeface="微软雅黑"/>
               <a:cs typeface="微软雅黑" charset="0"/>
             </a:endParaRPr>
           </a:p>
           <a:p>
-            <a:pPr marL="0" marR="0" lvl="0" indent="0" algn="ctr" defTabSz="914400" rtl="0" eaLnBrk="1" fontAlgn="base" latinLnBrk="0" hangingPunct="1">
+            <a:pPr>
               <a:lnSpc>
                 <a:spcPct val="120000"/>
               </a:lnSpc>
@@ -17983,30 +18069,20 @@
               <a:spcAft>
                 <a:spcPts val="0"/>
               </a:spcAft>
-              <a:buClrTx/>
               <a:buSzPct val="80000"/>
-              <a:buFontTx/>
-              <a:buNone/>
-              <a:tabLst/>
               <a:defRPr/>
             </a:pPr>
-            <a:endParaRPr kumimoji="0" lang="en-US" altLang="zh-CN" sz="2000" b="0" i="0" u="none" strike="noStrike" kern="1200" cap="none" spc="0" normalizeH="0" baseline="0" noProof="0" dirty="0">
-              <a:ln>
-                <a:noFill/>
-              </a:ln>
+            <a:endParaRPr lang="en-US" altLang="zh-CN" dirty="0">
               <a:solidFill>
                 <a:srgbClr val="002060"/>
               </a:solidFill>
-              <a:effectLst/>
-              <a:uLnTx/>
-              <a:uFillTx/>
               <a:latin typeface="微软雅黑"/>
               <a:ea typeface="微软雅黑"/>
               <a:cs typeface="微软雅黑" charset="0"/>
             </a:endParaRPr>
           </a:p>
           <a:p>
-            <a:pPr marL="0" marR="0" lvl="0" indent="0" algn="ctr" defTabSz="914400" rtl="0" eaLnBrk="1" fontAlgn="base" latinLnBrk="0" hangingPunct="1">
+            <a:pPr>
               <a:lnSpc>
                 <a:spcPct val="120000"/>
               </a:lnSpc>
@@ -18016,30 +18092,20 @@
               <a:spcAft>
                 <a:spcPts val="0"/>
               </a:spcAft>
-              <a:buClrTx/>
               <a:buSzPct val="80000"/>
-              <a:buFontTx/>
-              <a:buNone/>
-              <a:tabLst/>
               <a:defRPr/>
             </a:pPr>
-            <a:endParaRPr kumimoji="0" lang="en-US" altLang="zh-CN" sz="2000" b="0" i="0" u="none" strike="noStrike" kern="1200" cap="none" spc="0" normalizeH="0" baseline="0" noProof="0" dirty="0">
-              <a:ln>
-                <a:noFill/>
-              </a:ln>
+            <a:endParaRPr lang="en-US" altLang="zh-CN" dirty="0">
               <a:solidFill>
                 <a:srgbClr val="002060"/>
               </a:solidFill>
-              <a:effectLst/>
-              <a:uLnTx/>
-              <a:uFillTx/>
               <a:latin typeface="微软雅黑"/>
               <a:ea typeface="微软雅黑"/>
               <a:cs typeface="微软雅黑" charset="0"/>
             </a:endParaRPr>
           </a:p>
           <a:p>
-            <a:pPr marL="0" marR="0" lvl="0" indent="0" algn="ctr" defTabSz="914400" rtl="0" eaLnBrk="1" fontAlgn="base" latinLnBrk="0" hangingPunct="1">
+            <a:pPr>
               <a:lnSpc>
                 <a:spcPct val="120000"/>
               </a:lnSpc>
@@ -18049,23 +18115,13 @@
               <a:spcAft>
                 <a:spcPts val="0"/>
               </a:spcAft>
-              <a:buClrTx/>
               <a:buSzPct val="80000"/>
-              <a:buFontTx/>
-              <a:buNone/>
-              <a:tabLst/>
               <a:defRPr/>
             </a:pPr>
-            <a:endParaRPr kumimoji="0" lang="en-US" altLang="zh-CN" sz="1800" b="0" i="0" u="none" strike="noStrike" kern="1200" cap="none" spc="0" normalizeH="0" baseline="0" noProof="0" dirty="0">
-              <a:ln>
-                <a:noFill/>
-              </a:ln>
+            <a:endParaRPr lang="en-US" altLang="zh-CN" sz="2000" dirty="0">
               <a:solidFill>
                 <a:srgbClr val="002060"/>
               </a:solidFill>
-              <a:effectLst/>
-              <a:uLnTx/>
-              <a:uFillTx/>
               <a:latin typeface="微软雅黑"/>
               <a:ea typeface="微软雅黑"/>
               <a:cs typeface="微软雅黑" charset="0"/>
@@ -18081,7 +18137,7 @@
         </p:nvSpPr>
         <p:spPr>
           <a:xfrm flipV="1">
-            <a:off x="792000" y="3614404"/>
+            <a:off x="2316000" y="3614405"/>
             <a:ext cx="7560000" cy="45719"/>
           </a:xfrm>
           <a:prstGeom prst="rect">
@@ -18121,33 +18177,13 @@
           </a:bodyPr>
           <a:lstStyle/>
           <a:p>
-            <a:pPr marL="0" marR="0" lvl="0" indent="0" algn="l" defTabSz="914400" rtl="0" eaLnBrk="1" fontAlgn="base" latinLnBrk="0" hangingPunct="1">
-              <a:lnSpc>
-                <a:spcPct val="100000"/>
-              </a:lnSpc>
-              <a:spcBef>
-                <a:spcPct val="50000"/>
-              </a:spcBef>
-              <a:spcAft>
-                <a:spcPct val="0"/>
-              </a:spcAft>
-              <a:buClrTx/>
-              <a:buSzTx/>
-              <a:buFontTx/>
-              <a:buNone/>
-              <a:tabLst/>
+            <a:pPr algn="l">
               <a:defRPr/>
             </a:pPr>
-            <a:endParaRPr kumimoji="0" lang="zh-CN" altLang="en-US" sz="2400" b="1" i="0" u="none" strike="noStrike" kern="1200" cap="none" spc="0" normalizeH="0" baseline="0" noProof="0" dirty="0">
-              <a:ln>
-                <a:noFill/>
-              </a:ln>
+            <a:endParaRPr lang="zh-CN" altLang="en-US" b="1" dirty="0">
               <a:solidFill>
                 <a:srgbClr val="FF0000"/>
               </a:solidFill>
-              <a:effectLst/>
-              <a:uLnTx/>
-              <a:uFillTx/>
               <a:latin typeface="微软雅黑" pitchFamily="34" charset="-122"/>
               <a:ea typeface="微软雅黑" pitchFamily="34" charset="-122"/>
             </a:endParaRPr>
@@ -18168,8 +18204,8 @@
         </p:nvSpPr>
         <p:spPr>
           <a:xfrm>
-            <a:off x="307818" y="5474698"/>
-            <a:ext cx="8627953" cy="784830"/>
+            <a:off x="1831819" y="5474698"/>
+            <a:ext cx="8627953" cy="861774"/>
           </a:xfrm>
           <a:prstGeom prst="rect">
             <a:avLst/>
@@ -18181,50 +18217,24 @@
           </a:bodyPr>
           <a:lstStyle/>
           <a:p>
-            <a:pPr marL="0" marR="0" lvl="0" indent="0" algn="ctr" defTabSz="914400" rtl="0" eaLnBrk="1" fontAlgn="base" latinLnBrk="0" hangingPunct="1">
-              <a:lnSpc>
-                <a:spcPct val="100000"/>
-              </a:lnSpc>
-              <a:spcBef>
-                <a:spcPct val="50000"/>
-              </a:spcBef>
-              <a:spcAft>
-                <a:spcPct val="0"/>
-              </a:spcAft>
-              <a:buClrTx/>
-              <a:buSzTx/>
-              <a:buFontTx/>
-              <a:buNone/>
-              <a:tabLst/>
+            <a:pPr>
               <a:defRPr/>
             </a:pPr>
             <a:r>
-              <a:rPr kumimoji="0" lang="en-US" sz="1800" b="0" i="0" u="none" strike="noStrike" kern="1200" cap="none" spc="0" normalizeH="0" baseline="0" noProof="0" dirty="0">
-                <a:ln>
-                  <a:noFill/>
-                </a:ln>
+              <a:rPr lang="en-US" sz="2000" dirty="0">
                 <a:solidFill>
                   <a:prstClr val="black"/>
                 </a:solidFill>
-                <a:effectLst/>
-                <a:uLnTx/>
-                <a:uFillTx/>
                 <a:latin typeface="微软雅黑"/>
                 <a:ea typeface="微软雅黑"/>
               </a:rPr>
               <a:t>邮箱</a:t>
             </a:r>
             <a:r>
-              <a:rPr kumimoji="0" lang="en-CN" sz="1800" b="0" i="0" u="none" strike="noStrike" kern="1200" cap="none" spc="0" normalizeH="0" baseline="0" noProof="0" dirty="0">
-                <a:ln>
-                  <a:noFill/>
-                </a:ln>
+              <a:rPr lang="en-CN" sz="2000" dirty="0">
                 <a:solidFill>
                   <a:prstClr val="black"/>
                 </a:solidFill>
-                <a:effectLst/>
-                <a:uLnTx/>
-                <a:uFillTx/>
                 <a:latin typeface="微软雅黑"/>
                 <a:ea typeface="微软雅黑"/>
               </a:rPr>
@@ -18232,97 +18242,53 @@
             </a:r>
           </a:p>
           <a:p>
-            <a:pPr marL="0" marR="0" lvl="0" indent="0" algn="ctr" defTabSz="914400" rtl="0" eaLnBrk="1" fontAlgn="base" latinLnBrk="0" hangingPunct="1">
-              <a:lnSpc>
-                <a:spcPct val="100000"/>
-              </a:lnSpc>
-              <a:spcBef>
-                <a:spcPct val="50000"/>
-              </a:spcBef>
-              <a:spcAft>
-                <a:spcPct val="0"/>
-              </a:spcAft>
-              <a:buClrTx/>
-              <a:buSzTx/>
-              <a:buFontTx/>
-              <a:buNone/>
-              <a:tabLst/>
+            <a:pPr>
               <a:defRPr/>
             </a:pPr>
             <a:r>
-              <a:rPr kumimoji="0" lang="en-CN" sz="1800" b="0" i="0" u="none" strike="noStrike" kern="1200" cap="none" spc="0" normalizeH="0" baseline="0" noProof="0" dirty="0">
-                <a:ln>
-                  <a:noFill/>
-                </a:ln>
+              <a:rPr lang="en-CN" sz="2000" dirty="0">
                 <a:solidFill>
                   <a:prstClr val="black"/>
                 </a:solidFill>
-                <a:effectLst/>
-                <a:uLnTx/>
-                <a:uFillTx/>
                 <a:latin typeface="微软雅黑"/>
                 <a:ea typeface="微软雅黑"/>
               </a:rPr>
               <a:t>地址</a:t>
             </a:r>
             <a:r>
-              <a:rPr kumimoji="0" lang="zh-CN" altLang="en-US" sz="1800" b="0" i="0" u="none" strike="noStrike" kern="1200" cap="none" spc="0" normalizeH="0" baseline="0" noProof="0" dirty="0">
-                <a:ln>
-                  <a:noFill/>
-                </a:ln>
+              <a:rPr lang="zh-CN" altLang="en-US" sz="2000" dirty="0">
                 <a:solidFill>
                   <a:prstClr val="black"/>
                 </a:solidFill>
-                <a:effectLst/>
-                <a:uLnTx/>
-                <a:uFillTx/>
                 <a:latin typeface="微软雅黑"/>
                 <a:ea typeface="微软雅黑"/>
               </a:rPr>
               <a:t>：地球科学学院</a:t>
             </a:r>
             <a:r>
-              <a:rPr kumimoji="0" lang="en-US" altLang="zh-CN" sz="1800" b="0" i="0" u="none" strike="noStrike" kern="1200" cap="none" spc="0" normalizeH="0" baseline="0" noProof="0" dirty="0">
-                <a:ln>
-                  <a:noFill/>
-                </a:ln>
+              <a:rPr lang="en-US" altLang="zh-CN" sz="2000" dirty="0">
                 <a:solidFill>
                   <a:prstClr val="black"/>
                 </a:solidFill>
-                <a:effectLst/>
-                <a:uLnTx/>
-                <a:uFillTx/>
                 <a:latin typeface="微软雅黑"/>
                 <a:ea typeface="微软雅黑"/>
               </a:rPr>
               <a:t>1327</a:t>
             </a:r>
             <a:r>
-              <a:rPr kumimoji="0" lang="zh-CN" altLang="en-US" sz="1800" b="0" i="0" u="none" strike="noStrike" kern="1200" cap="none" spc="0" normalizeH="0" baseline="0" noProof="0" dirty="0">
-                <a:ln>
-                  <a:noFill/>
-                </a:ln>
+              <a:rPr lang="zh-CN" altLang="en-US" sz="2000" dirty="0">
                 <a:solidFill>
                   <a:prstClr val="black"/>
                 </a:solidFill>
-                <a:effectLst/>
-                <a:uLnTx/>
-                <a:uFillTx/>
                 <a:latin typeface="微软雅黑"/>
                 <a:ea typeface="微软雅黑"/>
               </a:rPr>
               <a:t>办公室</a:t>
             </a:r>
-            <a:endParaRPr kumimoji="0" lang="en-CN" sz="1800" b="0" i="0" u="none" strike="noStrike" kern="1200" cap="none" spc="0" normalizeH="0" baseline="0" noProof="0" dirty="0">
-              <a:ln>
-                <a:noFill/>
-              </a:ln>
+            <a:endParaRPr lang="en-CN" sz="2000" dirty="0">
               <a:solidFill>
                 <a:prstClr val="black"/>
               </a:solidFill>
-              <a:effectLst/>
-              <a:uLnTx/>
-              <a:uFillTx/>
               <a:latin typeface="微软雅黑"/>
               <a:ea typeface="微软雅黑"/>
             </a:endParaRPr>
@@ -18351,7 +18317,7 @@
         </p:blipFill>
         <p:spPr>
           <a:xfrm>
-            <a:off x="319693" y="243144"/>
+            <a:off x="784151" y="261082"/>
             <a:ext cx="2866773" cy="1012641"/>
           </a:xfrm>
           <a:prstGeom prst="rect">
@@ -18381,7 +18347,7 @@
         </p:blipFill>
         <p:spPr>
           <a:xfrm>
-            <a:off x="6162261" y="6259528"/>
+            <a:off x="7686262" y="6259528"/>
             <a:ext cx="2996979" cy="622992"/>
           </a:xfrm>
           <a:prstGeom prst="rect">
@@ -18403,8 +18369,8 @@
         </p:nvSpPr>
         <p:spPr>
           <a:xfrm>
-            <a:off x="4913758" y="261082"/>
-            <a:ext cx="4246675" cy="369332"/>
+            <a:off x="7205965" y="254617"/>
+            <a:ext cx="4698722" cy="400110"/>
           </a:xfrm>
           <a:prstGeom prst="rect">
             <a:avLst/>
@@ -18418,7 +18384,7 @@
           <a:lstStyle/>
           <a:p>
             <a:r>
-              <a:rPr lang="en-CN" sz="1800" b="1" dirty="0">
+              <a:rPr lang="en-CN" sz="2000" b="1" dirty="0">
                 <a:solidFill>
                   <a:schemeClr val="bg2"/>
                 </a:solidFill>
@@ -18428,7 +18394,7 @@
               <a:t>云南大学</a:t>
             </a:r>
             <a:r>
-              <a:rPr lang="en-US" altLang="zh-CN" sz="1800" b="1" dirty="0">
+              <a:rPr lang="en-US" altLang="zh-CN" sz="2000" b="1" dirty="0">
                 <a:solidFill>
                   <a:schemeClr val="bg2"/>
                 </a:solidFill>
@@ -18438,7 +18404,7 @@
               <a:t>《</a:t>
             </a:r>
             <a:r>
-              <a:rPr lang="en-CN" sz="1800" b="1" dirty="0">
+              <a:rPr lang="en-CN" sz="2000" b="1" dirty="0">
                 <a:solidFill>
                   <a:schemeClr val="bg2"/>
                 </a:solidFill>
@@ -18448,7 +18414,7 @@
               <a:t> 空间数据处理 </a:t>
             </a:r>
             <a:r>
-              <a:rPr lang="en-US" altLang="zh-CN" sz="1800" b="1" dirty="0">
+              <a:rPr lang="en-US" altLang="zh-CN" sz="2000" b="1" dirty="0">
                 <a:solidFill>
                   <a:schemeClr val="bg2"/>
                 </a:solidFill>
@@ -18458,7 +18424,7 @@
               <a:t>》</a:t>
             </a:r>
             <a:r>
-              <a:rPr lang="en-CN" sz="1800" b="1" dirty="0">
+              <a:rPr lang="en-CN" sz="2000" b="1" dirty="0">
                 <a:solidFill>
                   <a:schemeClr val="bg2"/>
                 </a:solidFill>
@@ -18468,7 +18434,7 @@
               <a:t>课程第</a:t>
             </a:r>
             <a:r>
-              <a:rPr lang="zh-CN" altLang="en-US" sz="1800" b="1" dirty="0">
+              <a:rPr lang="zh-CN" altLang="en-US" sz="2000" b="1" dirty="0">
                 <a:solidFill>
                   <a:schemeClr val="bg2"/>
                 </a:solidFill>
@@ -18478,7 +18444,7 @@
               <a:t>六</a:t>
             </a:r>
             <a:r>
-              <a:rPr lang="en-CN" sz="1800" b="1" dirty="0">
+              <a:rPr lang="en-CN" sz="2000" b="1" dirty="0">
                 <a:solidFill>
                   <a:schemeClr val="bg2"/>
                 </a:solidFill>
@@ -18525,6 +18491,154 @@
       </p:grpSpPr>
       <p:sp>
         <p:nvSpPr>
+          <p:cNvPr id="3" name="矩形 2"/>
+          <p:cNvSpPr/>
+          <p:nvPr/>
+        </p:nvSpPr>
+        <p:spPr>
+          <a:xfrm>
+            <a:off x="0" y="3471863"/>
+            <a:ext cx="12192000" cy="1543050"/>
+          </a:xfrm>
+          <a:prstGeom prst="rect">
+            <a:avLst/>
+          </a:prstGeom>
+          <a:solidFill>
+            <a:schemeClr val="accent1"/>
+          </a:solidFill>
+          <a:ln>
+            <a:noFill/>
+          </a:ln>
+        </p:spPr>
+        <p:txBody>
+          <a:bodyPr wrap="square" lIns="0" rtlCol="0" anchor="ctr">
+            <a:noAutofit/>
+          </a:bodyPr>
+          <a:lstStyle/>
+          <a:p>
+            <a:pPr algn="l"/>
+            <a:endParaRPr lang="zh-CN" altLang="en-US" b="1">
+              <a:solidFill>
+                <a:srgbClr val="FF0000"/>
+              </a:solidFill>
+              <a:latin typeface="微软雅黑" pitchFamily="34" charset="-122"/>
+              <a:ea typeface="微软雅黑" pitchFamily="34" charset="-122"/>
+            </a:endParaRPr>
+          </a:p>
+        </p:txBody>
+      </p:sp>
+      <p:sp>
+        <p:nvSpPr>
+          <p:cNvPr id="7" name="矩形 6"/>
+          <p:cNvSpPr/>
+          <p:nvPr/>
+        </p:nvSpPr>
+        <p:spPr>
+          <a:xfrm>
+            <a:off x="254222" y="3868892"/>
+            <a:ext cx="11670743" cy="707886"/>
+          </a:xfrm>
+          <a:prstGeom prst="rect">
+            <a:avLst/>
+          </a:prstGeom>
+        </p:spPr>
+        <p:txBody>
+          <a:bodyPr wrap="square">
+            <a:spAutoFit/>
+          </a:bodyPr>
+          <a:lstStyle/>
+          <a:p>
+            <a:pPr algn="l" fontAlgn="auto">
+              <a:spcBef>
+                <a:spcPts val="0"/>
+              </a:spcBef>
+              <a:spcAft>
+                <a:spcPts val="0"/>
+              </a:spcAft>
+            </a:pPr>
+            <a:r>
+              <a:rPr lang="zh-CN" altLang="en-US" sz="4000" b="1" dirty="0">
+                <a:latin typeface="微软雅黑" pitchFamily="34" charset="-122"/>
+                <a:ea typeface="微软雅黑" pitchFamily="34" charset="-122"/>
+              </a:rPr>
+              <a:t>二、矢量数据栅格化</a:t>
+            </a:r>
+          </a:p>
+        </p:txBody>
+      </p:sp>
+      <p:sp>
+        <p:nvSpPr>
+          <p:cNvPr id="8" name="矩形 7"/>
+          <p:cNvSpPr/>
+          <p:nvPr/>
+        </p:nvSpPr>
+        <p:spPr>
+          <a:xfrm>
+            <a:off x="0" y="5014912"/>
+            <a:ext cx="12192000" cy="72000"/>
+          </a:xfrm>
+          <a:prstGeom prst="rect">
+            <a:avLst/>
+          </a:prstGeom>
+          <a:solidFill>
+            <a:schemeClr val="tx1">
+              <a:lumMod val="75000"/>
+            </a:schemeClr>
+          </a:solidFill>
+          <a:effectLst/>
+        </p:spPr>
+        <p:txBody>
+          <a:bodyPr wrap="square" lIns="0" rtlCol="0" anchor="ctr">
+            <a:noAutofit/>
+          </a:bodyPr>
+          <a:lstStyle/>
+          <a:p>
+            <a:pPr algn="l"/>
+            <a:endParaRPr lang="zh-CN" altLang="en-US" b="1">
+              <a:solidFill>
+                <a:srgbClr val="FF0000"/>
+              </a:solidFill>
+              <a:latin typeface="微软雅黑" pitchFamily="34" charset="-122"/>
+              <a:ea typeface="微软雅黑" pitchFamily="34" charset="-122"/>
+            </a:endParaRPr>
+          </a:p>
+        </p:txBody>
+      </p:sp>
+    </p:spTree>
+    <p:extLst>
+      <p:ext uri="{BB962C8B-B14F-4D97-AF65-F5344CB8AC3E}">
+        <p14:creationId xmlns:p14="http://schemas.microsoft.com/office/powerpoint/2010/main" val="755382699"/>
+      </p:ext>
+    </p:extLst>
+  </p:cSld>
+  <p:clrMapOvr>
+    <a:masterClrMapping/>
+  </p:clrMapOvr>
+  <p:transition>
+    <p:fade/>
+  </p:transition>
+</p:sld>
+</file>
+
+<file path=ppt/slides/slide11.xml><?xml version="1.0" encoding="utf-8"?>
+<p:sld xmlns:a="http://schemas.openxmlformats.org/drawingml/2006/main" xmlns:r="http://schemas.openxmlformats.org/officeDocument/2006/relationships" xmlns:p="http://schemas.openxmlformats.org/presentationml/2006/main">
+  <p:cSld>
+    <p:spTree>
+      <p:nvGrpSpPr>
+        <p:cNvPr id="1" name=""/>
+        <p:cNvGrpSpPr/>
+        <p:nvPr/>
+      </p:nvGrpSpPr>
+      <p:grpSpPr>
+        <a:xfrm>
+          <a:off x="0" y="0"/>
+          <a:ext cx="0" cy="0"/>
+          <a:chOff x="0" y="0"/>
+          <a:chExt cx="0" cy="0"/>
+        </a:xfrm>
+      </p:grpSpPr>
+      <p:sp>
+        <p:nvSpPr>
           <p:cNvPr id="3" name="标题 2"/>
           <p:cNvSpPr>
             <a:spLocks noGrp="1"/>
@@ -18535,8 +18649,8 @@
         </p:nvSpPr>
         <p:spPr>
           <a:xfrm>
-            <a:off x="0" y="8526"/>
-            <a:ext cx="9013371" cy="792162"/>
+            <a:off x="1" y="8526"/>
+            <a:ext cx="10537372" cy="792162"/>
           </a:xfrm>
         </p:spPr>
         <p:txBody>
@@ -18567,8 +18681,8 @@
         </p:nvSpPr>
         <p:spPr>
           <a:xfrm>
-            <a:off x="317665" y="927220"/>
-            <a:ext cx="8508670" cy="1007968"/>
+            <a:off x="437882" y="927220"/>
+            <a:ext cx="11108028" cy="1077218"/>
           </a:xfrm>
           <a:prstGeom prst="rect">
             <a:avLst/>
@@ -18623,7 +18737,7 @@
           <a:p>
             <a:pPr algn="just"/>
             <a:r>
-              <a:rPr lang="en-US" altLang="zh-CN" sz="2100" dirty="0">
+              <a:rPr lang="en-US" altLang="zh-CN" dirty="0">
                 <a:solidFill>
                   <a:srgbClr val="333333"/>
                 </a:solidFill>
@@ -18656,7 +18770,7 @@
         </p:blipFill>
         <p:spPr>
           <a:xfrm>
-            <a:off x="162536" y="1998260"/>
+            <a:off x="913803" y="2113236"/>
             <a:ext cx="4164399" cy="4560337"/>
           </a:xfrm>
           <a:prstGeom prst="rect">
@@ -18678,7 +18792,7 @@
         </p:nvGrpSpPr>
         <p:grpSpPr>
           <a:xfrm>
-            <a:off x="4144598" y="2096229"/>
+            <a:off x="5932615" y="2113236"/>
             <a:ext cx="4868773" cy="4364400"/>
             <a:chOff x="4255189" y="2327514"/>
             <a:chExt cx="4656477" cy="4307388"/>
@@ -18863,7 +18977,7 @@
 </p:sld>
 </file>
 
-<file path=ppt/slides/slide11.xml><?xml version="1.0" encoding="utf-8"?>
+<file path=ppt/slides/slide12.xml><?xml version="1.0" encoding="utf-8"?>
 <p:sld xmlns:a="http://schemas.openxmlformats.org/drawingml/2006/main" xmlns:r="http://schemas.openxmlformats.org/officeDocument/2006/relationships" xmlns:p="http://schemas.openxmlformats.org/presentationml/2006/main">
   <p:cSld>
     <p:spTree>
@@ -18892,8 +19006,8 @@
         </p:nvSpPr>
         <p:spPr>
           <a:xfrm>
-            <a:off x="0" y="8526"/>
-            <a:ext cx="9013371" cy="792162"/>
+            <a:off x="1" y="8526"/>
+            <a:ext cx="10537372" cy="792162"/>
           </a:xfrm>
         </p:spPr>
         <p:txBody>
@@ -18924,8 +19038,8 @@
         </p:nvSpPr>
         <p:spPr>
           <a:xfrm>
-            <a:off x="317665" y="927220"/>
-            <a:ext cx="8508670" cy="1492716"/>
+            <a:off x="231820" y="927220"/>
+            <a:ext cx="10118515" cy="1631216"/>
           </a:xfrm>
           <a:prstGeom prst="rect">
             <a:avLst/>
@@ -18980,7 +19094,7 @@
           <a:p>
             <a:pPr algn="just"/>
             <a:r>
-              <a:rPr lang="en-US" altLang="zh-CN" sz="2100" dirty="0">
+              <a:rPr lang="en-US" altLang="zh-CN" dirty="0">
                 <a:solidFill>
                   <a:srgbClr val="333333"/>
                 </a:solidFill>
@@ -18993,7 +19107,7 @@
           <a:p>
             <a:pPr algn="just"/>
             <a:r>
-              <a:rPr lang="zh-CN" altLang="en-US" sz="2100" b="1" dirty="0">
+              <a:rPr lang="zh-CN" altLang="en-US" b="1" dirty="0">
                 <a:solidFill>
                   <a:schemeClr val="accent2"/>
                 </a:solidFill>
@@ -19003,7 +19117,7 @@
               <a:t>根据矢量数据属性特征</a:t>
             </a:r>
             <a:r>
-              <a:rPr lang="zh-CN" altLang="en-US" sz="2100" b="1" dirty="0">
+              <a:rPr lang="zh-CN" altLang="en-US" b="1" dirty="0">
                 <a:solidFill>
                   <a:schemeClr val="accent2"/>
                 </a:solidFill>
@@ -19013,7 +19127,7 @@
               </a:rPr>
               <a:t>（将属性特征值赋值为栅格像元值）</a:t>
             </a:r>
-            <a:endParaRPr lang="en-US" altLang="zh-CN" sz="2100" b="1" dirty="0">
+            <a:endParaRPr lang="en-US" altLang="zh-CN" b="1" dirty="0">
               <a:solidFill>
                 <a:schemeClr val="accent2"/>
               </a:solidFill>
@@ -19037,8 +19151,8 @@
         </p:nvGrpSpPr>
         <p:grpSpPr>
           <a:xfrm>
-            <a:off x="317665" y="3160292"/>
-            <a:ext cx="3684366" cy="2456244"/>
+            <a:off x="544032" y="3298791"/>
+            <a:ext cx="3823582" cy="2529845"/>
             <a:chOff x="317665" y="3160292"/>
             <a:chExt cx="3684366" cy="2456244"/>
           </a:xfrm>
@@ -19087,7 +19201,7 @@
           </p:nvSpPr>
           <p:spPr>
             <a:xfrm>
-              <a:off x="971630" y="3429000"/>
+              <a:off x="1015061" y="3429000"/>
               <a:ext cx="934742" cy="1298874"/>
             </a:xfrm>
             <a:prstGeom prst="ellipse">
@@ -19173,8 +19287,8 @@
         </p:nvGrpSpPr>
         <p:grpSpPr>
           <a:xfrm>
-            <a:off x="3876374" y="2419936"/>
-            <a:ext cx="4949961" cy="4108880"/>
+            <a:off x="4614764" y="2558436"/>
+            <a:ext cx="5136998" cy="4232002"/>
             <a:chOff x="3876374" y="2419936"/>
             <a:chExt cx="4949961" cy="4108880"/>
           </a:xfrm>
@@ -19270,428 +19384,6 @@
 </p:sld>
 </file>
 
-<file path=ppt/slides/slide12.xml><?xml version="1.0" encoding="utf-8"?>
-<p:sld xmlns:a="http://schemas.openxmlformats.org/drawingml/2006/main" xmlns:r="http://schemas.openxmlformats.org/officeDocument/2006/relationships" xmlns:p="http://schemas.openxmlformats.org/presentationml/2006/main">
-  <p:cSld>
-    <p:spTree>
-      <p:nvGrpSpPr>
-        <p:cNvPr id="1" name=""/>
-        <p:cNvGrpSpPr/>
-        <p:nvPr/>
-      </p:nvGrpSpPr>
-      <p:grpSpPr>
-        <a:xfrm>
-          <a:off x="0" y="0"/>
-          <a:ext cx="0" cy="0"/>
-          <a:chOff x="0" y="0"/>
-          <a:chExt cx="0" cy="0"/>
-        </a:xfrm>
-      </p:grpSpPr>
-      <p:sp>
-        <p:nvSpPr>
-          <p:cNvPr id="3" name="标题 2"/>
-          <p:cNvSpPr>
-            <a:spLocks noGrp="1"/>
-          </p:cNvSpPr>
-          <p:nvPr>
-            <p:ph type="title"/>
-          </p:nvPr>
-        </p:nvSpPr>
-        <p:spPr>
-          <a:xfrm>
-            <a:off x="0" y="8526"/>
-            <a:ext cx="9013371" cy="792162"/>
-          </a:xfrm>
-        </p:spPr>
-        <p:txBody>
-          <a:bodyPr/>
-          <a:lstStyle/>
-          <a:p>
-            <a:r>
-              <a:rPr lang="zh-CN" altLang="en-US" dirty="0">
-                <a:latin typeface="微软雅黑" pitchFamily="34" charset="-122"/>
-                <a:ea typeface="微软雅黑" pitchFamily="34" charset="-122"/>
-              </a:rPr>
-              <a:t>二、矢量数据栅格化</a:t>
-            </a:r>
-          </a:p>
-        </p:txBody>
-      </p:sp>
-      <p:sp>
-        <p:nvSpPr>
-          <p:cNvPr id="2" name="TextBox 1">
-            <a:extLst>
-              <a:ext uri="{FF2B5EF4-FFF2-40B4-BE49-F238E27FC236}">
-                <a16:creationId xmlns:a16="http://schemas.microsoft.com/office/drawing/2014/main" id="{631AADB6-C88A-D817-4683-FC087E4E240F}"/>
-              </a:ext>
-            </a:extLst>
-          </p:cNvPr>
-          <p:cNvSpPr txBox="1"/>
-          <p:nvPr/>
-        </p:nvSpPr>
-        <p:spPr>
-          <a:xfrm>
-            <a:off x="317665" y="875708"/>
-            <a:ext cx="8508670" cy="6001643"/>
-          </a:xfrm>
-          <a:prstGeom prst="rect">
-            <a:avLst/>
-          </a:prstGeom>
-          <a:noFill/>
-        </p:spPr>
-        <p:txBody>
-          <a:bodyPr wrap="square" rtlCol="0">
-            <a:spAutoFit/>
-          </a:bodyPr>
-          <a:lstStyle/>
-          <a:p>
-            <a:pPr algn="just">
-              <a:lnSpc>
-                <a:spcPct val="150000"/>
-              </a:lnSpc>
-            </a:pPr>
-            <a:r>
-              <a:rPr lang="en-US" altLang="zh-CN" sz="2800" b="1" dirty="0" err="1">
-                <a:solidFill>
-                  <a:srgbClr val="FF0000"/>
-                </a:solidFill>
-                <a:latin typeface="+mn-ea"/>
-                <a:ea typeface="+mn-ea"/>
-              </a:rPr>
-              <a:t>Rasterio</a:t>
-            </a:r>
-            <a:r>
-              <a:rPr lang="zh-CN" altLang="en-US" sz="2800" b="1" dirty="0">
-                <a:solidFill>
-                  <a:srgbClr val="FF0000"/>
-                </a:solidFill>
-                <a:latin typeface="+mn-ea"/>
-                <a:ea typeface="+mn-ea"/>
-              </a:rPr>
-              <a:t>程序实现</a:t>
-            </a:r>
-            <a:r>
-              <a:rPr lang="en-US" altLang="zh-CN" sz="2800" b="1" dirty="0">
-                <a:solidFill>
-                  <a:srgbClr val="333333"/>
-                </a:solidFill>
-                <a:latin typeface="+mn-ea"/>
-                <a:ea typeface="+mn-ea"/>
-              </a:rPr>
-              <a:t>: </a:t>
-            </a:r>
-          </a:p>
-          <a:p>
-            <a:pPr algn="l" eaLnBrk="0" hangingPunct="0">
-              <a:lnSpc>
-                <a:spcPct val="150000"/>
-              </a:lnSpc>
-              <a:spcBef>
-                <a:spcPct val="0"/>
-              </a:spcBef>
-            </a:pPr>
-            <a:r>
-              <a:rPr lang="zh-CN" altLang="en-US" sz="3200" b="1" dirty="0">
-                <a:solidFill>
-                  <a:schemeClr val="bg2"/>
-                </a:solidFill>
-                <a:latin typeface="+mn-ea"/>
-                <a:ea typeface="+mn-ea"/>
-              </a:rPr>
-              <a:t>主要步骤：</a:t>
-            </a:r>
-            <a:endParaRPr lang="en-US" altLang="zh-CN" sz="3200" b="1" dirty="0">
-              <a:solidFill>
-                <a:schemeClr val="bg2"/>
-              </a:solidFill>
-              <a:latin typeface="+mn-ea"/>
-              <a:ea typeface="+mn-ea"/>
-            </a:endParaRPr>
-          </a:p>
-          <a:p>
-            <a:pPr marL="457200" indent="-457200" algn="l" eaLnBrk="0" hangingPunct="0">
-              <a:lnSpc>
-                <a:spcPct val="150000"/>
-              </a:lnSpc>
-              <a:spcBef>
-                <a:spcPct val="0"/>
-              </a:spcBef>
-              <a:buAutoNum type="arabicPeriod"/>
-            </a:pPr>
-            <a:r>
-              <a:rPr lang="zh-CN" altLang="en-US" sz="2800" dirty="0">
-                <a:solidFill>
-                  <a:schemeClr val="bg2"/>
-                </a:solidFill>
-                <a:latin typeface="+mn-ea"/>
-                <a:ea typeface="+mn-ea"/>
-              </a:rPr>
-              <a:t>获取矢量数据面几何；</a:t>
-            </a:r>
-            <a:endParaRPr lang="en-US" altLang="zh-CN" sz="2800" dirty="0">
-              <a:solidFill>
-                <a:schemeClr val="bg2"/>
-              </a:solidFill>
-              <a:latin typeface="+mn-ea"/>
-              <a:ea typeface="+mn-ea"/>
-            </a:endParaRPr>
-          </a:p>
-          <a:p>
-            <a:pPr marL="457200" indent="-457200" algn="l" eaLnBrk="0" hangingPunct="0">
-              <a:lnSpc>
-                <a:spcPct val="150000"/>
-              </a:lnSpc>
-              <a:spcBef>
-                <a:spcPct val="0"/>
-              </a:spcBef>
-              <a:buAutoNum type="arabicPeriod"/>
-            </a:pPr>
-            <a:r>
-              <a:rPr lang="zh-CN" altLang="en-US" sz="2800" dirty="0">
-                <a:solidFill>
-                  <a:schemeClr val="bg2"/>
-                </a:solidFill>
-                <a:latin typeface="+mn-ea"/>
-                <a:ea typeface="+mn-ea"/>
-              </a:rPr>
-              <a:t>对获取几何信息进行栅格化。</a:t>
-            </a:r>
-            <a:endParaRPr lang="en-US" altLang="zh-CN" sz="2800" dirty="0">
-              <a:solidFill>
-                <a:schemeClr val="bg2"/>
-              </a:solidFill>
-              <a:latin typeface="+mn-ea"/>
-              <a:ea typeface="+mn-ea"/>
-            </a:endParaRPr>
-          </a:p>
-          <a:p>
-            <a:pPr marL="457200" indent="-457200" algn="l" eaLnBrk="0" hangingPunct="0">
-              <a:lnSpc>
-                <a:spcPct val="150000"/>
-              </a:lnSpc>
-              <a:spcBef>
-                <a:spcPct val="0"/>
-              </a:spcBef>
-              <a:buAutoNum type="arabicPeriod"/>
-            </a:pPr>
-            <a:endParaRPr lang="en-US" altLang="zh-CN" sz="2800" b="1" dirty="0">
-              <a:solidFill>
-                <a:srgbClr val="333333"/>
-              </a:solidFill>
-              <a:latin typeface="+mn-ea"/>
-              <a:ea typeface="+mn-ea"/>
-            </a:endParaRPr>
-          </a:p>
-          <a:p>
-            <a:pPr algn="just"/>
-            <a:r>
-              <a:rPr lang="zh-CN" altLang="en-US" sz="2800" b="1" dirty="0">
-                <a:solidFill>
-                  <a:srgbClr val="333333"/>
-                </a:solidFill>
-                <a:latin typeface="+mn-ea"/>
-                <a:ea typeface="+mn-ea"/>
-              </a:rPr>
-              <a:t>主要功能：</a:t>
-            </a:r>
-            <a:endParaRPr lang="en-US" altLang="zh-CN" sz="2800" b="1" dirty="0">
-              <a:solidFill>
-                <a:srgbClr val="333333"/>
-              </a:solidFill>
-              <a:latin typeface="+mn-ea"/>
-              <a:ea typeface="+mn-ea"/>
-            </a:endParaRPr>
-          </a:p>
-          <a:p>
-            <a:pPr algn="just"/>
-            <a:r>
-              <a:rPr lang="en-US" altLang="zh-CN" sz="2800" dirty="0" err="1">
-                <a:solidFill>
-                  <a:srgbClr val="333333"/>
-                </a:solidFill>
-                <a:latin typeface="+mn-ea"/>
-                <a:ea typeface="+mn-ea"/>
-              </a:rPr>
-              <a:t>geopandas.read_file</a:t>
-            </a:r>
-            <a:r>
-              <a:rPr lang="en-US" altLang="zh-CN" sz="2800" dirty="0">
-                <a:solidFill>
-                  <a:srgbClr val="333333"/>
-                </a:solidFill>
-                <a:latin typeface="+mn-ea"/>
-                <a:ea typeface="+mn-ea"/>
-              </a:rPr>
-              <a:t>()  ## </a:t>
-            </a:r>
-            <a:r>
-              <a:rPr lang="zh-CN" altLang="en-US" sz="2800" dirty="0">
-                <a:solidFill>
-                  <a:srgbClr val="333333"/>
-                </a:solidFill>
-                <a:latin typeface="+mn-ea"/>
-                <a:ea typeface="+mn-ea"/>
-              </a:rPr>
-              <a:t>读取矢量数据</a:t>
-            </a:r>
-            <a:endParaRPr lang="en-US" sz="2800" dirty="0">
-              <a:solidFill>
-                <a:srgbClr val="333333"/>
-              </a:solidFill>
-              <a:latin typeface="+mn-ea"/>
-              <a:ea typeface="+mn-ea"/>
-            </a:endParaRPr>
-          </a:p>
-          <a:p>
-            <a:pPr algn="just"/>
-            <a:r>
-              <a:rPr lang="en-US" sz="2800" dirty="0" err="1">
-                <a:solidFill>
-                  <a:srgbClr val="333333"/>
-                </a:solidFill>
-                <a:latin typeface="+mn-ea"/>
-                <a:ea typeface="+mn-ea"/>
-              </a:rPr>
-              <a:t>rasterio.features.rasterize</a:t>
-            </a:r>
-            <a:r>
-              <a:rPr lang="en-US" sz="2800" dirty="0">
-                <a:solidFill>
-                  <a:srgbClr val="333333"/>
-                </a:solidFill>
-                <a:latin typeface="+mn-ea"/>
-                <a:ea typeface="+mn-ea"/>
-              </a:rPr>
-              <a:t>()  # </a:t>
-            </a:r>
-            <a:r>
-              <a:rPr lang="zh-CN" altLang="en-US" sz="2800" dirty="0">
-                <a:solidFill>
-                  <a:srgbClr val="333333"/>
-                </a:solidFill>
-                <a:latin typeface="+mn-ea"/>
-                <a:ea typeface="+mn-ea"/>
-              </a:rPr>
-              <a:t>根据几何信息栅格化</a:t>
-            </a:r>
-            <a:endParaRPr lang="en-US" altLang="zh-CN" sz="2800" dirty="0">
-              <a:solidFill>
-                <a:srgbClr val="333333"/>
-              </a:solidFill>
-              <a:latin typeface="+mn-ea"/>
-              <a:ea typeface="+mn-ea"/>
-            </a:endParaRPr>
-          </a:p>
-          <a:p>
-            <a:pPr algn="just"/>
-            <a:r>
-              <a:rPr lang="en-US" altLang="zh-CN" sz="2800" dirty="0" err="1">
-                <a:solidFill>
-                  <a:srgbClr val="333333"/>
-                </a:solidFill>
-                <a:latin typeface="+mn-ea"/>
-                <a:ea typeface="+mn-ea"/>
-              </a:rPr>
-              <a:t>rasterio.open</a:t>
-            </a:r>
-            <a:r>
-              <a:rPr lang="en-US" altLang="zh-CN" sz="2800" dirty="0">
-                <a:solidFill>
-                  <a:srgbClr val="333333"/>
-                </a:solidFill>
-                <a:latin typeface="+mn-ea"/>
-                <a:ea typeface="+mn-ea"/>
-              </a:rPr>
-              <a:t>()  ## </a:t>
-            </a:r>
-            <a:r>
-              <a:rPr lang="zh-CN" altLang="en-US" sz="2800" dirty="0">
-                <a:solidFill>
-                  <a:srgbClr val="333333"/>
-                </a:solidFill>
-                <a:latin typeface="+mn-ea"/>
-                <a:ea typeface="+mn-ea"/>
-              </a:rPr>
-              <a:t>写出</a:t>
-            </a:r>
-            <a:endParaRPr lang="en-US" altLang="zh-CN" sz="2800" dirty="0">
-              <a:solidFill>
-                <a:srgbClr val="333333"/>
-              </a:solidFill>
-              <a:latin typeface="+mn-ea"/>
-              <a:ea typeface="+mn-ea"/>
-            </a:endParaRPr>
-          </a:p>
-        </p:txBody>
-      </p:sp>
-      <p:sp>
-        <p:nvSpPr>
-          <p:cNvPr id="4" name="文本框 3">
-            <a:extLst>
-              <a:ext uri="{FF2B5EF4-FFF2-40B4-BE49-F238E27FC236}">
-                <a16:creationId xmlns:a16="http://schemas.microsoft.com/office/drawing/2014/main" id="{69AE50F0-F783-AE9A-11A6-37FA009DAC38}"/>
-              </a:ext>
-            </a:extLst>
-          </p:cNvPr>
-          <p:cNvSpPr txBox="1"/>
-          <p:nvPr/>
-        </p:nvSpPr>
-        <p:spPr>
-          <a:xfrm>
-            <a:off x="6149662" y="6188296"/>
-            <a:ext cx="2736760" cy="461665"/>
-          </a:xfrm>
-          <a:prstGeom prst="rect">
-            <a:avLst/>
-          </a:prstGeom>
-          <a:noFill/>
-        </p:spPr>
-        <p:txBody>
-          <a:bodyPr wrap="square" rtlCol="0">
-            <a:spAutoFit/>
-          </a:bodyPr>
-          <a:lstStyle/>
-          <a:p>
-            <a:pPr algn="r"/>
-            <a:r>
-              <a:rPr lang="en-US" altLang="zh-CN" dirty="0">
-                <a:solidFill>
-                  <a:schemeClr val="accent1"/>
-                </a:solidFill>
-                <a:latin typeface="+mn-ea"/>
-                <a:ea typeface="+mn-ea"/>
-              </a:rPr>
-              <a:t>…</a:t>
-            </a:r>
-            <a:r>
-              <a:rPr lang="zh-CN" altLang="en-US" dirty="0">
-                <a:solidFill>
-                  <a:schemeClr val="accent1"/>
-                </a:solidFill>
-                <a:latin typeface="+mn-ea"/>
-                <a:ea typeface="+mn-ea"/>
-              </a:rPr>
-              <a:t>附程序演示</a:t>
-            </a:r>
-          </a:p>
-        </p:txBody>
-      </p:sp>
-    </p:spTree>
-    <p:extLst>
-      <p:ext uri="{BB962C8B-B14F-4D97-AF65-F5344CB8AC3E}">
-        <p14:creationId xmlns:p14="http://schemas.microsoft.com/office/powerpoint/2010/main" val="1379003114"/>
-      </p:ext>
-    </p:extLst>
-  </p:cSld>
-  <p:clrMapOvr>
-    <a:masterClrMapping/>
-  </p:clrMapOvr>
-  <p:transition>
-    <p:fade/>
-  </p:transition>
-</p:sld>
-</file>
-
 <file path=ppt/slides/slide13.xml><?xml version="1.0" encoding="utf-8"?>
 <p:sld xmlns:a="http://schemas.openxmlformats.org/drawingml/2006/main" xmlns:r="http://schemas.openxmlformats.org/officeDocument/2006/relationships" xmlns:p="http://schemas.openxmlformats.org/presentationml/2006/main">
   <p:cSld>
@@ -19721,8 +19413,412 @@
         </p:nvSpPr>
         <p:spPr>
           <a:xfrm>
-            <a:off x="0" y="8526"/>
-            <a:ext cx="9013371" cy="792162"/>
+            <a:off x="1" y="8526"/>
+            <a:ext cx="10537372" cy="792162"/>
+          </a:xfrm>
+        </p:spPr>
+        <p:txBody>
+          <a:bodyPr/>
+          <a:lstStyle/>
+          <a:p>
+            <a:r>
+              <a:rPr lang="zh-CN" altLang="en-US" dirty="0">
+                <a:latin typeface="微软雅黑" pitchFamily="34" charset="-122"/>
+                <a:ea typeface="微软雅黑" pitchFamily="34" charset="-122"/>
+              </a:rPr>
+              <a:t>二、矢量数据栅格化</a:t>
+            </a:r>
+          </a:p>
+        </p:txBody>
+      </p:sp>
+      <p:sp>
+        <p:nvSpPr>
+          <p:cNvPr id="2" name="TextBox 1">
+            <a:extLst>
+              <a:ext uri="{FF2B5EF4-FFF2-40B4-BE49-F238E27FC236}">
+                <a16:creationId xmlns:a16="http://schemas.microsoft.com/office/drawing/2014/main" id="{631AADB6-C88A-D817-4683-FC087E4E240F}"/>
+              </a:ext>
+            </a:extLst>
+          </p:cNvPr>
+          <p:cNvSpPr txBox="1"/>
+          <p:nvPr/>
+        </p:nvSpPr>
+        <p:spPr>
+          <a:xfrm>
+            <a:off x="360608" y="895026"/>
+            <a:ext cx="11487955" cy="5355312"/>
+          </a:xfrm>
+          <a:prstGeom prst="rect">
+            <a:avLst/>
+          </a:prstGeom>
+          <a:noFill/>
+        </p:spPr>
+        <p:txBody>
+          <a:bodyPr wrap="square" rtlCol="0">
+            <a:spAutoFit/>
+          </a:bodyPr>
+          <a:lstStyle/>
+          <a:p>
+            <a:pPr algn="just">
+              <a:lnSpc>
+                <a:spcPct val="150000"/>
+              </a:lnSpc>
+            </a:pPr>
+            <a:r>
+              <a:rPr lang="en-US" altLang="zh-CN" sz="2800" b="1" dirty="0" err="1">
+                <a:solidFill>
+                  <a:srgbClr val="FF0000"/>
+                </a:solidFill>
+                <a:latin typeface="+mn-ea"/>
+                <a:ea typeface="+mn-ea"/>
+              </a:rPr>
+              <a:t>Rasterio</a:t>
+            </a:r>
+            <a:r>
+              <a:rPr lang="zh-CN" altLang="en-US" sz="2800" b="1" dirty="0">
+                <a:solidFill>
+                  <a:srgbClr val="FF0000"/>
+                </a:solidFill>
+                <a:latin typeface="+mn-ea"/>
+                <a:ea typeface="+mn-ea"/>
+              </a:rPr>
+              <a:t>程序实现</a:t>
+            </a:r>
+            <a:r>
+              <a:rPr lang="en-US" altLang="zh-CN" sz="2800" b="1" dirty="0">
+                <a:solidFill>
+                  <a:srgbClr val="333333"/>
+                </a:solidFill>
+                <a:latin typeface="+mn-ea"/>
+                <a:ea typeface="+mn-ea"/>
+              </a:rPr>
+              <a:t>: </a:t>
+            </a:r>
+          </a:p>
+          <a:p>
+            <a:pPr algn="l" eaLnBrk="0" hangingPunct="0">
+              <a:lnSpc>
+                <a:spcPct val="150000"/>
+              </a:lnSpc>
+              <a:spcBef>
+                <a:spcPct val="0"/>
+              </a:spcBef>
+            </a:pPr>
+            <a:r>
+              <a:rPr lang="zh-CN" altLang="en-US" sz="3200" b="1" dirty="0">
+                <a:solidFill>
+                  <a:schemeClr val="bg2"/>
+                </a:solidFill>
+                <a:latin typeface="+mn-ea"/>
+                <a:ea typeface="+mn-ea"/>
+              </a:rPr>
+              <a:t>主要步骤：</a:t>
+            </a:r>
+            <a:endParaRPr lang="en-US" altLang="zh-CN" sz="3200" b="1" dirty="0">
+              <a:solidFill>
+                <a:schemeClr val="bg2"/>
+              </a:solidFill>
+              <a:latin typeface="+mn-ea"/>
+              <a:ea typeface="+mn-ea"/>
+            </a:endParaRPr>
+          </a:p>
+          <a:p>
+            <a:pPr marL="457200" indent="-457200" algn="l" eaLnBrk="0" hangingPunct="0">
+              <a:lnSpc>
+                <a:spcPct val="150000"/>
+              </a:lnSpc>
+              <a:spcBef>
+                <a:spcPct val="0"/>
+              </a:spcBef>
+              <a:buAutoNum type="arabicPeriod"/>
+            </a:pPr>
+            <a:r>
+              <a:rPr lang="zh-CN" altLang="en-US" sz="2800" dirty="0">
+                <a:solidFill>
+                  <a:schemeClr val="bg2"/>
+                </a:solidFill>
+                <a:latin typeface="+mn-ea"/>
+                <a:ea typeface="+mn-ea"/>
+              </a:rPr>
+              <a:t>获取矢量数据面几何；</a:t>
+            </a:r>
+            <a:endParaRPr lang="en-US" altLang="zh-CN" sz="2800" dirty="0">
+              <a:solidFill>
+                <a:schemeClr val="bg2"/>
+              </a:solidFill>
+              <a:latin typeface="+mn-ea"/>
+              <a:ea typeface="+mn-ea"/>
+            </a:endParaRPr>
+          </a:p>
+          <a:p>
+            <a:pPr marL="457200" indent="-457200" algn="l" eaLnBrk="0" hangingPunct="0">
+              <a:lnSpc>
+                <a:spcPct val="150000"/>
+              </a:lnSpc>
+              <a:spcBef>
+                <a:spcPct val="0"/>
+              </a:spcBef>
+              <a:buAutoNum type="arabicPeriod"/>
+            </a:pPr>
+            <a:r>
+              <a:rPr lang="zh-CN" altLang="en-US" sz="2800" dirty="0">
+                <a:solidFill>
+                  <a:schemeClr val="bg2"/>
+                </a:solidFill>
+                <a:latin typeface="+mn-ea"/>
+                <a:ea typeface="+mn-ea"/>
+              </a:rPr>
+              <a:t>对获取几何信息进行栅格化。</a:t>
+            </a:r>
+            <a:endParaRPr lang="en-US" altLang="zh-CN" sz="2800" b="1" dirty="0">
+              <a:solidFill>
+                <a:srgbClr val="333333"/>
+              </a:solidFill>
+              <a:latin typeface="+mn-ea"/>
+              <a:ea typeface="+mn-ea"/>
+            </a:endParaRPr>
+          </a:p>
+          <a:p>
+            <a:pPr algn="just"/>
+            <a:r>
+              <a:rPr lang="zh-CN" altLang="en-US" sz="2800" b="1" dirty="0">
+                <a:solidFill>
+                  <a:srgbClr val="333333"/>
+                </a:solidFill>
+                <a:latin typeface="+mn-ea"/>
+                <a:ea typeface="+mn-ea"/>
+              </a:rPr>
+              <a:t>主要功能：</a:t>
+            </a:r>
+            <a:endParaRPr lang="en-US" altLang="zh-CN" sz="2800" b="1" dirty="0">
+              <a:solidFill>
+                <a:srgbClr val="333333"/>
+              </a:solidFill>
+              <a:latin typeface="+mn-ea"/>
+              <a:ea typeface="+mn-ea"/>
+            </a:endParaRPr>
+          </a:p>
+          <a:p>
+            <a:pPr algn="just"/>
+            <a:r>
+              <a:rPr lang="en-US" altLang="zh-CN" sz="2800" dirty="0" err="1">
+                <a:solidFill>
+                  <a:srgbClr val="333333"/>
+                </a:solidFill>
+                <a:latin typeface="+mn-ea"/>
+                <a:ea typeface="+mn-ea"/>
+              </a:rPr>
+              <a:t>geopandas.read_file</a:t>
+            </a:r>
+            <a:r>
+              <a:rPr lang="en-US" altLang="zh-CN" sz="2800" dirty="0">
+                <a:solidFill>
+                  <a:srgbClr val="333333"/>
+                </a:solidFill>
+                <a:latin typeface="+mn-ea"/>
+                <a:ea typeface="+mn-ea"/>
+              </a:rPr>
+              <a:t>()  ## </a:t>
+            </a:r>
+            <a:r>
+              <a:rPr lang="zh-CN" altLang="en-US" sz="2800" dirty="0">
+                <a:solidFill>
+                  <a:srgbClr val="333333"/>
+                </a:solidFill>
+                <a:latin typeface="+mn-ea"/>
+                <a:ea typeface="+mn-ea"/>
+              </a:rPr>
+              <a:t>读取矢量数据</a:t>
+            </a:r>
+            <a:endParaRPr lang="en-US" sz="2800" dirty="0">
+              <a:solidFill>
+                <a:srgbClr val="333333"/>
+              </a:solidFill>
+              <a:latin typeface="+mn-ea"/>
+              <a:ea typeface="+mn-ea"/>
+            </a:endParaRPr>
+          </a:p>
+          <a:p>
+            <a:pPr algn="just"/>
+            <a:r>
+              <a:rPr lang="en-US" sz="2800" dirty="0" err="1">
+                <a:solidFill>
+                  <a:srgbClr val="333333"/>
+                </a:solidFill>
+                <a:latin typeface="+mn-ea"/>
+                <a:ea typeface="+mn-ea"/>
+              </a:rPr>
+              <a:t>rasterio.features.rasterize</a:t>
+            </a:r>
+            <a:r>
+              <a:rPr lang="en-US" sz="2800" dirty="0">
+                <a:solidFill>
+                  <a:srgbClr val="333333"/>
+                </a:solidFill>
+                <a:latin typeface="+mn-ea"/>
+                <a:ea typeface="+mn-ea"/>
+              </a:rPr>
+              <a:t>()  # </a:t>
+            </a:r>
+            <a:r>
+              <a:rPr lang="zh-CN" altLang="en-US" sz="2800" dirty="0">
+                <a:solidFill>
+                  <a:srgbClr val="333333"/>
+                </a:solidFill>
+                <a:latin typeface="+mn-ea"/>
+                <a:ea typeface="+mn-ea"/>
+              </a:rPr>
+              <a:t>根据几何信息栅格化</a:t>
+            </a:r>
+            <a:endParaRPr lang="en-US" altLang="zh-CN" sz="2800" dirty="0">
+              <a:solidFill>
+                <a:srgbClr val="333333"/>
+              </a:solidFill>
+              <a:latin typeface="+mn-ea"/>
+              <a:ea typeface="+mn-ea"/>
+            </a:endParaRPr>
+          </a:p>
+          <a:p>
+            <a:pPr algn="just"/>
+            <a:r>
+              <a:rPr lang="en-US" altLang="zh-CN" sz="2800" dirty="0" err="1">
+                <a:solidFill>
+                  <a:srgbClr val="333333"/>
+                </a:solidFill>
+                <a:latin typeface="+mn-ea"/>
+                <a:ea typeface="+mn-ea"/>
+              </a:rPr>
+              <a:t>rasterio.open</a:t>
+            </a:r>
+            <a:r>
+              <a:rPr lang="en-US" altLang="zh-CN" sz="2800" dirty="0">
+                <a:solidFill>
+                  <a:srgbClr val="333333"/>
+                </a:solidFill>
+                <a:latin typeface="+mn-ea"/>
+                <a:ea typeface="+mn-ea"/>
+              </a:rPr>
+              <a:t>()  ## </a:t>
+            </a:r>
+            <a:r>
+              <a:rPr lang="zh-CN" altLang="en-US" sz="2800" dirty="0">
+                <a:solidFill>
+                  <a:srgbClr val="333333"/>
+                </a:solidFill>
+                <a:latin typeface="+mn-ea"/>
+                <a:ea typeface="+mn-ea"/>
+              </a:rPr>
+              <a:t>写出</a:t>
+            </a:r>
+            <a:endParaRPr lang="en-US" altLang="zh-CN" sz="2800" dirty="0">
+              <a:solidFill>
+                <a:srgbClr val="333333"/>
+              </a:solidFill>
+              <a:latin typeface="+mn-ea"/>
+              <a:ea typeface="+mn-ea"/>
+            </a:endParaRPr>
+          </a:p>
+        </p:txBody>
+      </p:sp>
+      <p:sp>
+        <p:nvSpPr>
+          <p:cNvPr id="4" name="文本框 3">
+            <a:extLst>
+              <a:ext uri="{FF2B5EF4-FFF2-40B4-BE49-F238E27FC236}">
+                <a16:creationId xmlns:a16="http://schemas.microsoft.com/office/drawing/2014/main" id="{69AE50F0-F783-AE9A-11A6-37FA009DAC38}"/>
+              </a:ext>
+            </a:extLst>
+          </p:cNvPr>
+          <p:cNvSpPr txBox="1"/>
+          <p:nvPr/>
+        </p:nvSpPr>
+        <p:spPr>
+          <a:xfrm>
+            <a:off x="9219127" y="6220551"/>
+            <a:ext cx="2736760" cy="461665"/>
+          </a:xfrm>
+          <a:prstGeom prst="rect">
+            <a:avLst/>
+          </a:prstGeom>
+          <a:noFill/>
+        </p:spPr>
+        <p:txBody>
+          <a:bodyPr wrap="square" rtlCol="0">
+            <a:spAutoFit/>
+          </a:bodyPr>
+          <a:lstStyle/>
+          <a:p>
+            <a:pPr algn="r"/>
+            <a:r>
+              <a:rPr lang="en-US" altLang="zh-CN" dirty="0">
+                <a:solidFill>
+                  <a:schemeClr val="accent1"/>
+                </a:solidFill>
+                <a:latin typeface="+mn-ea"/>
+                <a:ea typeface="+mn-ea"/>
+              </a:rPr>
+              <a:t>…</a:t>
+            </a:r>
+            <a:r>
+              <a:rPr lang="zh-CN" altLang="en-US" dirty="0">
+                <a:solidFill>
+                  <a:schemeClr val="accent1"/>
+                </a:solidFill>
+                <a:latin typeface="+mn-ea"/>
+                <a:ea typeface="+mn-ea"/>
+              </a:rPr>
+              <a:t>附程序演示</a:t>
+            </a:r>
+          </a:p>
+        </p:txBody>
+      </p:sp>
+    </p:spTree>
+    <p:extLst>
+      <p:ext uri="{BB962C8B-B14F-4D97-AF65-F5344CB8AC3E}">
+        <p14:creationId xmlns:p14="http://schemas.microsoft.com/office/powerpoint/2010/main" val="1379003114"/>
+      </p:ext>
+    </p:extLst>
+  </p:cSld>
+  <p:clrMapOvr>
+    <a:masterClrMapping/>
+  </p:clrMapOvr>
+  <p:transition>
+    <p:fade/>
+  </p:transition>
+</p:sld>
+</file>
+
+<file path=ppt/slides/slide14.xml><?xml version="1.0" encoding="utf-8"?>
+<p:sld xmlns:a="http://schemas.openxmlformats.org/drawingml/2006/main" xmlns:r="http://schemas.openxmlformats.org/officeDocument/2006/relationships" xmlns:p="http://schemas.openxmlformats.org/presentationml/2006/main">
+  <p:cSld>
+    <p:spTree>
+      <p:nvGrpSpPr>
+        <p:cNvPr id="1" name=""/>
+        <p:cNvGrpSpPr/>
+        <p:nvPr/>
+      </p:nvGrpSpPr>
+      <p:grpSpPr>
+        <a:xfrm>
+          <a:off x="0" y="0"/>
+          <a:ext cx="0" cy="0"/>
+          <a:chOff x="0" y="0"/>
+          <a:chExt cx="0" cy="0"/>
+        </a:xfrm>
+      </p:grpSpPr>
+      <p:sp>
+        <p:nvSpPr>
+          <p:cNvPr id="3" name="标题 2"/>
+          <p:cNvSpPr>
+            <a:spLocks noGrp="1"/>
+          </p:cNvSpPr>
+          <p:nvPr>
+            <p:ph type="title"/>
+          </p:nvPr>
+        </p:nvSpPr>
+        <p:spPr>
+          <a:xfrm>
+            <a:off x="1" y="8526"/>
+            <a:ext cx="10537372" cy="792162"/>
           </a:xfrm>
         </p:spPr>
         <p:txBody>
@@ -19754,8 +19850,8 @@
         </p:nvSpPr>
         <p:spPr>
           <a:xfrm>
-            <a:off x="414554" y="1013040"/>
-            <a:ext cx="8314891" cy="743986"/>
+            <a:off x="206063" y="1013040"/>
+            <a:ext cx="10047384" cy="743986"/>
           </a:xfrm>
           <a:prstGeom prst="rect">
             <a:avLst/>
@@ -19810,6 +19906,511 @@
 </file>
 
 <file path=ppt/slides/slide2.xml><?xml version="1.0" encoding="utf-8"?>
+<p:sld xmlns:a="http://schemas.openxmlformats.org/drawingml/2006/main" xmlns:r="http://schemas.openxmlformats.org/officeDocument/2006/relationships" xmlns:p="http://schemas.openxmlformats.org/presentationml/2006/main">
+  <p:cSld>
+    <p:spTree>
+      <p:nvGrpSpPr>
+        <p:cNvPr id="1" name="">
+          <a:extLst>
+            <a:ext uri="{FF2B5EF4-FFF2-40B4-BE49-F238E27FC236}">
+              <a16:creationId xmlns:a16="http://schemas.microsoft.com/office/drawing/2014/main" id="{4D3BEC81-C257-7A49-2477-29C6ED5317B6}"/>
+            </a:ext>
+          </a:extLst>
+        </p:cNvPr>
+        <p:cNvGrpSpPr/>
+        <p:nvPr/>
+      </p:nvGrpSpPr>
+      <p:grpSpPr>
+        <a:xfrm>
+          <a:off x="0" y="0"/>
+          <a:ext cx="0" cy="0"/>
+          <a:chOff x="0" y="0"/>
+          <a:chExt cx="0" cy="0"/>
+        </a:xfrm>
+      </p:grpSpPr>
+      <p:sp>
+        <p:nvSpPr>
+          <p:cNvPr id="3" name="标题 2">
+            <a:extLst>
+              <a:ext uri="{FF2B5EF4-FFF2-40B4-BE49-F238E27FC236}">
+                <a16:creationId xmlns:a16="http://schemas.microsoft.com/office/drawing/2014/main" id="{A503A996-BA48-E1F0-A261-C3199CC66F31}"/>
+              </a:ext>
+            </a:extLst>
+          </p:cNvPr>
+          <p:cNvSpPr>
+            <a:spLocks noGrp="1"/>
+          </p:cNvSpPr>
+          <p:nvPr>
+            <p:ph type="title"/>
+          </p:nvPr>
+        </p:nvSpPr>
+        <p:spPr>
+          <a:xfrm>
+            <a:off x="1" y="8526"/>
+            <a:ext cx="10537372" cy="792162"/>
+          </a:xfrm>
+        </p:spPr>
+        <p:txBody>
+          <a:bodyPr/>
+          <a:lstStyle/>
+          <a:p>
+            <a:r>
+              <a:rPr lang="zh-CN" altLang="en-US" dirty="0">
+                <a:latin typeface="微软雅黑" pitchFamily="34" charset="-122"/>
+                <a:ea typeface="微软雅黑" pitchFamily="34" charset="-122"/>
+              </a:rPr>
+              <a:t>一、栅格数据矢量化</a:t>
+            </a:r>
+          </a:p>
+        </p:txBody>
+      </p:sp>
+      <p:sp>
+        <p:nvSpPr>
+          <p:cNvPr id="2" name="TextBox 1">
+            <a:extLst>
+              <a:ext uri="{FF2B5EF4-FFF2-40B4-BE49-F238E27FC236}">
+                <a16:creationId xmlns:a16="http://schemas.microsoft.com/office/drawing/2014/main" id="{5CCB063E-4F94-DFDA-0CAE-7795252E0B66}"/>
+              </a:ext>
+            </a:extLst>
+          </p:cNvPr>
+          <p:cNvSpPr txBox="1"/>
+          <p:nvPr/>
+        </p:nvSpPr>
+        <p:spPr>
+          <a:xfrm>
+            <a:off x="405684" y="1110766"/>
+            <a:ext cx="11120908" cy="2025747"/>
+          </a:xfrm>
+          <a:prstGeom prst="rect">
+            <a:avLst/>
+          </a:prstGeom>
+          <a:noFill/>
+        </p:spPr>
+        <p:txBody>
+          <a:bodyPr wrap="square" rtlCol="0">
+            <a:spAutoFit/>
+          </a:bodyPr>
+          <a:lstStyle/>
+          <a:p>
+            <a:pPr>
+              <a:lnSpc>
+                <a:spcPct val="150000"/>
+              </a:lnSpc>
+            </a:pPr>
+            <a:r>
+              <a:rPr lang="en-US" altLang="zh-CN" sz="4000" b="1" dirty="0">
+                <a:solidFill>
+                  <a:srgbClr val="FF0000"/>
+                </a:solidFill>
+                <a:latin typeface="+mn-ea"/>
+                <a:ea typeface="+mn-ea"/>
+              </a:rPr>
+              <a:t>QGIS</a:t>
+            </a:r>
+            <a:r>
+              <a:rPr lang="zh-CN" altLang="en-US" sz="4000" b="1" dirty="0">
+                <a:solidFill>
+                  <a:srgbClr val="FF0000"/>
+                </a:solidFill>
+                <a:latin typeface="+mn-ea"/>
+                <a:ea typeface="+mn-ea"/>
+              </a:rPr>
+              <a:t>课堂练习：</a:t>
+            </a:r>
+            <a:endParaRPr lang="en-US" altLang="zh-CN" sz="4000" b="1" dirty="0">
+              <a:solidFill>
+                <a:srgbClr val="FF0000"/>
+              </a:solidFill>
+              <a:latin typeface="+mn-ea"/>
+              <a:ea typeface="+mn-ea"/>
+            </a:endParaRPr>
+          </a:p>
+          <a:p>
+            <a:pPr>
+              <a:lnSpc>
+                <a:spcPct val="150000"/>
+              </a:lnSpc>
+            </a:pPr>
+            <a:r>
+              <a:rPr lang="zh-CN" altLang="en-US" sz="3600" b="1" dirty="0">
+                <a:solidFill>
+                  <a:srgbClr val="333333"/>
+                </a:solidFill>
+                <a:latin typeface="+mn-ea"/>
+                <a:ea typeface="+mn-ea"/>
+              </a:rPr>
+              <a:t>昆明市呈贡区</a:t>
+            </a:r>
+            <a:r>
+              <a:rPr lang="en-US" altLang="zh-CN" sz="3600" b="1" dirty="0">
+                <a:solidFill>
+                  <a:srgbClr val="333333"/>
+                </a:solidFill>
+                <a:latin typeface="+mn-ea"/>
+                <a:ea typeface="+mn-ea"/>
+              </a:rPr>
+              <a:t>MNDWI</a:t>
+            </a:r>
+            <a:r>
+              <a:rPr lang="zh-CN" altLang="en-US" sz="3600" b="1" dirty="0">
+                <a:solidFill>
+                  <a:srgbClr val="333333"/>
+                </a:solidFill>
+                <a:latin typeface="+mn-ea"/>
+                <a:ea typeface="+mn-ea"/>
+              </a:rPr>
+              <a:t>水体指数计算及水体阈值分割</a:t>
+            </a:r>
+            <a:endParaRPr lang="en-US" altLang="zh-CN" sz="3600" b="1" dirty="0">
+              <a:solidFill>
+                <a:srgbClr val="333333"/>
+              </a:solidFill>
+              <a:latin typeface="+mn-ea"/>
+              <a:ea typeface="+mn-ea"/>
+            </a:endParaRPr>
+          </a:p>
+        </p:txBody>
+      </p:sp>
+      <mc:AlternateContent xmlns:mc="http://schemas.openxmlformats.org/markup-compatibility/2006">
+        <mc:Choice xmlns:a14="http://schemas.microsoft.com/office/drawing/2010/main" Requires="a14">
+          <p:sp>
+            <p:nvSpPr>
+              <p:cNvPr id="7" name="文本框 6">
+                <a:extLst>
+                  <a:ext uri="{FF2B5EF4-FFF2-40B4-BE49-F238E27FC236}">
+                    <a16:creationId xmlns:a16="http://schemas.microsoft.com/office/drawing/2014/main" id="{29BF6F25-EF93-423D-5043-439AA6DA2F8A}"/>
+                  </a:ext>
+                </a:extLst>
+              </p:cNvPr>
+              <p:cNvSpPr txBox="1"/>
+              <p:nvPr/>
+            </p:nvSpPr>
+            <p:spPr>
+              <a:xfrm>
+                <a:off x="4780271" y="2965360"/>
+                <a:ext cx="2539157" cy="369332"/>
+              </a:xfrm>
+              <a:prstGeom prst="rect">
+                <a:avLst/>
+              </a:prstGeom>
+              <a:noFill/>
+            </p:spPr>
+            <p:txBody>
+              <a:bodyPr wrap="none" lIns="0" tIns="0" rIns="0" bIns="0" rtlCol="0">
+                <a:spAutoFit/>
+              </a:bodyPr>
+              <a:lstStyle/>
+              <a:p>
+                <a14:m>
+                  <m:oMathPara xmlns:m="http://schemas.openxmlformats.org/officeDocument/2006/math">
+                    <m:oMathParaPr>
+                      <m:jc m:val="centerGroup"/>
+                    </m:oMathParaPr>
+                    <m:oMath xmlns:m="http://schemas.openxmlformats.org/officeDocument/2006/math">
+                      <a:fld id="{825F15A7-03F4-43D7-82C5-3E23DA2F108C}" type="mathplaceholder">
+                        <a:rPr lang="zh-CN" altLang="en-US" i="1" smtClean="0">
+                          <a:latin typeface="Cambria Math" panose="02040503050406030204" pitchFamily="18" charset="0"/>
+                        </a:rPr>
+                        <a:t>在此处键入公式。</a:t>
+                      </a:fld>
+                    </m:oMath>
+                  </m:oMathPara>
+                </a14:m>
+                <a:endParaRPr lang="zh-CN" altLang="en-US" dirty="0"/>
+              </a:p>
+            </p:txBody>
+          </p:sp>
+        </mc:Choice>
+        <mc:Fallback>
+          <p:sp>
+            <p:nvSpPr>
+              <p:cNvPr id="7" name="文本框 6">
+                <a:extLst>
+                  <a:ext uri="{FF2B5EF4-FFF2-40B4-BE49-F238E27FC236}">
+                    <a16:creationId xmlns:a16="http://schemas.microsoft.com/office/drawing/2014/main" id="{29BF6F25-EF93-423D-5043-439AA6DA2F8A}"/>
+                  </a:ext>
+                </a:extLst>
+              </p:cNvPr>
+              <p:cNvSpPr txBox="1">
+                <a:spLocks noRot="1" noChangeAspect="1" noMove="1" noResize="1" noEditPoints="1" noAdjustHandles="1" noChangeArrowheads="1" noChangeShapeType="1" noTextEdit="1"/>
+              </p:cNvSpPr>
+              <p:nvPr/>
+            </p:nvSpPr>
+            <p:spPr>
+              <a:xfrm>
+                <a:off x="4780271" y="2965360"/>
+                <a:ext cx="2539157" cy="369332"/>
+              </a:xfrm>
+              <a:prstGeom prst="rect">
+                <a:avLst/>
+              </a:prstGeom>
+              <a:blipFill>
+                <a:blip r:embed="rId3"/>
+                <a:stretch>
+                  <a:fillRect l="-5276" t="-8197" r="-1918" b="-26230"/>
+                </a:stretch>
+              </a:blipFill>
+            </p:spPr>
+            <p:txBody>
+              <a:bodyPr/>
+              <a:lstStyle/>
+              <a:p>
+                <a:r>
+                  <a:rPr lang="zh-CN" altLang="en-US">
+                    <a:noFill/>
+                  </a:rPr>
+                  <a:t> </a:t>
+                </a:r>
+              </a:p>
+            </p:txBody>
+          </p:sp>
+        </mc:Fallback>
+      </mc:AlternateContent>
+      <mc:AlternateContent xmlns:mc="http://schemas.openxmlformats.org/markup-compatibility/2006">
+        <mc:Choice xmlns:a14="http://schemas.microsoft.com/office/drawing/2010/main" Requires="a14">
+          <p:sp>
+            <p:nvSpPr>
+              <p:cNvPr id="8" name="文本框 7">
+                <a:extLst>
+                  <a:ext uri="{FF2B5EF4-FFF2-40B4-BE49-F238E27FC236}">
+                    <a16:creationId xmlns:a16="http://schemas.microsoft.com/office/drawing/2014/main" id="{26BF9170-6166-2B5B-8F51-04DE8589BF30}"/>
+                  </a:ext>
+                </a:extLst>
+              </p:cNvPr>
+              <p:cNvSpPr txBox="1"/>
+              <p:nvPr/>
+            </p:nvSpPr>
+            <p:spPr>
+              <a:xfrm>
+                <a:off x="405682" y="3844599"/>
+                <a:ext cx="11120907" cy="677108"/>
+              </a:xfrm>
+              <a:prstGeom prst="rect">
+                <a:avLst/>
+              </a:prstGeom>
+              <a:noFill/>
+            </p:spPr>
+            <p:txBody>
+              <a:bodyPr wrap="square" lIns="0" tIns="0" rIns="0" bIns="0" rtlCol="0">
+                <a:spAutoFit/>
+              </a:bodyPr>
+              <a:lstStyle/>
+              <a:p>
+                <a14:m>
+                  <m:oMathPara xmlns:m="http://schemas.openxmlformats.org/officeDocument/2006/math">
+                    <m:oMathParaPr>
+                      <m:jc m:val="centerGroup"/>
+                    </m:oMathParaPr>
+                    <m:oMath xmlns:m="http://schemas.openxmlformats.org/officeDocument/2006/math">
+                      <m:r>
+                        <m:rPr>
+                          <m:sty m:val="p"/>
+                        </m:rPr>
+                        <a:rPr lang="en-US" altLang="zh-CN" sz="4400" i="1" smtClean="0">
+                          <a:solidFill>
+                            <a:schemeClr val="bg2"/>
+                          </a:solidFill>
+                          <a:latin typeface="Cambria Math" panose="02040503050406030204" pitchFamily="18" charset="0"/>
+                        </a:rPr>
+                        <m:t>MNDWI</m:t>
+                      </m:r>
+                      <m:r>
+                        <a:rPr lang="en-US" altLang="zh-CN" sz="4400" b="0" i="1" smtClean="0">
+                          <a:solidFill>
+                            <a:schemeClr val="bg2"/>
+                          </a:solidFill>
+                          <a:latin typeface="Cambria Math" panose="02040503050406030204" pitchFamily="18" charset="0"/>
+                        </a:rPr>
+                        <m:t>=(</m:t>
+                      </m:r>
+                      <m:r>
+                        <a:rPr lang="en-US" altLang="zh-CN" sz="4400" b="0" i="1" smtClean="0">
+                          <a:solidFill>
+                            <a:schemeClr val="bg2"/>
+                          </a:solidFill>
+                          <a:latin typeface="Cambria Math" panose="02040503050406030204" pitchFamily="18" charset="0"/>
+                        </a:rPr>
+                        <m:t>𝑔</m:t>
+                      </m:r>
+                      <m:r>
+                        <m:rPr>
+                          <m:sty m:val="p"/>
+                        </m:rPr>
+                        <a:rPr lang="en-US" altLang="zh-CN" sz="4400" i="1">
+                          <a:solidFill>
+                            <a:schemeClr val="bg2"/>
+                          </a:solidFill>
+                          <a:latin typeface="Cambria Math" panose="02040503050406030204" pitchFamily="18" charset="0"/>
+                        </a:rPr>
+                        <m:t>re</m:t>
+                      </m:r>
+                      <m:r>
+                        <a:rPr lang="en-US" altLang="zh-CN" sz="4400" b="0" i="1" smtClean="0">
+                          <a:solidFill>
+                            <a:schemeClr val="bg2"/>
+                          </a:solidFill>
+                          <a:latin typeface="Cambria Math" panose="02040503050406030204" pitchFamily="18" charset="0"/>
+                        </a:rPr>
+                        <m:t>𝑒𝑛</m:t>
+                      </m:r>
+                      <m:r>
+                        <a:rPr lang="en-US" altLang="zh-CN" sz="4400" b="0" i="1" smtClean="0">
+                          <a:solidFill>
+                            <a:schemeClr val="bg2"/>
+                          </a:solidFill>
+                          <a:latin typeface="Cambria Math" panose="02040503050406030204" pitchFamily="18" charset="0"/>
+                        </a:rPr>
+                        <m:t>−</m:t>
+                      </m:r>
+                      <m:r>
+                        <a:rPr lang="en-US" altLang="zh-CN" sz="4400" b="0" i="1" smtClean="0">
+                          <a:solidFill>
+                            <a:schemeClr val="bg2"/>
+                          </a:solidFill>
+                          <a:latin typeface="Cambria Math" panose="02040503050406030204" pitchFamily="18" charset="0"/>
+                        </a:rPr>
+                        <m:t>𝑠𝑤𝑖𝑟</m:t>
+                      </m:r>
+                      <m:r>
+                        <a:rPr lang="en-US" altLang="zh-CN" sz="4400" b="0" i="1" smtClean="0">
+                          <a:solidFill>
+                            <a:schemeClr val="bg2"/>
+                          </a:solidFill>
+                          <a:latin typeface="Cambria Math" panose="02040503050406030204" pitchFamily="18" charset="0"/>
+                        </a:rPr>
+                        <m:t>)/(</m:t>
+                      </m:r>
+                      <m:r>
+                        <a:rPr lang="en-US" altLang="zh-CN" sz="4400" i="1">
+                          <a:solidFill>
+                            <a:schemeClr val="bg2"/>
+                          </a:solidFill>
+                          <a:latin typeface="Cambria Math" panose="02040503050406030204" pitchFamily="18" charset="0"/>
+                        </a:rPr>
+                        <m:t>𝑔</m:t>
+                      </m:r>
+                      <m:r>
+                        <m:rPr>
+                          <m:sty m:val="p"/>
+                        </m:rPr>
+                        <a:rPr lang="en-US" altLang="zh-CN" sz="4400" i="1">
+                          <a:solidFill>
+                            <a:schemeClr val="bg2"/>
+                          </a:solidFill>
+                          <a:latin typeface="Cambria Math" panose="02040503050406030204" pitchFamily="18" charset="0"/>
+                        </a:rPr>
+                        <m:t>re</m:t>
+                      </m:r>
+                      <m:r>
+                        <a:rPr lang="en-US" altLang="zh-CN" sz="4400" i="1">
+                          <a:solidFill>
+                            <a:schemeClr val="bg2"/>
+                          </a:solidFill>
+                          <a:latin typeface="Cambria Math" panose="02040503050406030204" pitchFamily="18" charset="0"/>
+                        </a:rPr>
+                        <m:t>𝑒𝑛</m:t>
+                      </m:r>
+                      <m:r>
+                        <a:rPr lang="en-US" altLang="zh-CN" sz="4400" b="0" i="1" smtClean="0">
+                          <a:solidFill>
+                            <a:schemeClr val="bg2"/>
+                          </a:solidFill>
+                          <a:latin typeface="Cambria Math" panose="02040503050406030204" pitchFamily="18" charset="0"/>
+                        </a:rPr>
+                        <m:t>+</m:t>
+                      </m:r>
+                      <m:r>
+                        <a:rPr lang="en-US" altLang="zh-CN" sz="4400" i="1">
+                          <a:solidFill>
+                            <a:schemeClr val="bg2"/>
+                          </a:solidFill>
+                          <a:latin typeface="Cambria Math" panose="02040503050406030204" pitchFamily="18" charset="0"/>
+                        </a:rPr>
+                        <m:t>𝑠𝑤𝑖𝑟</m:t>
+                      </m:r>
+                      <m:r>
+                        <a:rPr lang="en-US" altLang="zh-CN" sz="4400" i="1">
+                          <a:solidFill>
+                            <a:schemeClr val="bg2"/>
+                          </a:solidFill>
+                          <a:latin typeface="Cambria Math" panose="02040503050406030204" pitchFamily="18" charset="0"/>
+                        </a:rPr>
+                        <m:t>)</m:t>
+                      </m:r>
+                    </m:oMath>
+                  </m:oMathPara>
+                </a14:m>
+                <a:endParaRPr lang="zh-CN" altLang="en-US" sz="4400" dirty="0">
+                  <a:solidFill>
+                    <a:schemeClr val="bg2"/>
+                  </a:solidFill>
+                </a:endParaRPr>
+              </a:p>
+            </p:txBody>
+          </p:sp>
+        </mc:Choice>
+        <mc:Fallback>
+          <p:sp>
+            <p:nvSpPr>
+              <p:cNvPr id="8" name="文本框 7">
+                <a:extLst>
+                  <a:ext uri="{FF2B5EF4-FFF2-40B4-BE49-F238E27FC236}">
+                    <a16:creationId xmlns:a16="http://schemas.microsoft.com/office/drawing/2014/main" id="{26BF9170-6166-2B5B-8F51-04DE8589BF30}"/>
+                  </a:ext>
+                </a:extLst>
+              </p:cNvPr>
+              <p:cNvSpPr txBox="1">
+                <a:spLocks noRot="1" noChangeAspect="1" noMove="1" noResize="1" noEditPoints="1" noAdjustHandles="1" noChangeArrowheads="1" noChangeShapeType="1" noTextEdit="1"/>
+              </p:cNvSpPr>
+              <p:nvPr/>
+            </p:nvSpPr>
+            <p:spPr>
+              <a:xfrm>
+                <a:off x="405682" y="3844599"/>
+                <a:ext cx="11120907" cy="677108"/>
+              </a:xfrm>
+              <a:prstGeom prst="rect">
+                <a:avLst/>
+              </a:prstGeom>
+              <a:blipFill>
+                <a:blip r:embed="rId4"/>
+                <a:stretch>
+                  <a:fillRect/>
+                </a:stretch>
+              </a:blipFill>
+            </p:spPr>
+            <p:txBody>
+              <a:bodyPr/>
+              <a:lstStyle/>
+              <a:p>
+                <a:r>
+                  <a:rPr lang="zh-CN" altLang="en-US">
+                    <a:noFill/>
+                  </a:rPr>
+                  <a:t> </a:t>
+                </a:r>
+              </a:p>
+            </p:txBody>
+          </p:sp>
+        </mc:Fallback>
+      </mc:AlternateContent>
+    </p:spTree>
+    <p:extLst>
+      <p:ext uri="{BB962C8B-B14F-4D97-AF65-F5344CB8AC3E}">
+        <p14:creationId xmlns:p14="http://schemas.microsoft.com/office/powerpoint/2010/main" val="1085528974"/>
+      </p:ext>
+    </p:extLst>
+  </p:cSld>
+  <p:clrMapOvr>
+    <a:masterClrMapping/>
+  </p:clrMapOvr>
+  <p:transition>
+    <p:fade/>
+  </p:transition>
+</p:sld>
+</file>
+
+<file path=ppt/slides/slide3.xml><?xml version="1.0" encoding="utf-8"?>
 <p:sld xmlns:a="http://schemas.openxmlformats.org/drawingml/2006/main" xmlns:r="http://schemas.openxmlformats.org/officeDocument/2006/relationships" xmlns:p="http://schemas.openxmlformats.org/presentationml/2006/main">
   <p:cSld>
     <p:spTree>
@@ -19846,7 +20447,7 @@
         </p:nvSpPr>
         <p:spPr>
           <a:xfrm>
-            <a:off x="0" y="0"/>
+            <a:off x="-18053" y="0"/>
             <a:ext cx="1835696" cy="6858000"/>
           </a:xfrm>
           <a:prstGeom prst="rect">
@@ -19866,7 +20467,7 @@
           <a:bodyPr wrap="none" anchor="ctr"/>
           <a:lstStyle/>
           <a:p>
-            <a:pPr eaLnBrk="1" fontAlgn="auto" hangingPunct="1">
+            <a:pPr fontAlgn="auto">
               <a:spcBef>
                 <a:spcPts val="0"/>
               </a:spcBef>
@@ -19897,7 +20498,7 @@
         </p:nvGrpSpPr>
         <p:grpSpPr>
           <a:xfrm>
-            <a:off x="2130674" y="4131028"/>
+            <a:off x="1922034" y="4138286"/>
             <a:ext cx="5667127" cy="717997"/>
             <a:chOff x="2121801" y="3511390"/>
             <a:chExt cx="5061079" cy="576000"/>
@@ -19954,7 +20555,7 @@
             <a:bodyPr rtlCol="0" anchor="ctr"/>
             <a:lstStyle/>
             <a:p>
-              <a:pPr algn="ctr" eaLnBrk="1" fontAlgn="auto" hangingPunct="1">
+              <a:pPr fontAlgn="auto">
                 <a:spcBef>
                   <a:spcPts val="0"/>
                 </a:spcBef>
@@ -20051,8 +20652,8 @@
         </p:nvSpPr>
         <p:spPr>
           <a:xfrm>
-            <a:off x="7242223" y="-69552"/>
-            <a:ext cx="1608134" cy="923330"/>
+            <a:off x="8766222" y="-69552"/>
+            <a:ext cx="3425777" cy="923330"/>
           </a:xfrm>
           <a:prstGeom prst="rect">
             <a:avLst/>
@@ -20060,12 +20661,12 @@
           <a:noFill/>
         </p:spPr>
         <p:txBody>
-          <a:bodyPr wrap="none" rtlCol="0">
+          <a:bodyPr wrap="square" rtlCol="0">
             <a:spAutoFit/>
           </a:bodyPr>
           <a:lstStyle/>
           <a:p>
-            <a:pPr algn="r" eaLnBrk="1" fontAlgn="auto" hangingPunct="1">
+            <a:pPr algn="r" fontAlgn="auto">
               <a:spcBef>
                 <a:spcPts val="0"/>
               </a:spcBef>
@@ -20107,10 +20708,10 @@
         </p:nvGrpSpPr>
         <p:grpSpPr>
           <a:xfrm>
-            <a:off x="2130676" y="2844762"/>
-            <a:ext cx="4079624" cy="772176"/>
+            <a:off x="1922035" y="2852019"/>
+            <a:ext cx="4725508" cy="772176"/>
             <a:chOff x="2121802" y="2115450"/>
-            <a:chExt cx="3203373" cy="576000"/>
+            <a:chExt cx="3710529" cy="576000"/>
           </a:xfrm>
         </p:grpSpPr>
         <p:sp>
@@ -20164,7 +20765,7 @@
             <a:bodyPr rtlCol="0" anchor="ctr"/>
             <a:lstStyle/>
             <a:p>
-              <a:pPr algn="ctr" eaLnBrk="1" fontAlgn="auto" hangingPunct="1">
+              <a:pPr fontAlgn="auto">
                 <a:spcBef>
                   <a:spcPts val="0"/>
                 </a:spcBef>
@@ -20200,7 +20801,7 @@
           <p:spPr>
             <a:xfrm>
               <a:off x="2697802" y="2173516"/>
-              <a:ext cx="2627373" cy="436209"/>
+              <a:ext cx="3134529" cy="436209"/>
             </a:xfrm>
             <a:prstGeom prst="rect">
               <a:avLst/>
@@ -20212,7 +20813,7 @@
             </a:bodyPr>
             <a:lstStyle/>
             <a:p>
-              <a:pPr algn="l" eaLnBrk="1" fontAlgn="auto" hangingPunct="1">
+              <a:pPr algn="l" fontAlgn="auto">
                 <a:spcBef>
                   <a:spcPts val="0"/>
                 </a:spcBef>
@@ -20253,7 +20854,7 @@
 </p:sld>
 </file>
 
-<file path=ppt/slides/slide3.xml><?xml version="1.0" encoding="utf-8"?>
+<file path=ppt/slides/slide4.xml><?xml version="1.0" encoding="utf-8"?>
 <p:sld xmlns:a="http://schemas.openxmlformats.org/drawingml/2006/main" xmlns:r="http://schemas.openxmlformats.org/officeDocument/2006/relationships" xmlns:p="http://schemas.openxmlformats.org/presentationml/2006/main">
   <p:cSld>
     <p:spTree>
@@ -20291,7 +20892,7 @@
         <p:spPr>
           <a:xfrm>
             <a:off x="0" y="3471863"/>
-            <a:ext cx="9144000" cy="1543050"/>
+            <a:ext cx="12192000" cy="1543050"/>
           </a:xfrm>
           <a:prstGeom prst="rect">
             <a:avLst/>
@@ -20334,8 +20935,8 @@
         </p:nvSpPr>
         <p:spPr>
           <a:xfrm>
-            <a:off x="189064" y="3868892"/>
-            <a:ext cx="8753057" cy="707886"/>
+            <a:off x="254222" y="3868892"/>
+            <a:ext cx="11670743" cy="769441"/>
           </a:xfrm>
           <a:prstGeom prst="rect">
             <a:avLst/>
@@ -20356,7 +20957,7 @@
               </a:spcAft>
             </a:pPr>
             <a:r>
-              <a:rPr lang="zh-CN" altLang="en-US" sz="4000" b="1" dirty="0">
+              <a:rPr lang="zh-CN" altLang="en-US" sz="4400" b="1" dirty="0">
                 <a:latin typeface="微软雅黑" pitchFamily="34" charset="-122"/>
                 <a:ea typeface="微软雅黑" pitchFamily="34" charset="-122"/>
               </a:rPr>
@@ -20380,7 +20981,7 @@
         <p:spPr>
           <a:xfrm>
             <a:off x="0" y="5014912"/>
-            <a:ext cx="9144000" cy="72000"/>
+            <a:ext cx="12192000" cy="72000"/>
           </a:xfrm>
           <a:prstGeom prst="rect">
             <a:avLst/>
@@ -20413,339 +21014,6 @@
     <p:extLst>
       <p:ext uri="{BB962C8B-B14F-4D97-AF65-F5344CB8AC3E}">
         <p14:creationId xmlns:p14="http://schemas.microsoft.com/office/powerpoint/2010/main" val="2084927881"/>
-      </p:ext>
-    </p:extLst>
-  </p:cSld>
-  <p:clrMapOvr>
-    <a:masterClrMapping/>
-  </p:clrMapOvr>
-  <p:transition>
-    <p:fade/>
-  </p:transition>
-</p:sld>
-</file>
-
-<file path=ppt/slides/slide4.xml><?xml version="1.0" encoding="utf-8"?>
-<p:sld xmlns:a="http://schemas.openxmlformats.org/drawingml/2006/main" xmlns:r="http://schemas.openxmlformats.org/officeDocument/2006/relationships" xmlns:p="http://schemas.openxmlformats.org/presentationml/2006/main">
-  <p:cSld>
-    <p:spTree>
-      <p:nvGrpSpPr>
-        <p:cNvPr id="1" name=""/>
-        <p:cNvGrpSpPr/>
-        <p:nvPr/>
-      </p:nvGrpSpPr>
-      <p:grpSpPr>
-        <a:xfrm>
-          <a:off x="0" y="0"/>
-          <a:ext cx="0" cy="0"/>
-          <a:chOff x="0" y="0"/>
-          <a:chExt cx="0" cy="0"/>
-        </a:xfrm>
-      </p:grpSpPr>
-      <p:sp>
-        <p:nvSpPr>
-          <p:cNvPr id="3" name="标题 2"/>
-          <p:cNvSpPr>
-            <a:spLocks noGrp="1"/>
-          </p:cNvSpPr>
-          <p:nvPr>
-            <p:ph type="title"/>
-          </p:nvPr>
-        </p:nvSpPr>
-        <p:spPr>
-          <a:xfrm>
-            <a:off x="0" y="8526"/>
-            <a:ext cx="9013371" cy="792162"/>
-          </a:xfrm>
-        </p:spPr>
-        <p:txBody>
-          <a:bodyPr/>
-          <a:lstStyle/>
-          <a:p>
-            <a:r>
-              <a:rPr lang="zh-CN" altLang="en-US" dirty="0">
-                <a:latin typeface="微软雅黑" pitchFamily="34" charset="-122"/>
-                <a:ea typeface="微软雅黑" pitchFamily="34" charset="-122"/>
-              </a:rPr>
-              <a:t>一、栅格数据矢量化</a:t>
-            </a:r>
-          </a:p>
-        </p:txBody>
-      </p:sp>
-      <p:sp>
-        <p:nvSpPr>
-          <p:cNvPr id="2" name="TextBox 1">
-            <a:extLst>
-              <a:ext uri="{FF2B5EF4-FFF2-40B4-BE49-F238E27FC236}">
-                <a16:creationId xmlns:a16="http://schemas.microsoft.com/office/drawing/2014/main" id="{631AADB6-C88A-D817-4683-FC087E4E240F}"/>
-              </a:ext>
-            </a:extLst>
-          </p:cNvPr>
-          <p:cNvSpPr txBox="1"/>
-          <p:nvPr/>
-        </p:nvSpPr>
-        <p:spPr>
-          <a:xfrm>
-            <a:off x="317665" y="846748"/>
-            <a:ext cx="8508670" cy="662489"/>
-          </a:xfrm>
-          <a:prstGeom prst="rect">
-            <a:avLst/>
-          </a:prstGeom>
-          <a:noFill/>
-        </p:spPr>
-        <p:txBody>
-          <a:bodyPr wrap="square" rtlCol="0">
-            <a:spAutoFit/>
-          </a:bodyPr>
-          <a:lstStyle/>
-          <a:p>
-            <a:pPr algn="just">
-              <a:lnSpc>
-                <a:spcPct val="150000"/>
-              </a:lnSpc>
-            </a:pPr>
-            <a:r>
-              <a:rPr lang="zh-CN" altLang="en-US" sz="2800" b="1" dirty="0">
-                <a:solidFill>
-                  <a:srgbClr val="FF0000"/>
-                </a:solidFill>
-                <a:latin typeface="+mn-ea"/>
-                <a:ea typeface="+mn-ea"/>
-              </a:rPr>
-              <a:t>课程回顾：</a:t>
-            </a:r>
-            <a:r>
-              <a:rPr lang="en-US" altLang="zh-CN" sz="2800" b="1" dirty="0">
-                <a:solidFill>
-                  <a:srgbClr val="333333"/>
-                </a:solidFill>
-                <a:latin typeface="+mn-ea"/>
-                <a:ea typeface="+mn-ea"/>
-              </a:rPr>
-              <a:t>QGIS</a:t>
-            </a:r>
-            <a:r>
-              <a:rPr lang="zh-CN" altLang="en-US" sz="2800" b="1" dirty="0">
-                <a:solidFill>
-                  <a:srgbClr val="333333"/>
-                </a:solidFill>
-                <a:latin typeface="+mn-ea"/>
-                <a:ea typeface="+mn-ea"/>
-              </a:rPr>
-              <a:t>软件操作（人工矢量化）</a:t>
-            </a:r>
-            <a:endParaRPr lang="en-US" altLang="zh-CN" sz="2800" b="1" dirty="0">
-              <a:solidFill>
-                <a:srgbClr val="333333"/>
-              </a:solidFill>
-              <a:latin typeface="+mn-ea"/>
-              <a:ea typeface="+mn-ea"/>
-            </a:endParaRPr>
-          </a:p>
-        </p:txBody>
-      </p:sp>
-      <p:sp>
-        <p:nvSpPr>
-          <p:cNvPr id="6" name="TextBox 5">
-            <a:extLst>
-              <a:ext uri="{FF2B5EF4-FFF2-40B4-BE49-F238E27FC236}">
-                <a16:creationId xmlns:a16="http://schemas.microsoft.com/office/drawing/2014/main" id="{962B23DE-665D-892B-931F-1A01E28F4BA2}"/>
-              </a:ext>
-            </a:extLst>
-          </p:cNvPr>
-          <p:cNvSpPr txBox="1"/>
-          <p:nvPr/>
-        </p:nvSpPr>
-        <p:spPr>
-          <a:xfrm>
-            <a:off x="390104" y="1389055"/>
-            <a:ext cx="8363791" cy="1048172"/>
-          </a:xfrm>
-          <a:prstGeom prst="rect">
-            <a:avLst/>
-          </a:prstGeom>
-          <a:noFill/>
-        </p:spPr>
-        <p:txBody>
-          <a:bodyPr wrap="square">
-            <a:spAutoFit/>
-          </a:bodyPr>
-          <a:lstStyle/>
-          <a:p>
-            <a:pPr marL="457200" indent="-457200" algn="just">
-              <a:lnSpc>
-                <a:spcPct val="150000"/>
-              </a:lnSpc>
-              <a:spcBef>
-                <a:spcPts val="0"/>
-              </a:spcBef>
-              <a:buAutoNum type="arabicPeriod"/>
-            </a:pPr>
-            <a:r>
-              <a:rPr lang="en-US" altLang="zh-CN" sz="2200" dirty="0">
-                <a:solidFill>
-                  <a:srgbClr val="333333"/>
-                </a:solidFill>
-                <a:latin typeface="+mn-ea"/>
-                <a:ea typeface="+mn-ea"/>
-              </a:rPr>
-              <a:t>Layer/Create Layer </a:t>
-            </a:r>
-            <a:r>
-              <a:rPr lang="zh-CN" altLang="en-US" sz="2200" dirty="0">
-                <a:solidFill>
-                  <a:srgbClr val="333333"/>
-                </a:solidFill>
-                <a:latin typeface="+mn-ea"/>
-                <a:ea typeface="+mn-ea"/>
-              </a:rPr>
-              <a:t>选择数据类型。</a:t>
-            </a:r>
-            <a:endParaRPr lang="en-US" altLang="zh-CN" sz="2200" dirty="0">
-              <a:solidFill>
-                <a:srgbClr val="333333"/>
-              </a:solidFill>
-              <a:latin typeface="+mn-ea"/>
-              <a:ea typeface="+mn-ea"/>
-            </a:endParaRPr>
-          </a:p>
-          <a:p>
-            <a:pPr marL="457200" indent="-457200" algn="just">
-              <a:lnSpc>
-                <a:spcPct val="150000"/>
-              </a:lnSpc>
-              <a:spcBef>
-                <a:spcPts val="0"/>
-              </a:spcBef>
-              <a:buAutoNum type="arabicPeriod"/>
-            </a:pPr>
-            <a:r>
-              <a:rPr lang="zh-CN" altLang="en-US" sz="2200" dirty="0">
-                <a:solidFill>
-                  <a:srgbClr val="333333"/>
-                </a:solidFill>
-                <a:latin typeface="+mn-ea"/>
-                <a:ea typeface="+mn-ea"/>
-              </a:rPr>
-              <a:t>在图层框中选中矢量文件，点击工具栏中编辑选项。</a:t>
-            </a:r>
-            <a:endParaRPr lang="en-US" altLang="zh-CN" sz="2200" dirty="0">
-              <a:solidFill>
-                <a:srgbClr val="333333"/>
-              </a:solidFill>
-              <a:latin typeface="+mn-ea"/>
-              <a:ea typeface="+mn-ea"/>
-            </a:endParaRPr>
-          </a:p>
-        </p:txBody>
-      </p:sp>
-      <p:pic>
-        <p:nvPicPr>
-          <p:cNvPr id="5" name="Picture 4" descr="A screenshot of a computer&#10;&#10;Description automatically generated">
-            <a:extLst>
-              <a:ext uri="{FF2B5EF4-FFF2-40B4-BE49-F238E27FC236}">
-                <a16:creationId xmlns:a16="http://schemas.microsoft.com/office/drawing/2014/main" id="{C2B1F131-1FAA-634B-77A6-FB015F83AD76}"/>
-              </a:ext>
-            </a:extLst>
-          </p:cNvPr>
-          <p:cNvPicPr>
-            <a:picLocks noChangeAspect="1"/>
-          </p:cNvPicPr>
-          <p:nvPr/>
-        </p:nvPicPr>
-        <p:blipFill rotWithShape="1">
-          <a:blip r:embed="rId3"/>
-          <a:srcRect l="1546"/>
-          <a:stretch/>
-        </p:blipFill>
-        <p:spPr>
-          <a:xfrm>
-            <a:off x="273134" y="2853533"/>
-            <a:ext cx="4649689" cy="3386449"/>
-          </a:xfrm>
-          <a:prstGeom prst="rect">
-            <a:avLst/>
-          </a:prstGeom>
-        </p:spPr>
-      </p:pic>
-      <p:pic>
-        <p:nvPicPr>
-          <p:cNvPr id="9" name="Picture 8" descr="A screenshot of a computer&#10;&#10;Description automatically generated">
-            <a:extLst>
-              <a:ext uri="{FF2B5EF4-FFF2-40B4-BE49-F238E27FC236}">
-                <a16:creationId xmlns:a16="http://schemas.microsoft.com/office/drawing/2014/main" id="{4985E4F3-4352-F936-6056-2CAA9B1077C5}"/>
-              </a:ext>
-            </a:extLst>
-          </p:cNvPr>
-          <p:cNvPicPr>
-            <a:picLocks noChangeAspect="1"/>
-          </p:cNvPicPr>
-          <p:nvPr/>
-        </p:nvPicPr>
-        <p:blipFill rotWithShape="1">
-          <a:blip r:embed="rId4"/>
-          <a:srcRect b="7494"/>
-          <a:stretch/>
-        </p:blipFill>
-        <p:spPr>
-          <a:xfrm>
-            <a:off x="5203008" y="2439432"/>
-            <a:ext cx="3667858" cy="4412129"/>
-          </a:xfrm>
-          <a:prstGeom prst="rect">
-            <a:avLst/>
-          </a:prstGeom>
-        </p:spPr>
-      </p:pic>
-      <p:sp>
-        <p:nvSpPr>
-          <p:cNvPr id="4" name="Oval 15">
-            <a:extLst>
-              <a:ext uri="{FF2B5EF4-FFF2-40B4-BE49-F238E27FC236}">
-                <a16:creationId xmlns:a16="http://schemas.microsoft.com/office/drawing/2014/main" id="{D14B2776-7D3A-D6BA-7674-723B143340B5}"/>
-              </a:ext>
-            </a:extLst>
-          </p:cNvPr>
-          <p:cNvSpPr/>
-          <p:nvPr/>
-        </p:nvSpPr>
-        <p:spPr>
-          <a:xfrm>
-            <a:off x="5259764" y="2979534"/>
-            <a:ext cx="697775" cy="512136"/>
-          </a:xfrm>
-          <a:prstGeom prst="ellipse">
-            <a:avLst/>
-          </a:prstGeom>
-          <a:noFill/>
-          <a:ln w="28575">
-            <a:solidFill>
-              <a:schemeClr val="accent2"/>
-            </a:solidFill>
-          </a:ln>
-        </p:spPr>
-        <p:txBody>
-          <a:bodyPr wrap="square" lIns="0" rtlCol="0" anchor="ctr">
-            <a:noAutofit/>
-          </a:bodyPr>
-          <a:lstStyle/>
-          <a:p>
-            <a:pPr algn="l"/>
-            <a:endParaRPr lang="en-CN" b="1" dirty="0">
-              <a:solidFill>
-                <a:srgbClr val="FF0000"/>
-              </a:solidFill>
-              <a:latin typeface="微软雅黑" pitchFamily="34" charset="-122"/>
-              <a:ea typeface="微软雅黑" pitchFamily="34" charset="-122"/>
-            </a:endParaRPr>
-          </a:p>
-        </p:txBody>
-      </p:sp>
-    </p:spTree>
-    <p:extLst>
-      <p:ext uri="{BB962C8B-B14F-4D97-AF65-F5344CB8AC3E}">
-        <p14:creationId xmlns:p14="http://schemas.microsoft.com/office/powerpoint/2010/main" val="1435648802"/>
       </p:ext>
     </p:extLst>
   </p:cSld>
@@ -20787,8 +21055,8 @@
         </p:nvSpPr>
         <p:spPr>
           <a:xfrm>
-            <a:off x="0" y="8526"/>
-            <a:ext cx="9013371" cy="792162"/>
+            <a:off x="1" y="8526"/>
+            <a:ext cx="10537372" cy="792162"/>
           </a:xfrm>
         </p:spPr>
         <p:txBody>
@@ -20819,8 +21087,8 @@
         </p:nvSpPr>
         <p:spPr>
           <a:xfrm>
-            <a:off x="317665" y="846748"/>
-            <a:ext cx="8508670" cy="662489"/>
+            <a:off x="304801" y="846749"/>
+            <a:ext cx="10045534" cy="662489"/>
           </a:xfrm>
           <a:prstGeom prst="rect">
             <a:avLst/>
@@ -20846,7 +21114,7 @@
                 <a:latin typeface="+mn-ea"/>
                 <a:ea typeface="+mn-ea"/>
               </a:rPr>
-              <a:t>课程回顾： </a:t>
+              <a:t>课程回顾：</a:t>
             </a:r>
             <a:r>
               <a:rPr lang="en-US" altLang="zh-CN" sz="2800" b="1" dirty="0">
@@ -20892,8 +21160,8 @@
         </p:nvSpPr>
         <p:spPr>
           <a:xfrm>
-            <a:off x="390104" y="1389055"/>
-            <a:ext cx="8363791" cy="1048172"/>
+            <a:off x="304800" y="1389055"/>
+            <a:ext cx="10958285" cy="1135054"/>
           </a:xfrm>
           <a:prstGeom prst="rect">
             <a:avLst/>
@@ -20916,7 +21184,7 @@
               <a:buAutoNum type="arabicPeriod"/>
             </a:pPr>
             <a:r>
-              <a:rPr lang="en-US" altLang="zh-CN" sz="2200" dirty="0">
+              <a:rPr lang="en-US" altLang="zh-CN" dirty="0">
                 <a:solidFill>
                   <a:srgbClr val="333333"/>
                 </a:solidFill>
@@ -20926,7 +21194,7 @@
               <a:t>Layer/Create Layer </a:t>
             </a:r>
             <a:r>
-              <a:rPr lang="zh-CN" altLang="en-US" sz="2200" dirty="0">
+              <a:rPr lang="zh-CN" altLang="en-US" dirty="0">
                 <a:solidFill>
                   <a:srgbClr val="333333"/>
                 </a:solidFill>
@@ -20935,7 +21203,7 @@
               </a:rPr>
               <a:t>选择数据类型。</a:t>
             </a:r>
-            <a:endParaRPr lang="en-US" altLang="zh-CN" sz="2200" dirty="0">
+            <a:endParaRPr lang="en-US" altLang="zh-CN" dirty="0">
               <a:solidFill>
                 <a:srgbClr val="333333"/>
               </a:solidFill>
@@ -20954,7 +21222,7 @@
               <a:buAutoNum type="arabicPeriod"/>
             </a:pPr>
             <a:r>
-              <a:rPr lang="zh-CN" altLang="en-US" sz="2200" dirty="0">
+              <a:rPr lang="zh-CN" altLang="en-US" dirty="0">
                 <a:solidFill>
                   <a:srgbClr val="333333"/>
                 </a:solidFill>
@@ -20963,7 +21231,340 @@
               </a:rPr>
               <a:t>在图层框中选中矢量文件，点击工具栏中编辑选项。</a:t>
             </a:r>
-            <a:endParaRPr lang="en-US" altLang="zh-CN" sz="2200" dirty="0">
+            <a:endParaRPr lang="en-US" altLang="zh-CN" dirty="0">
+              <a:solidFill>
+                <a:srgbClr val="333333"/>
+              </a:solidFill>
+              <a:latin typeface="+mn-ea"/>
+              <a:ea typeface="+mn-ea"/>
+            </a:endParaRPr>
+          </a:p>
+        </p:txBody>
+      </p:sp>
+      <p:pic>
+        <p:nvPicPr>
+          <p:cNvPr id="5" name="Picture 4" descr="A screenshot of a computer&#10;&#10;Description automatically generated">
+            <a:extLst>
+              <a:ext uri="{FF2B5EF4-FFF2-40B4-BE49-F238E27FC236}">
+                <a16:creationId xmlns:a16="http://schemas.microsoft.com/office/drawing/2014/main" id="{C2B1F131-1FAA-634B-77A6-FB015F83AD76}"/>
+              </a:ext>
+            </a:extLst>
+          </p:cNvPr>
+          <p:cNvPicPr>
+            <a:picLocks noChangeAspect="1"/>
+          </p:cNvPicPr>
+          <p:nvPr/>
+        </p:nvPicPr>
+        <p:blipFill rotWithShape="1">
+          <a:blip r:embed="rId3"/>
+          <a:srcRect l="1546"/>
+          <a:stretch/>
+        </p:blipFill>
+        <p:spPr>
+          <a:xfrm>
+            <a:off x="1510374" y="2795477"/>
+            <a:ext cx="4649689" cy="3386449"/>
+          </a:xfrm>
+          <a:prstGeom prst="rect">
+            <a:avLst/>
+          </a:prstGeom>
+        </p:spPr>
+      </p:pic>
+      <p:pic>
+        <p:nvPicPr>
+          <p:cNvPr id="9" name="Picture 8" descr="A screenshot of a computer&#10;&#10;Description automatically generated">
+            <a:extLst>
+              <a:ext uri="{FF2B5EF4-FFF2-40B4-BE49-F238E27FC236}">
+                <a16:creationId xmlns:a16="http://schemas.microsoft.com/office/drawing/2014/main" id="{4985E4F3-4352-F936-6056-2CAA9B1077C5}"/>
+              </a:ext>
+            </a:extLst>
+          </p:cNvPr>
+          <p:cNvPicPr>
+            <a:picLocks noChangeAspect="1"/>
+          </p:cNvPicPr>
+          <p:nvPr/>
+        </p:nvPicPr>
+        <p:blipFill rotWithShape="1">
+          <a:blip r:embed="rId4"/>
+          <a:srcRect b="7494"/>
+          <a:stretch/>
+        </p:blipFill>
+        <p:spPr>
+          <a:xfrm>
+            <a:off x="6783764" y="2524109"/>
+            <a:ext cx="3552257" cy="4273070"/>
+          </a:xfrm>
+          <a:prstGeom prst="rect">
+            <a:avLst/>
+          </a:prstGeom>
+        </p:spPr>
+      </p:pic>
+      <p:sp>
+        <p:nvSpPr>
+          <p:cNvPr id="4" name="Oval 15">
+            <a:extLst>
+              <a:ext uri="{FF2B5EF4-FFF2-40B4-BE49-F238E27FC236}">
+                <a16:creationId xmlns:a16="http://schemas.microsoft.com/office/drawing/2014/main" id="{D14B2776-7D3A-D6BA-7674-723B143340B5}"/>
+              </a:ext>
+            </a:extLst>
+          </p:cNvPr>
+          <p:cNvSpPr/>
+          <p:nvPr/>
+        </p:nvSpPr>
+        <p:spPr>
+          <a:xfrm>
+            <a:off x="6783765" y="2979534"/>
+            <a:ext cx="697775" cy="512136"/>
+          </a:xfrm>
+          <a:prstGeom prst="ellipse">
+            <a:avLst/>
+          </a:prstGeom>
+          <a:noFill/>
+          <a:ln w="28575">
+            <a:solidFill>
+              <a:schemeClr val="accent2"/>
+            </a:solidFill>
+          </a:ln>
+        </p:spPr>
+        <p:txBody>
+          <a:bodyPr wrap="square" lIns="0" rtlCol="0" anchor="ctr">
+            <a:noAutofit/>
+          </a:bodyPr>
+          <a:lstStyle/>
+          <a:p>
+            <a:pPr algn="l"/>
+            <a:endParaRPr lang="en-CN" b="1" dirty="0">
+              <a:solidFill>
+                <a:srgbClr val="FF0000"/>
+              </a:solidFill>
+              <a:latin typeface="微软雅黑" pitchFamily="34" charset="-122"/>
+              <a:ea typeface="微软雅黑" pitchFamily="34" charset="-122"/>
+            </a:endParaRPr>
+          </a:p>
+        </p:txBody>
+      </p:sp>
+    </p:spTree>
+    <p:extLst>
+      <p:ext uri="{BB962C8B-B14F-4D97-AF65-F5344CB8AC3E}">
+        <p14:creationId xmlns:p14="http://schemas.microsoft.com/office/powerpoint/2010/main" val="1435648802"/>
+      </p:ext>
+    </p:extLst>
+  </p:cSld>
+  <p:clrMapOvr>
+    <a:masterClrMapping/>
+  </p:clrMapOvr>
+  <p:transition>
+    <p:fade/>
+  </p:transition>
+</p:sld>
+</file>
+
+<file path=ppt/slides/slide6.xml><?xml version="1.0" encoding="utf-8"?>
+<p:sld xmlns:a="http://schemas.openxmlformats.org/drawingml/2006/main" xmlns:r="http://schemas.openxmlformats.org/officeDocument/2006/relationships" xmlns:p="http://schemas.openxmlformats.org/presentationml/2006/main">
+  <p:cSld>
+    <p:spTree>
+      <p:nvGrpSpPr>
+        <p:cNvPr id="1" name=""/>
+        <p:cNvGrpSpPr/>
+        <p:nvPr/>
+      </p:nvGrpSpPr>
+      <p:grpSpPr>
+        <a:xfrm>
+          <a:off x="0" y="0"/>
+          <a:ext cx="0" cy="0"/>
+          <a:chOff x="0" y="0"/>
+          <a:chExt cx="0" cy="0"/>
+        </a:xfrm>
+      </p:grpSpPr>
+      <p:sp>
+        <p:nvSpPr>
+          <p:cNvPr id="3" name="标题 2"/>
+          <p:cNvSpPr>
+            <a:spLocks noGrp="1"/>
+          </p:cNvSpPr>
+          <p:nvPr>
+            <p:ph type="title"/>
+          </p:nvPr>
+        </p:nvSpPr>
+        <p:spPr>
+          <a:xfrm>
+            <a:off x="1" y="8526"/>
+            <a:ext cx="10537372" cy="792162"/>
+          </a:xfrm>
+        </p:spPr>
+        <p:txBody>
+          <a:bodyPr/>
+          <a:lstStyle/>
+          <a:p>
+            <a:r>
+              <a:rPr lang="zh-CN" altLang="en-US" dirty="0">
+                <a:latin typeface="微软雅黑" pitchFamily="34" charset="-122"/>
+                <a:ea typeface="微软雅黑" pitchFamily="34" charset="-122"/>
+              </a:rPr>
+              <a:t>一、栅格数据矢量化</a:t>
+            </a:r>
+          </a:p>
+        </p:txBody>
+      </p:sp>
+      <p:sp>
+        <p:nvSpPr>
+          <p:cNvPr id="2" name="TextBox 1">
+            <a:extLst>
+              <a:ext uri="{FF2B5EF4-FFF2-40B4-BE49-F238E27FC236}">
+                <a16:creationId xmlns:a16="http://schemas.microsoft.com/office/drawing/2014/main" id="{631AADB6-C88A-D817-4683-FC087E4E240F}"/>
+              </a:ext>
+            </a:extLst>
+          </p:cNvPr>
+          <p:cNvSpPr txBox="1"/>
+          <p:nvPr/>
+        </p:nvSpPr>
+        <p:spPr>
+          <a:xfrm>
+            <a:off x="413525" y="846749"/>
+            <a:ext cx="9936810" cy="662489"/>
+          </a:xfrm>
+          <a:prstGeom prst="rect">
+            <a:avLst/>
+          </a:prstGeom>
+          <a:noFill/>
+        </p:spPr>
+        <p:txBody>
+          <a:bodyPr wrap="square" rtlCol="0">
+            <a:spAutoFit/>
+          </a:bodyPr>
+          <a:lstStyle/>
+          <a:p>
+            <a:pPr algn="just">
+              <a:lnSpc>
+                <a:spcPct val="150000"/>
+              </a:lnSpc>
+            </a:pPr>
+            <a:r>
+              <a:rPr lang="zh-CN" altLang="en-US" sz="2800" b="1" dirty="0">
+                <a:solidFill>
+                  <a:srgbClr val="FF0000"/>
+                </a:solidFill>
+                <a:latin typeface="+mn-ea"/>
+                <a:ea typeface="+mn-ea"/>
+              </a:rPr>
+              <a:t>课程回顾： </a:t>
+            </a:r>
+            <a:r>
+              <a:rPr lang="en-US" altLang="zh-CN" sz="2800" b="1" dirty="0">
+                <a:solidFill>
+                  <a:srgbClr val="333333"/>
+                </a:solidFill>
+                <a:latin typeface="+mn-ea"/>
+                <a:ea typeface="+mn-ea"/>
+              </a:rPr>
+              <a:t>QGIS</a:t>
+            </a:r>
+            <a:r>
+              <a:rPr lang="zh-CN" altLang="en-US" sz="2800" b="1" dirty="0">
+                <a:solidFill>
+                  <a:srgbClr val="333333"/>
+                </a:solidFill>
+                <a:latin typeface="+mn-ea"/>
+                <a:ea typeface="+mn-ea"/>
+              </a:rPr>
+              <a:t>软件操作（人工矢量化）</a:t>
+            </a:r>
+            <a:endParaRPr lang="en-US" altLang="zh-CN" sz="2800" b="1" dirty="0">
+              <a:solidFill>
+                <a:srgbClr val="333333"/>
+              </a:solidFill>
+              <a:latin typeface="+mn-ea"/>
+              <a:ea typeface="+mn-ea"/>
+            </a:endParaRPr>
+          </a:p>
+        </p:txBody>
+      </p:sp>
+      <p:sp>
+        <p:nvSpPr>
+          <p:cNvPr id="6" name="TextBox 5">
+            <a:extLst>
+              <a:ext uri="{FF2B5EF4-FFF2-40B4-BE49-F238E27FC236}">
+                <a16:creationId xmlns:a16="http://schemas.microsoft.com/office/drawing/2014/main" id="{962B23DE-665D-892B-931F-1A01E28F4BA2}"/>
+              </a:ext>
+            </a:extLst>
+          </p:cNvPr>
+          <p:cNvSpPr txBox="1"/>
+          <p:nvPr/>
+        </p:nvSpPr>
+        <p:spPr>
+          <a:xfrm>
+            <a:off x="341087" y="1389055"/>
+            <a:ext cx="9936810" cy="1135054"/>
+          </a:xfrm>
+          <a:prstGeom prst="rect">
+            <a:avLst/>
+          </a:prstGeom>
+          <a:noFill/>
+        </p:spPr>
+        <p:txBody>
+          <a:bodyPr wrap="square">
+            <a:spAutoFit/>
+          </a:bodyPr>
+          <a:lstStyle/>
+          <a:p>
+            <a:pPr marL="457200" indent="-457200" algn="just">
+              <a:lnSpc>
+                <a:spcPct val="150000"/>
+              </a:lnSpc>
+              <a:spcBef>
+                <a:spcPts val="0"/>
+              </a:spcBef>
+              <a:buAutoNum type="arabicPeriod"/>
+            </a:pPr>
+            <a:r>
+              <a:rPr lang="en-US" altLang="zh-CN" dirty="0">
+                <a:solidFill>
+                  <a:srgbClr val="333333"/>
+                </a:solidFill>
+                <a:latin typeface="+mn-ea"/>
+                <a:ea typeface="+mn-ea"/>
+              </a:rPr>
+              <a:t>Layer/Create Layer </a:t>
+            </a:r>
+            <a:r>
+              <a:rPr lang="zh-CN" altLang="en-US" dirty="0">
+                <a:solidFill>
+                  <a:srgbClr val="333333"/>
+                </a:solidFill>
+                <a:latin typeface="+mn-ea"/>
+                <a:ea typeface="+mn-ea"/>
+              </a:rPr>
+              <a:t>选择数据类型。</a:t>
+            </a:r>
+            <a:endParaRPr lang="en-US" altLang="zh-CN" dirty="0">
+              <a:solidFill>
+                <a:srgbClr val="333333"/>
+              </a:solidFill>
+              <a:latin typeface="+mn-ea"/>
+              <a:ea typeface="+mn-ea"/>
+            </a:endParaRPr>
+          </a:p>
+          <a:p>
+            <a:pPr marL="457200" indent="-457200" algn="just">
+              <a:lnSpc>
+                <a:spcPct val="150000"/>
+              </a:lnSpc>
+              <a:spcBef>
+                <a:spcPts val="0"/>
+              </a:spcBef>
+              <a:buAutoNum type="arabicPeriod"/>
+            </a:pPr>
+            <a:r>
+              <a:rPr lang="zh-CN" altLang="en-US" dirty="0">
+                <a:solidFill>
+                  <a:srgbClr val="333333"/>
+                </a:solidFill>
+                <a:latin typeface="+mn-ea"/>
+                <a:ea typeface="+mn-ea"/>
+              </a:rPr>
+              <a:t>在图层框中选中矢量文件，点击工具栏中编辑选项。</a:t>
+            </a:r>
+            <a:endParaRPr lang="en-US" altLang="zh-CN" dirty="0">
               <a:solidFill>
                 <a:srgbClr val="333333"/>
               </a:solidFill>
@@ -20987,7 +21588,7 @@
         </p:nvGrpSpPr>
         <p:grpSpPr>
           <a:xfrm>
-            <a:off x="603662" y="2460977"/>
+            <a:off x="1830121" y="2504519"/>
             <a:ext cx="2818907" cy="4260456"/>
             <a:chOff x="805543" y="2460977"/>
             <a:chExt cx="2818907" cy="4260456"/>
@@ -21126,7 +21727,7 @@
         </p:nvGrpSpPr>
         <p:grpSpPr>
           <a:xfrm>
-            <a:off x="3589943" y="2729828"/>
+            <a:off x="5563888" y="2735408"/>
             <a:ext cx="5402192" cy="3663413"/>
             <a:chOff x="3589943" y="2729828"/>
             <a:chExt cx="5402192" cy="3663413"/>
@@ -21223,7 +21824,7 @@
 </p:sld>
 </file>
 
-<file path=ppt/slides/slide6.xml><?xml version="1.0" encoding="utf-8"?>
+<file path=ppt/slides/slide7.xml><?xml version="1.0" encoding="utf-8"?>
 <p:sld xmlns:a="http://schemas.openxmlformats.org/drawingml/2006/main" xmlns:r="http://schemas.openxmlformats.org/officeDocument/2006/relationships" xmlns:p="http://schemas.openxmlformats.org/presentationml/2006/main">
   <p:cSld>
     <p:spTree>
@@ -21264,8 +21865,8 @@
         </p:nvSpPr>
         <p:spPr>
           <a:xfrm>
-            <a:off x="0" y="8526"/>
-            <a:ext cx="9013371" cy="792162"/>
+            <a:off x="108857" y="8526"/>
+            <a:ext cx="10428515" cy="792162"/>
           </a:xfrm>
         </p:spPr>
         <p:txBody>
@@ -21277,24 +21878,17 @@
                 <a:latin typeface="微软雅黑" pitchFamily="34" charset="-122"/>
                 <a:ea typeface="微软雅黑" pitchFamily="34" charset="-122"/>
               </a:rPr>
-              <a:t>三</a:t>
-            </a:r>
-            <a:r>
-              <a:rPr lang="zh-CN" altLang="en-US" sz="3600" b="1" dirty="0">
-                <a:latin typeface="微软雅黑" pitchFamily="34" charset="-122"/>
-                <a:ea typeface="微软雅黑" pitchFamily="34" charset="-122"/>
-              </a:rPr>
-              <a:t>、</a:t>
-            </a:r>
-            <a:r>
-              <a:rPr lang="en-US" altLang="zh-CN" sz="3600" b="1" dirty="0">
+              <a:t>三、</a:t>
+            </a:r>
+            <a:r>
+              <a:rPr lang="en-US" altLang="zh-CN" dirty="0">
                 <a:latin typeface="微软雅黑" pitchFamily="34" charset="-122"/>
                 <a:ea typeface="微软雅黑" pitchFamily="34" charset="-122"/>
               </a:rPr>
               <a:t>QGIS</a:t>
             </a:r>
             <a:r>
-              <a:rPr lang="zh-CN" altLang="en-US" sz="3600" b="1" dirty="0">
+              <a:rPr lang="zh-CN" altLang="en-US" dirty="0">
                 <a:latin typeface="微软雅黑" pitchFamily="34" charset="-122"/>
                 <a:ea typeface="微软雅黑" pitchFamily="34" charset="-122"/>
               </a:rPr>
@@ -21318,8 +21912,8 @@
         </p:nvSpPr>
         <p:spPr>
           <a:xfrm>
-            <a:off x="272591" y="878943"/>
-            <a:ext cx="8613831" cy="662554"/>
+            <a:off x="312058" y="878943"/>
+            <a:ext cx="10098366" cy="662554"/>
           </a:xfrm>
           <a:prstGeom prst="rect">
             <a:avLst/>
@@ -21391,8 +21985,8 @@
         </p:nvSpPr>
         <p:spPr>
           <a:xfrm>
-            <a:off x="272591" y="1797441"/>
-            <a:ext cx="8311474" cy="523220"/>
+            <a:off x="686516" y="1571833"/>
+            <a:ext cx="6446561" cy="523220"/>
           </a:xfrm>
           <a:prstGeom prst="rect">
             <a:avLst/>
@@ -21445,124 +22039,1192 @@
           </a:p>
         </p:txBody>
       </p:sp>
-      <p:pic>
-        <p:nvPicPr>
-          <p:cNvPr id="7" name="图片 6">
+      <p:grpSp>
+        <p:nvGrpSpPr>
+          <p:cNvPr id="12" name="组合 11">
             <a:extLst>
               <a:ext uri="{FF2B5EF4-FFF2-40B4-BE49-F238E27FC236}">
-                <a16:creationId xmlns:a16="http://schemas.microsoft.com/office/drawing/2014/main" id="{EDC03BDC-48EC-F4A2-1EAC-8CA66D84934D}"/>
+                <a16:creationId xmlns:a16="http://schemas.microsoft.com/office/drawing/2014/main" id="{03E8FF35-CA73-52DE-3E09-F0D9F8371177}"/>
               </a:ext>
             </a:extLst>
           </p:cNvPr>
-          <p:cNvPicPr>
-            <a:picLocks noChangeAspect="1"/>
-          </p:cNvPicPr>
+          <p:cNvGrpSpPr/>
           <p:nvPr/>
-        </p:nvPicPr>
-        <p:blipFill>
-          <a:blip r:embed="rId3"/>
-          <a:stretch>
-            <a:fillRect/>
-          </a:stretch>
-        </p:blipFill>
-        <p:spPr>
+        </p:nvGrpSpPr>
+        <p:grpSpPr>
           <a:xfrm>
-            <a:off x="1224802" y="2389516"/>
-            <a:ext cx="6446561" cy="4146509"/>
+            <a:off x="526720" y="2163909"/>
+            <a:ext cx="6606357" cy="4146509"/>
+            <a:chOff x="526720" y="2163909"/>
+            <a:chExt cx="6606357" cy="4146509"/>
           </a:xfrm>
-          <a:prstGeom prst="rect">
-            <a:avLst/>
-          </a:prstGeom>
-        </p:spPr>
-      </p:pic>
-      <p:sp>
-        <p:nvSpPr>
-          <p:cNvPr id="4" name="Oval 10">
+        </p:grpSpPr>
+        <p:pic>
+          <p:nvPicPr>
+            <p:cNvPr id="7" name="图片 6">
+              <a:extLst>
+                <a:ext uri="{FF2B5EF4-FFF2-40B4-BE49-F238E27FC236}">
+                  <a16:creationId xmlns:a16="http://schemas.microsoft.com/office/drawing/2014/main" id="{EDC03BDC-48EC-F4A2-1EAC-8CA66D84934D}"/>
+                </a:ext>
+              </a:extLst>
+            </p:cNvPr>
+            <p:cNvPicPr>
+              <a:picLocks noChangeAspect="1"/>
+            </p:cNvPicPr>
+            <p:nvPr/>
+          </p:nvPicPr>
+          <p:blipFill>
+            <a:blip r:embed="rId3"/>
+            <a:stretch>
+              <a:fillRect/>
+            </a:stretch>
+          </p:blipFill>
+          <p:spPr>
+            <a:xfrm>
+              <a:off x="686516" y="2163909"/>
+              <a:ext cx="6446561" cy="4146509"/>
+            </a:xfrm>
+            <a:prstGeom prst="rect">
+              <a:avLst/>
+            </a:prstGeom>
+          </p:spPr>
+        </p:pic>
+        <p:sp>
+          <p:nvSpPr>
+            <p:cNvPr id="4" name="Oval 10">
+              <a:extLst>
+                <a:ext uri="{FF2B5EF4-FFF2-40B4-BE49-F238E27FC236}">
+                  <a16:creationId xmlns:a16="http://schemas.microsoft.com/office/drawing/2014/main" id="{382E1269-31C5-1727-6688-E6FC1AB62FAC}"/>
+                </a:ext>
+              </a:extLst>
+            </p:cNvPr>
+            <p:cNvSpPr/>
+            <p:nvPr/>
+          </p:nvSpPr>
+          <p:spPr>
+            <a:xfrm>
+              <a:off x="569582" y="4153789"/>
+              <a:ext cx="905001" cy="605642"/>
+            </a:xfrm>
+            <a:prstGeom prst="ellipse">
+              <a:avLst/>
+            </a:prstGeom>
+            <a:noFill/>
+            <a:ln w="28575">
+              <a:solidFill>
+                <a:schemeClr val="accent2"/>
+              </a:solidFill>
+            </a:ln>
+          </p:spPr>
+          <p:txBody>
+            <a:bodyPr wrap="square" lIns="0" rtlCol="0" anchor="ctr">
+              <a:noAutofit/>
+            </a:bodyPr>
+            <a:lstStyle/>
+            <a:p>
+              <a:pPr algn="l"/>
+              <a:endParaRPr lang="en-CN" b="1" dirty="0">
+                <a:solidFill>
+                  <a:srgbClr val="FF0000"/>
+                </a:solidFill>
+                <a:latin typeface="微软雅黑" pitchFamily="34" charset="-122"/>
+                <a:ea typeface="微软雅黑" pitchFamily="34" charset="-122"/>
+              </a:endParaRPr>
+            </a:p>
+          </p:txBody>
+        </p:sp>
+        <p:sp>
+          <p:nvSpPr>
+            <p:cNvPr id="5" name="Oval 10">
+              <a:extLst>
+                <a:ext uri="{FF2B5EF4-FFF2-40B4-BE49-F238E27FC236}">
+                  <a16:creationId xmlns:a16="http://schemas.microsoft.com/office/drawing/2014/main" id="{A90C83AB-CE4B-FDEC-D28E-3949D4F90C26}"/>
+                </a:ext>
+              </a:extLst>
+            </p:cNvPr>
+            <p:cNvSpPr/>
+            <p:nvPr/>
+          </p:nvSpPr>
+          <p:spPr>
+            <a:xfrm>
+              <a:off x="526720" y="2448814"/>
+              <a:ext cx="905001" cy="605642"/>
+            </a:xfrm>
+            <a:prstGeom prst="ellipse">
+              <a:avLst/>
+            </a:prstGeom>
+            <a:noFill/>
+            <a:ln w="28575">
+              <a:solidFill>
+                <a:schemeClr val="accent2"/>
+              </a:solidFill>
+            </a:ln>
+          </p:spPr>
+          <p:txBody>
+            <a:bodyPr wrap="square" lIns="0" rtlCol="0" anchor="ctr">
+              <a:noAutofit/>
+            </a:bodyPr>
+            <a:lstStyle/>
+            <a:p>
+              <a:pPr algn="l"/>
+              <a:endParaRPr lang="en-CN" b="1" dirty="0">
+                <a:solidFill>
+                  <a:srgbClr val="FF0000"/>
+                </a:solidFill>
+                <a:latin typeface="微软雅黑" pitchFamily="34" charset="-122"/>
+                <a:ea typeface="微软雅黑" pitchFamily="34" charset="-122"/>
+              </a:endParaRPr>
+            </a:p>
+          </p:txBody>
+        </p:sp>
+      </p:grpSp>
+      <p:grpSp>
+        <p:nvGrpSpPr>
+          <p:cNvPr id="9" name="组合 8">
             <a:extLst>
               <a:ext uri="{FF2B5EF4-FFF2-40B4-BE49-F238E27FC236}">
-                <a16:creationId xmlns:a16="http://schemas.microsoft.com/office/drawing/2014/main" id="{382E1269-31C5-1727-6688-E6FC1AB62FAC}"/>
+                <a16:creationId xmlns:a16="http://schemas.microsoft.com/office/drawing/2014/main" id="{BE64E9B4-B20E-5409-9986-EE9B8DA70684}"/>
               </a:ext>
             </a:extLst>
           </p:cNvPr>
-          <p:cNvSpPr/>
+          <p:cNvGrpSpPr/>
           <p:nvPr/>
-        </p:nvSpPr>
-        <p:spPr>
+        </p:nvGrpSpPr>
+        <p:grpSpPr>
           <a:xfrm>
-            <a:off x="1107868" y="4379397"/>
-            <a:ext cx="905001" cy="605642"/>
+            <a:off x="7499162" y="1907700"/>
+            <a:ext cx="4233491" cy="4492177"/>
+            <a:chOff x="7666588" y="1985896"/>
+            <a:chExt cx="3998692" cy="4240733"/>
           </a:xfrm>
-          <a:prstGeom prst="ellipse">
-            <a:avLst/>
-          </a:prstGeom>
-          <a:noFill/>
-          <a:ln w="28575">
+        </p:grpSpPr>
+        <p:pic>
+          <p:nvPicPr>
+            <p:cNvPr id="8" name="图片 7">
+              <a:extLst>
+                <a:ext uri="{FF2B5EF4-FFF2-40B4-BE49-F238E27FC236}">
+                  <a16:creationId xmlns:a16="http://schemas.microsoft.com/office/drawing/2014/main" id="{9D6A7427-709D-3228-8B99-C0135DE42E44}"/>
+                </a:ext>
+              </a:extLst>
+            </p:cNvPr>
+            <p:cNvPicPr>
+              <a:picLocks noChangeAspect="1"/>
+            </p:cNvPicPr>
+            <p:nvPr/>
+          </p:nvPicPr>
+          <p:blipFill>
+            <a:blip r:embed="rId4"/>
+            <a:srcRect l="4564" r="5515"/>
+            <a:stretch>
+              <a:fillRect/>
+            </a:stretch>
+          </p:blipFill>
+          <p:spPr>
+            <a:xfrm>
+              <a:off x="7666588" y="1985896"/>
+              <a:ext cx="2184482" cy="2313307"/>
+            </a:xfrm>
+            <a:prstGeom prst="rect">
+              <a:avLst/>
+            </a:prstGeom>
+            <a:ln>
+              <a:solidFill>
+                <a:schemeClr val="bg2"/>
+              </a:solidFill>
+            </a:ln>
+          </p:spPr>
+        </p:pic>
+        <p:pic>
+          <p:nvPicPr>
+            <p:cNvPr id="10" name="图片 9">
+              <a:extLst>
+                <a:ext uri="{FF2B5EF4-FFF2-40B4-BE49-F238E27FC236}">
+                  <a16:creationId xmlns:a16="http://schemas.microsoft.com/office/drawing/2014/main" id="{E11571C9-FE03-E286-6FF2-8E501240E957}"/>
+                </a:ext>
+              </a:extLst>
+            </p:cNvPr>
+            <p:cNvPicPr>
+              <a:picLocks noChangeAspect="1"/>
+            </p:cNvPicPr>
+            <p:nvPr/>
+          </p:nvPicPr>
+          <p:blipFill>
+            <a:blip r:embed="rId5"/>
+            <a:srcRect l="10177" t="8926"/>
+            <a:stretch>
+              <a:fillRect/>
+            </a:stretch>
+          </p:blipFill>
+          <p:spPr>
+            <a:xfrm>
+              <a:off x="9480799" y="3915229"/>
+              <a:ext cx="2184481" cy="2311400"/>
+            </a:xfrm>
+            <a:prstGeom prst="rect">
+              <a:avLst/>
+            </a:prstGeom>
+            <a:ln>
+              <a:solidFill>
+                <a:schemeClr val="bg2"/>
+              </a:solidFill>
+            </a:ln>
+          </p:spPr>
+        </p:pic>
+        <p:sp>
+          <p:nvSpPr>
+            <p:cNvPr id="11" name="箭头: 圆角右 10">
+              <a:extLst>
+                <a:ext uri="{FF2B5EF4-FFF2-40B4-BE49-F238E27FC236}">
+                  <a16:creationId xmlns:a16="http://schemas.microsoft.com/office/drawing/2014/main" id="{4A5BFF05-D739-DA3F-4ECA-64A08589BFAA}"/>
+                </a:ext>
+              </a:extLst>
+            </p:cNvPr>
+            <p:cNvSpPr/>
+            <p:nvPr/>
+          </p:nvSpPr>
+          <p:spPr>
+            <a:xfrm flipV="1">
+              <a:off x="8504691" y="4488875"/>
+              <a:ext cx="893645" cy="885372"/>
+            </a:xfrm>
+            <a:prstGeom prst="bentArrow">
+              <a:avLst/>
+            </a:prstGeom>
             <a:solidFill>
-              <a:schemeClr val="accent2"/>
+              <a:srgbClr val="92D050"/>
             </a:solidFill>
-          </a:ln>
-        </p:spPr>
-        <p:txBody>
-          <a:bodyPr wrap="square" lIns="0" rtlCol="0" anchor="ctr">
-            <a:noAutofit/>
-          </a:bodyPr>
-          <a:lstStyle/>
-          <a:p>
-            <a:pPr algn="l"/>
-            <a:endParaRPr lang="en-CN" b="1" dirty="0">
+            <a:ln>
               <a:solidFill>
-                <a:srgbClr val="FF0000"/>
+                <a:schemeClr val="bg2"/>
               </a:solidFill>
-              <a:latin typeface="微软雅黑" pitchFamily="34" charset="-122"/>
-              <a:ea typeface="微软雅黑" pitchFamily="34" charset="-122"/>
-            </a:endParaRPr>
-          </a:p>
-        </p:txBody>
-      </p:sp>
-      <p:sp>
-        <p:nvSpPr>
-          <p:cNvPr id="5" name="Oval 10">
+            </a:ln>
+          </p:spPr>
+          <p:txBody>
+            <a:bodyPr wrap="square" lIns="0" rtlCol="0" anchor="ctr">
+              <a:noAutofit/>
+            </a:bodyPr>
+            <a:lstStyle/>
+            <a:p>
+              <a:pPr algn="l"/>
+              <a:endParaRPr lang="zh-CN" altLang="en-US" b="1" dirty="0">
+                <a:solidFill>
+                  <a:srgbClr val="FF0000"/>
+                </a:solidFill>
+                <a:latin typeface="微软雅黑" pitchFamily="34" charset="-122"/>
+                <a:ea typeface="微软雅黑" pitchFamily="34" charset="-122"/>
+              </a:endParaRPr>
+            </a:p>
+          </p:txBody>
+        </p:sp>
+      </p:grpSp>
+      <p:graphicFrame>
+        <p:nvGraphicFramePr>
+          <p:cNvPr id="13" name="表格 12">
             <a:extLst>
               <a:ext uri="{FF2B5EF4-FFF2-40B4-BE49-F238E27FC236}">
-                <a16:creationId xmlns:a16="http://schemas.microsoft.com/office/drawing/2014/main" id="{A90C83AB-CE4B-FDEC-D28E-3949D4F90C26}"/>
+                <a16:creationId xmlns:a16="http://schemas.microsoft.com/office/drawing/2014/main" id="{237151C0-1443-F119-A583-6AC3A735476A}"/>
               </a:ext>
             </a:extLst>
           </p:cNvPr>
-          <p:cNvSpPr/>
-          <p:nvPr/>
-        </p:nvSpPr>
-        <p:spPr>
-          <a:xfrm>
-            <a:off x="1065006" y="2674422"/>
-            <a:ext cx="905001" cy="605642"/>
-          </a:xfrm>
-          <a:prstGeom prst="ellipse">
-            <a:avLst/>
-          </a:prstGeom>
-          <a:noFill/>
-          <a:ln w="28575">
-            <a:solidFill>
-              <a:schemeClr val="accent2"/>
-            </a:solidFill>
-          </a:ln>
-        </p:spPr>
-        <p:txBody>
-          <a:bodyPr wrap="square" lIns="0" rtlCol="0" anchor="ctr">
-            <a:noAutofit/>
-          </a:bodyPr>
-          <a:lstStyle/>
-          <a:p>
-            <a:pPr algn="l"/>
-            <a:endParaRPr lang="en-CN" b="1" dirty="0">
-              <a:solidFill>
-                <a:srgbClr val="FF0000"/>
-              </a:solidFill>
-              <a:latin typeface="微软雅黑" pitchFamily="34" charset="-122"/>
-              <a:ea typeface="微软雅黑" pitchFamily="34" charset="-122"/>
-            </a:endParaRPr>
-          </a:p>
-        </p:txBody>
-      </p:sp>
+          <p:cNvGraphicFramePr>
+            <a:graphicFrameLocks noGrp="1"/>
+          </p:cNvGraphicFramePr>
+          <p:nvPr>
+            <p:extLst>
+              <p:ext uri="{D42A27DB-BD31-4B8C-83A1-F6EECF244321}">
+                <p14:modId xmlns:p14="http://schemas.microsoft.com/office/powerpoint/2010/main" val="52644485"/>
+              </p:ext>
+            </p:extLst>
+          </p:nvPr>
+        </p:nvGraphicFramePr>
+        <p:xfrm>
+          <a:off x="7499161" y="1907699"/>
+          <a:ext cx="2312752" cy="2450468"/>
+        </p:xfrm>
+        <a:graphic>
+          <a:graphicData uri="http://schemas.openxmlformats.org/drawingml/2006/table">
+            <a:tbl>
+              <a:tblPr firstRow="1" bandRow="1">
+                <a:tableStyleId>{5940675A-B579-460E-94D1-54222C63F5DA}</a:tableStyleId>
+              </a:tblPr>
+              <a:tblGrid>
+                <a:gridCol w="578188">
+                  <a:extLst>
+                    <a:ext uri="{9D8B030D-6E8A-4147-A177-3AD203B41FA5}">
+                      <a16:colId xmlns:a16="http://schemas.microsoft.com/office/drawing/2014/main" val="229452729"/>
+                    </a:ext>
+                  </a:extLst>
+                </a:gridCol>
+                <a:gridCol w="578188">
+                  <a:extLst>
+                    <a:ext uri="{9D8B030D-6E8A-4147-A177-3AD203B41FA5}">
+                      <a16:colId xmlns:a16="http://schemas.microsoft.com/office/drawing/2014/main" val="2798692419"/>
+                    </a:ext>
+                  </a:extLst>
+                </a:gridCol>
+                <a:gridCol w="578188">
+                  <a:extLst>
+                    <a:ext uri="{9D8B030D-6E8A-4147-A177-3AD203B41FA5}">
+                      <a16:colId xmlns:a16="http://schemas.microsoft.com/office/drawing/2014/main" val="752758486"/>
+                    </a:ext>
+                  </a:extLst>
+                </a:gridCol>
+                <a:gridCol w="578188">
+                  <a:extLst>
+                    <a:ext uri="{9D8B030D-6E8A-4147-A177-3AD203B41FA5}">
+                      <a16:colId xmlns:a16="http://schemas.microsoft.com/office/drawing/2014/main" val="3810486585"/>
+                    </a:ext>
+                  </a:extLst>
+                </a:gridCol>
+              </a:tblGrid>
+              <a:tr h="612617">
+                <a:tc>
+                  <a:txBody>
+                    <a:bodyPr/>
+                    <a:lstStyle/>
+                    <a:p>
+                      <a:endParaRPr lang="zh-CN" altLang="en-US">
+                        <a:solidFill>
+                          <a:schemeClr val="bg2"/>
+                        </a:solidFill>
+                      </a:endParaRPr>
+                    </a:p>
+                  </a:txBody>
+                  <a:tcPr>
+                    <a:lnL w="12700" cap="flat" cmpd="sng" algn="ctr">
+                      <a:solidFill>
+                        <a:schemeClr val="bg2"/>
+                      </a:solidFill>
+                      <a:prstDash val="solid"/>
+                      <a:round/>
+                      <a:headEnd type="none" w="med" len="med"/>
+                      <a:tailEnd type="none" w="med" len="med"/>
+                    </a:lnL>
+                    <a:lnR w="12700" cap="flat" cmpd="sng" algn="ctr">
+                      <a:solidFill>
+                        <a:schemeClr val="bg2"/>
+                      </a:solidFill>
+                      <a:prstDash val="solid"/>
+                      <a:round/>
+                      <a:headEnd type="none" w="med" len="med"/>
+                      <a:tailEnd type="none" w="med" len="med"/>
+                    </a:lnR>
+                    <a:lnT w="12700" cap="flat" cmpd="sng" algn="ctr">
+                      <a:solidFill>
+                        <a:schemeClr val="bg2"/>
+                      </a:solidFill>
+                      <a:prstDash val="solid"/>
+                      <a:round/>
+                      <a:headEnd type="none" w="med" len="med"/>
+                      <a:tailEnd type="none" w="med" len="med"/>
+                    </a:lnT>
+                    <a:lnB w="12700" cap="flat" cmpd="sng" algn="ctr">
+                      <a:solidFill>
+                        <a:schemeClr val="bg2"/>
+                      </a:solidFill>
+                      <a:prstDash val="solid"/>
+                      <a:round/>
+                      <a:headEnd type="none" w="med" len="med"/>
+                      <a:tailEnd type="none" w="med" len="med"/>
+                    </a:lnB>
+                  </a:tcPr>
+                </a:tc>
+                <a:tc>
+                  <a:txBody>
+                    <a:bodyPr/>
+                    <a:lstStyle/>
+                    <a:p>
+                      <a:endParaRPr lang="zh-CN" altLang="en-US">
+                        <a:solidFill>
+                          <a:schemeClr val="bg2"/>
+                        </a:solidFill>
+                      </a:endParaRPr>
+                    </a:p>
+                  </a:txBody>
+                  <a:tcPr>
+                    <a:lnL w="12700" cap="flat" cmpd="sng" algn="ctr">
+                      <a:solidFill>
+                        <a:schemeClr val="bg2"/>
+                      </a:solidFill>
+                      <a:prstDash val="solid"/>
+                      <a:round/>
+                      <a:headEnd type="none" w="med" len="med"/>
+                      <a:tailEnd type="none" w="med" len="med"/>
+                    </a:lnL>
+                    <a:lnR w="12700" cap="flat" cmpd="sng" algn="ctr">
+                      <a:solidFill>
+                        <a:schemeClr val="bg2"/>
+                      </a:solidFill>
+                      <a:prstDash val="solid"/>
+                      <a:round/>
+                      <a:headEnd type="none" w="med" len="med"/>
+                      <a:tailEnd type="none" w="med" len="med"/>
+                    </a:lnR>
+                    <a:lnT w="12700" cap="flat" cmpd="sng" algn="ctr">
+                      <a:solidFill>
+                        <a:schemeClr val="bg2"/>
+                      </a:solidFill>
+                      <a:prstDash val="solid"/>
+                      <a:round/>
+                      <a:headEnd type="none" w="med" len="med"/>
+                      <a:tailEnd type="none" w="med" len="med"/>
+                    </a:lnT>
+                    <a:lnB w="12700" cap="flat" cmpd="sng" algn="ctr">
+                      <a:solidFill>
+                        <a:schemeClr val="bg2"/>
+                      </a:solidFill>
+                      <a:prstDash val="solid"/>
+                      <a:round/>
+                      <a:headEnd type="none" w="med" len="med"/>
+                      <a:tailEnd type="none" w="med" len="med"/>
+                    </a:lnB>
+                  </a:tcPr>
+                </a:tc>
+                <a:tc>
+                  <a:txBody>
+                    <a:bodyPr/>
+                    <a:lstStyle/>
+                    <a:p>
+                      <a:endParaRPr lang="zh-CN" altLang="en-US">
+                        <a:solidFill>
+                          <a:schemeClr val="bg2"/>
+                        </a:solidFill>
+                      </a:endParaRPr>
+                    </a:p>
+                  </a:txBody>
+                  <a:tcPr>
+                    <a:lnL w="12700" cap="flat" cmpd="sng" algn="ctr">
+                      <a:solidFill>
+                        <a:schemeClr val="bg2"/>
+                      </a:solidFill>
+                      <a:prstDash val="solid"/>
+                      <a:round/>
+                      <a:headEnd type="none" w="med" len="med"/>
+                      <a:tailEnd type="none" w="med" len="med"/>
+                    </a:lnL>
+                    <a:lnR w="12700" cap="flat" cmpd="sng" algn="ctr">
+                      <a:solidFill>
+                        <a:schemeClr val="bg2"/>
+                      </a:solidFill>
+                      <a:prstDash val="solid"/>
+                      <a:round/>
+                      <a:headEnd type="none" w="med" len="med"/>
+                      <a:tailEnd type="none" w="med" len="med"/>
+                    </a:lnR>
+                    <a:lnT w="12700" cap="flat" cmpd="sng" algn="ctr">
+                      <a:solidFill>
+                        <a:schemeClr val="bg2"/>
+                      </a:solidFill>
+                      <a:prstDash val="solid"/>
+                      <a:round/>
+                      <a:headEnd type="none" w="med" len="med"/>
+                      <a:tailEnd type="none" w="med" len="med"/>
+                    </a:lnT>
+                    <a:lnB w="12700" cap="flat" cmpd="sng" algn="ctr">
+                      <a:solidFill>
+                        <a:schemeClr val="bg2"/>
+                      </a:solidFill>
+                      <a:prstDash val="solid"/>
+                      <a:round/>
+                      <a:headEnd type="none" w="med" len="med"/>
+                      <a:tailEnd type="none" w="med" len="med"/>
+                    </a:lnB>
+                  </a:tcPr>
+                </a:tc>
+                <a:tc>
+                  <a:txBody>
+                    <a:bodyPr/>
+                    <a:lstStyle/>
+                    <a:p>
+                      <a:endParaRPr lang="zh-CN" altLang="en-US" dirty="0">
+                        <a:solidFill>
+                          <a:schemeClr val="bg2"/>
+                        </a:solidFill>
+                      </a:endParaRPr>
+                    </a:p>
+                  </a:txBody>
+                  <a:tcPr>
+                    <a:lnL w="12700" cap="flat" cmpd="sng" algn="ctr">
+                      <a:solidFill>
+                        <a:schemeClr val="bg2"/>
+                      </a:solidFill>
+                      <a:prstDash val="solid"/>
+                      <a:round/>
+                      <a:headEnd type="none" w="med" len="med"/>
+                      <a:tailEnd type="none" w="med" len="med"/>
+                    </a:lnL>
+                    <a:lnR w="12700" cap="flat" cmpd="sng" algn="ctr">
+                      <a:solidFill>
+                        <a:schemeClr val="bg2"/>
+                      </a:solidFill>
+                      <a:prstDash val="solid"/>
+                      <a:round/>
+                      <a:headEnd type="none" w="med" len="med"/>
+                      <a:tailEnd type="none" w="med" len="med"/>
+                    </a:lnR>
+                    <a:lnT w="12700" cap="flat" cmpd="sng" algn="ctr">
+                      <a:solidFill>
+                        <a:schemeClr val="bg2"/>
+                      </a:solidFill>
+                      <a:prstDash val="solid"/>
+                      <a:round/>
+                      <a:headEnd type="none" w="med" len="med"/>
+                      <a:tailEnd type="none" w="med" len="med"/>
+                    </a:lnT>
+                    <a:lnB w="12700" cap="flat" cmpd="sng" algn="ctr">
+                      <a:solidFill>
+                        <a:schemeClr val="bg2"/>
+                      </a:solidFill>
+                      <a:prstDash val="solid"/>
+                      <a:round/>
+                      <a:headEnd type="none" w="med" len="med"/>
+                      <a:tailEnd type="none" w="med" len="med"/>
+                    </a:lnB>
+                  </a:tcPr>
+                </a:tc>
+                <a:extLst>
+                  <a:ext uri="{0D108BD9-81ED-4DB2-BD59-A6C34878D82A}">
+                    <a16:rowId xmlns:a16="http://schemas.microsoft.com/office/drawing/2014/main" val="109727307"/>
+                  </a:ext>
+                </a:extLst>
+              </a:tr>
+              <a:tr h="612617">
+                <a:tc>
+                  <a:txBody>
+                    <a:bodyPr/>
+                    <a:lstStyle/>
+                    <a:p>
+                      <a:endParaRPr lang="zh-CN" altLang="en-US">
+                        <a:solidFill>
+                          <a:schemeClr val="bg2"/>
+                        </a:solidFill>
+                      </a:endParaRPr>
+                    </a:p>
+                  </a:txBody>
+                  <a:tcPr>
+                    <a:lnL w="12700" cap="flat" cmpd="sng" algn="ctr">
+                      <a:solidFill>
+                        <a:schemeClr val="bg2"/>
+                      </a:solidFill>
+                      <a:prstDash val="solid"/>
+                      <a:round/>
+                      <a:headEnd type="none" w="med" len="med"/>
+                      <a:tailEnd type="none" w="med" len="med"/>
+                    </a:lnL>
+                    <a:lnR w="12700" cap="flat" cmpd="sng" algn="ctr">
+                      <a:solidFill>
+                        <a:schemeClr val="bg2"/>
+                      </a:solidFill>
+                      <a:prstDash val="solid"/>
+                      <a:round/>
+                      <a:headEnd type="none" w="med" len="med"/>
+                      <a:tailEnd type="none" w="med" len="med"/>
+                    </a:lnR>
+                    <a:lnT w="12700" cap="flat" cmpd="sng" algn="ctr">
+                      <a:solidFill>
+                        <a:schemeClr val="bg2"/>
+                      </a:solidFill>
+                      <a:prstDash val="solid"/>
+                      <a:round/>
+                      <a:headEnd type="none" w="med" len="med"/>
+                      <a:tailEnd type="none" w="med" len="med"/>
+                    </a:lnT>
+                    <a:lnB w="12700" cap="flat" cmpd="sng" algn="ctr">
+                      <a:solidFill>
+                        <a:schemeClr val="bg2"/>
+                      </a:solidFill>
+                      <a:prstDash val="solid"/>
+                      <a:round/>
+                      <a:headEnd type="none" w="med" len="med"/>
+                      <a:tailEnd type="none" w="med" len="med"/>
+                    </a:lnB>
+                  </a:tcPr>
+                </a:tc>
+                <a:tc>
+                  <a:txBody>
+                    <a:bodyPr/>
+                    <a:lstStyle/>
+                    <a:p>
+                      <a:endParaRPr lang="zh-CN" altLang="en-US">
+                        <a:solidFill>
+                          <a:schemeClr val="bg2"/>
+                        </a:solidFill>
+                      </a:endParaRPr>
+                    </a:p>
+                  </a:txBody>
+                  <a:tcPr>
+                    <a:lnL w="12700" cap="flat" cmpd="sng" algn="ctr">
+                      <a:solidFill>
+                        <a:schemeClr val="bg2"/>
+                      </a:solidFill>
+                      <a:prstDash val="solid"/>
+                      <a:round/>
+                      <a:headEnd type="none" w="med" len="med"/>
+                      <a:tailEnd type="none" w="med" len="med"/>
+                    </a:lnL>
+                    <a:lnR w="12700" cap="flat" cmpd="sng" algn="ctr">
+                      <a:solidFill>
+                        <a:schemeClr val="bg2"/>
+                      </a:solidFill>
+                      <a:prstDash val="solid"/>
+                      <a:round/>
+                      <a:headEnd type="none" w="med" len="med"/>
+                      <a:tailEnd type="none" w="med" len="med"/>
+                    </a:lnR>
+                    <a:lnT w="12700" cap="flat" cmpd="sng" algn="ctr">
+                      <a:solidFill>
+                        <a:schemeClr val="bg2"/>
+                      </a:solidFill>
+                      <a:prstDash val="solid"/>
+                      <a:round/>
+                      <a:headEnd type="none" w="med" len="med"/>
+                      <a:tailEnd type="none" w="med" len="med"/>
+                    </a:lnT>
+                    <a:lnB w="12700" cap="flat" cmpd="sng" algn="ctr">
+                      <a:solidFill>
+                        <a:schemeClr val="bg2"/>
+                      </a:solidFill>
+                      <a:prstDash val="solid"/>
+                      <a:round/>
+                      <a:headEnd type="none" w="med" len="med"/>
+                      <a:tailEnd type="none" w="med" len="med"/>
+                    </a:lnB>
+                  </a:tcPr>
+                </a:tc>
+                <a:tc>
+                  <a:txBody>
+                    <a:bodyPr/>
+                    <a:lstStyle/>
+                    <a:p>
+                      <a:endParaRPr lang="zh-CN" altLang="en-US">
+                        <a:solidFill>
+                          <a:schemeClr val="bg2"/>
+                        </a:solidFill>
+                      </a:endParaRPr>
+                    </a:p>
+                  </a:txBody>
+                  <a:tcPr>
+                    <a:lnL w="12700" cap="flat" cmpd="sng" algn="ctr">
+                      <a:solidFill>
+                        <a:schemeClr val="bg2"/>
+                      </a:solidFill>
+                      <a:prstDash val="solid"/>
+                      <a:round/>
+                      <a:headEnd type="none" w="med" len="med"/>
+                      <a:tailEnd type="none" w="med" len="med"/>
+                    </a:lnL>
+                    <a:lnR w="12700" cap="flat" cmpd="sng" algn="ctr">
+                      <a:solidFill>
+                        <a:schemeClr val="bg2"/>
+                      </a:solidFill>
+                      <a:prstDash val="solid"/>
+                      <a:round/>
+                      <a:headEnd type="none" w="med" len="med"/>
+                      <a:tailEnd type="none" w="med" len="med"/>
+                    </a:lnR>
+                    <a:lnT w="12700" cap="flat" cmpd="sng" algn="ctr">
+                      <a:solidFill>
+                        <a:schemeClr val="bg2"/>
+                      </a:solidFill>
+                      <a:prstDash val="solid"/>
+                      <a:round/>
+                      <a:headEnd type="none" w="med" len="med"/>
+                      <a:tailEnd type="none" w="med" len="med"/>
+                    </a:lnT>
+                    <a:lnB w="12700" cap="flat" cmpd="sng" algn="ctr">
+                      <a:solidFill>
+                        <a:schemeClr val="bg2"/>
+                      </a:solidFill>
+                      <a:prstDash val="solid"/>
+                      <a:round/>
+                      <a:headEnd type="none" w="med" len="med"/>
+                      <a:tailEnd type="none" w="med" len="med"/>
+                    </a:lnB>
+                  </a:tcPr>
+                </a:tc>
+                <a:tc>
+                  <a:txBody>
+                    <a:bodyPr/>
+                    <a:lstStyle/>
+                    <a:p>
+                      <a:endParaRPr lang="zh-CN" altLang="en-US">
+                        <a:solidFill>
+                          <a:schemeClr val="bg2"/>
+                        </a:solidFill>
+                      </a:endParaRPr>
+                    </a:p>
+                  </a:txBody>
+                  <a:tcPr>
+                    <a:lnL w="12700" cap="flat" cmpd="sng" algn="ctr">
+                      <a:solidFill>
+                        <a:schemeClr val="bg2"/>
+                      </a:solidFill>
+                      <a:prstDash val="solid"/>
+                      <a:round/>
+                      <a:headEnd type="none" w="med" len="med"/>
+                      <a:tailEnd type="none" w="med" len="med"/>
+                    </a:lnL>
+                    <a:lnR w="12700" cap="flat" cmpd="sng" algn="ctr">
+                      <a:solidFill>
+                        <a:schemeClr val="bg2"/>
+                      </a:solidFill>
+                      <a:prstDash val="solid"/>
+                      <a:round/>
+                      <a:headEnd type="none" w="med" len="med"/>
+                      <a:tailEnd type="none" w="med" len="med"/>
+                    </a:lnR>
+                    <a:lnT w="12700" cap="flat" cmpd="sng" algn="ctr">
+                      <a:solidFill>
+                        <a:schemeClr val="bg2"/>
+                      </a:solidFill>
+                      <a:prstDash val="solid"/>
+                      <a:round/>
+                      <a:headEnd type="none" w="med" len="med"/>
+                      <a:tailEnd type="none" w="med" len="med"/>
+                    </a:lnT>
+                    <a:lnB w="12700" cap="flat" cmpd="sng" algn="ctr">
+                      <a:solidFill>
+                        <a:schemeClr val="bg2"/>
+                      </a:solidFill>
+                      <a:prstDash val="solid"/>
+                      <a:round/>
+                      <a:headEnd type="none" w="med" len="med"/>
+                      <a:tailEnd type="none" w="med" len="med"/>
+                    </a:lnB>
+                  </a:tcPr>
+                </a:tc>
+                <a:extLst>
+                  <a:ext uri="{0D108BD9-81ED-4DB2-BD59-A6C34878D82A}">
+                    <a16:rowId xmlns:a16="http://schemas.microsoft.com/office/drawing/2014/main" val="1273150123"/>
+                  </a:ext>
+                </a:extLst>
+              </a:tr>
+              <a:tr h="612617">
+                <a:tc>
+                  <a:txBody>
+                    <a:bodyPr/>
+                    <a:lstStyle/>
+                    <a:p>
+                      <a:endParaRPr lang="zh-CN" altLang="en-US">
+                        <a:solidFill>
+                          <a:schemeClr val="bg2"/>
+                        </a:solidFill>
+                      </a:endParaRPr>
+                    </a:p>
+                  </a:txBody>
+                  <a:tcPr>
+                    <a:lnL w="12700" cap="flat" cmpd="sng" algn="ctr">
+                      <a:solidFill>
+                        <a:schemeClr val="bg2"/>
+                      </a:solidFill>
+                      <a:prstDash val="solid"/>
+                      <a:round/>
+                      <a:headEnd type="none" w="med" len="med"/>
+                      <a:tailEnd type="none" w="med" len="med"/>
+                    </a:lnL>
+                    <a:lnR w="12700" cap="flat" cmpd="sng" algn="ctr">
+                      <a:solidFill>
+                        <a:schemeClr val="bg2"/>
+                      </a:solidFill>
+                      <a:prstDash val="solid"/>
+                      <a:round/>
+                      <a:headEnd type="none" w="med" len="med"/>
+                      <a:tailEnd type="none" w="med" len="med"/>
+                    </a:lnR>
+                    <a:lnT w="12700" cap="flat" cmpd="sng" algn="ctr">
+                      <a:solidFill>
+                        <a:schemeClr val="bg2"/>
+                      </a:solidFill>
+                      <a:prstDash val="solid"/>
+                      <a:round/>
+                      <a:headEnd type="none" w="med" len="med"/>
+                      <a:tailEnd type="none" w="med" len="med"/>
+                    </a:lnT>
+                    <a:lnB w="12700" cap="flat" cmpd="sng" algn="ctr">
+                      <a:solidFill>
+                        <a:schemeClr val="bg2"/>
+                      </a:solidFill>
+                      <a:prstDash val="solid"/>
+                      <a:round/>
+                      <a:headEnd type="none" w="med" len="med"/>
+                      <a:tailEnd type="none" w="med" len="med"/>
+                    </a:lnB>
+                  </a:tcPr>
+                </a:tc>
+                <a:tc>
+                  <a:txBody>
+                    <a:bodyPr/>
+                    <a:lstStyle/>
+                    <a:p>
+                      <a:endParaRPr lang="zh-CN" altLang="en-US">
+                        <a:solidFill>
+                          <a:schemeClr val="bg2"/>
+                        </a:solidFill>
+                      </a:endParaRPr>
+                    </a:p>
+                  </a:txBody>
+                  <a:tcPr>
+                    <a:lnL w="12700" cap="flat" cmpd="sng" algn="ctr">
+                      <a:solidFill>
+                        <a:schemeClr val="bg2"/>
+                      </a:solidFill>
+                      <a:prstDash val="solid"/>
+                      <a:round/>
+                      <a:headEnd type="none" w="med" len="med"/>
+                      <a:tailEnd type="none" w="med" len="med"/>
+                    </a:lnL>
+                    <a:lnR w="12700" cap="flat" cmpd="sng" algn="ctr">
+                      <a:solidFill>
+                        <a:schemeClr val="bg2"/>
+                      </a:solidFill>
+                      <a:prstDash val="solid"/>
+                      <a:round/>
+                      <a:headEnd type="none" w="med" len="med"/>
+                      <a:tailEnd type="none" w="med" len="med"/>
+                    </a:lnR>
+                    <a:lnT w="12700" cap="flat" cmpd="sng" algn="ctr">
+                      <a:solidFill>
+                        <a:schemeClr val="bg2"/>
+                      </a:solidFill>
+                      <a:prstDash val="solid"/>
+                      <a:round/>
+                      <a:headEnd type="none" w="med" len="med"/>
+                      <a:tailEnd type="none" w="med" len="med"/>
+                    </a:lnT>
+                    <a:lnB w="12700" cap="flat" cmpd="sng" algn="ctr">
+                      <a:solidFill>
+                        <a:schemeClr val="bg2"/>
+                      </a:solidFill>
+                      <a:prstDash val="solid"/>
+                      <a:round/>
+                      <a:headEnd type="none" w="med" len="med"/>
+                      <a:tailEnd type="none" w="med" len="med"/>
+                    </a:lnB>
+                  </a:tcPr>
+                </a:tc>
+                <a:tc>
+                  <a:txBody>
+                    <a:bodyPr/>
+                    <a:lstStyle/>
+                    <a:p>
+                      <a:endParaRPr lang="zh-CN" altLang="en-US">
+                        <a:solidFill>
+                          <a:schemeClr val="bg2"/>
+                        </a:solidFill>
+                      </a:endParaRPr>
+                    </a:p>
+                  </a:txBody>
+                  <a:tcPr>
+                    <a:lnL w="12700" cap="flat" cmpd="sng" algn="ctr">
+                      <a:solidFill>
+                        <a:schemeClr val="bg2"/>
+                      </a:solidFill>
+                      <a:prstDash val="solid"/>
+                      <a:round/>
+                      <a:headEnd type="none" w="med" len="med"/>
+                      <a:tailEnd type="none" w="med" len="med"/>
+                    </a:lnL>
+                    <a:lnR w="12700" cap="flat" cmpd="sng" algn="ctr">
+                      <a:solidFill>
+                        <a:schemeClr val="bg2"/>
+                      </a:solidFill>
+                      <a:prstDash val="solid"/>
+                      <a:round/>
+                      <a:headEnd type="none" w="med" len="med"/>
+                      <a:tailEnd type="none" w="med" len="med"/>
+                    </a:lnR>
+                    <a:lnT w="12700" cap="flat" cmpd="sng" algn="ctr">
+                      <a:solidFill>
+                        <a:schemeClr val="bg2"/>
+                      </a:solidFill>
+                      <a:prstDash val="solid"/>
+                      <a:round/>
+                      <a:headEnd type="none" w="med" len="med"/>
+                      <a:tailEnd type="none" w="med" len="med"/>
+                    </a:lnT>
+                    <a:lnB w="12700" cap="flat" cmpd="sng" algn="ctr">
+                      <a:solidFill>
+                        <a:schemeClr val="bg2"/>
+                      </a:solidFill>
+                      <a:prstDash val="solid"/>
+                      <a:round/>
+                      <a:headEnd type="none" w="med" len="med"/>
+                      <a:tailEnd type="none" w="med" len="med"/>
+                    </a:lnB>
+                  </a:tcPr>
+                </a:tc>
+                <a:tc>
+                  <a:txBody>
+                    <a:bodyPr/>
+                    <a:lstStyle/>
+                    <a:p>
+                      <a:endParaRPr lang="zh-CN" altLang="en-US">
+                        <a:solidFill>
+                          <a:schemeClr val="bg2"/>
+                        </a:solidFill>
+                      </a:endParaRPr>
+                    </a:p>
+                  </a:txBody>
+                  <a:tcPr>
+                    <a:lnL w="12700" cap="flat" cmpd="sng" algn="ctr">
+                      <a:solidFill>
+                        <a:schemeClr val="bg2"/>
+                      </a:solidFill>
+                      <a:prstDash val="solid"/>
+                      <a:round/>
+                      <a:headEnd type="none" w="med" len="med"/>
+                      <a:tailEnd type="none" w="med" len="med"/>
+                    </a:lnL>
+                    <a:lnR w="12700" cap="flat" cmpd="sng" algn="ctr">
+                      <a:solidFill>
+                        <a:schemeClr val="bg2"/>
+                      </a:solidFill>
+                      <a:prstDash val="solid"/>
+                      <a:round/>
+                      <a:headEnd type="none" w="med" len="med"/>
+                      <a:tailEnd type="none" w="med" len="med"/>
+                    </a:lnR>
+                    <a:lnT w="12700" cap="flat" cmpd="sng" algn="ctr">
+                      <a:solidFill>
+                        <a:schemeClr val="bg2"/>
+                      </a:solidFill>
+                      <a:prstDash val="solid"/>
+                      <a:round/>
+                      <a:headEnd type="none" w="med" len="med"/>
+                      <a:tailEnd type="none" w="med" len="med"/>
+                    </a:lnT>
+                    <a:lnB w="12700" cap="flat" cmpd="sng" algn="ctr">
+                      <a:solidFill>
+                        <a:schemeClr val="bg2"/>
+                      </a:solidFill>
+                      <a:prstDash val="solid"/>
+                      <a:round/>
+                      <a:headEnd type="none" w="med" len="med"/>
+                      <a:tailEnd type="none" w="med" len="med"/>
+                    </a:lnB>
+                  </a:tcPr>
+                </a:tc>
+                <a:extLst>
+                  <a:ext uri="{0D108BD9-81ED-4DB2-BD59-A6C34878D82A}">
+                    <a16:rowId xmlns:a16="http://schemas.microsoft.com/office/drawing/2014/main" val="1513710836"/>
+                  </a:ext>
+                </a:extLst>
+              </a:tr>
+              <a:tr h="612617">
+                <a:tc>
+                  <a:txBody>
+                    <a:bodyPr/>
+                    <a:lstStyle/>
+                    <a:p>
+                      <a:endParaRPr lang="zh-CN" altLang="en-US">
+                        <a:solidFill>
+                          <a:schemeClr val="bg2"/>
+                        </a:solidFill>
+                      </a:endParaRPr>
+                    </a:p>
+                  </a:txBody>
+                  <a:tcPr>
+                    <a:lnL w="12700" cap="flat" cmpd="sng" algn="ctr">
+                      <a:solidFill>
+                        <a:schemeClr val="bg2"/>
+                      </a:solidFill>
+                      <a:prstDash val="solid"/>
+                      <a:round/>
+                      <a:headEnd type="none" w="med" len="med"/>
+                      <a:tailEnd type="none" w="med" len="med"/>
+                    </a:lnL>
+                    <a:lnR w="12700" cap="flat" cmpd="sng" algn="ctr">
+                      <a:solidFill>
+                        <a:schemeClr val="bg2"/>
+                      </a:solidFill>
+                      <a:prstDash val="solid"/>
+                      <a:round/>
+                      <a:headEnd type="none" w="med" len="med"/>
+                      <a:tailEnd type="none" w="med" len="med"/>
+                    </a:lnR>
+                    <a:lnT w="12700" cap="flat" cmpd="sng" algn="ctr">
+                      <a:solidFill>
+                        <a:schemeClr val="bg2"/>
+                      </a:solidFill>
+                      <a:prstDash val="solid"/>
+                      <a:round/>
+                      <a:headEnd type="none" w="med" len="med"/>
+                      <a:tailEnd type="none" w="med" len="med"/>
+                    </a:lnT>
+                    <a:lnB w="12700" cap="flat" cmpd="sng" algn="ctr">
+                      <a:solidFill>
+                        <a:schemeClr val="bg2"/>
+                      </a:solidFill>
+                      <a:prstDash val="solid"/>
+                      <a:round/>
+                      <a:headEnd type="none" w="med" len="med"/>
+                      <a:tailEnd type="none" w="med" len="med"/>
+                    </a:lnB>
+                  </a:tcPr>
+                </a:tc>
+                <a:tc>
+                  <a:txBody>
+                    <a:bodyPr/>
+                    <a:lstStyle/>
+                    <a:p>
+                      <a:endParaRPr lang="zh-CN" altLang="en-US">
+                        <a:solidFill>
+                          <a:schemeClr val="bg2"/>
+                        </a:solidFill>
+                      </a:endParaRPr>
+                    </a:p>
+                  </a:txBody>
+                  <a:tcPr>
+                    <a:lnL w="12700" cap="flat" cmpd="sng" algn="ctr">
+                      <a:solidFill>
+                        <a:schemeClr val="bg2"/>
+                      </a:solidFill>
+                      <a:prstDash val="solid"/>
+                      <a:round/>
+                      <a:headEnd type="none" w="med" len="med"/>
+                      <a:tailEnd type="none" w="med" len="med"/>
+                    </a:lnL>
+                    <a:lnR w="12700" cap="flat" cmpd="sng" algn="ctr">
+                      <a:solidFill>
+                        <a:schemeClr val="bg2"/>
+                      </a:solidFill>
+                      <a:prstDash val="solid"/>
+                      <a:round/>
+                      <a:headEnd type="none" w="med" len="med"/>
+                      <a:tailEnd type="none" w="med" len="med"/>
+                    </a:lnR>
+                    <a:lnT w="12700" cap="flat" cmpd="sng" algn="ctr">
+                      <a:solidFill>
+                        <a:schemeClr val="bg2"/>
+                      </a:solidFill>
+                      <a:prstDash val="solid"/>
+                      <a:round/>
+                      <a:headEnd type="none" w="med" len="med"/>
+                      <a:tailEnd type="none" w="med" len="med"/>
+                    </a:lnT>
+                    <a:lnB w="12700" cap="flat" cmpd="sng" algn="ctr">
+                      <a:solidFill>
+                        <a:schemeClr val="bg2"/>
+                      </a:solidFill>
+                      <a:prstDash val="solid"/>
+                      <a:round/>
+                      <a:headEnd type="none" w="med" len="med"/>
+                      <a:tailEnd type="none" w="med" len="med"/>
+                    </a:lnB>
+                  </a:tcPr>
+                </a:tc>
+                <a:tc>
+                  <a:txBody>
+                    <a:bodyPr/>
+                    <a:lstStyle/>
+                    <a:p>
+                      <a:endParaRPr lang="zh-CN" altLang="en-US">
+                        <a:solidFill>
+                          <a:schemeClr val="bg2"/>
+                        </a:solidFill>
+                      </a:endParaRPr>
+                    </a:p>
+                  </a:txBody>
+                  <a:tcPr>
+                    <a:lnL w="12700" cap="flat" cmpd="sng" algn="ctr">
+                      <a:solidFill>
+                        <a:schemeClr val="bg2"/>
+                      </a:solidFill>
+                      <a:prstDash val="solid"/>
+                      <a:round/>
+                      <a:headEnd type="none" w="med" len="med"/>
+                      <a:tailEnd type="none" w="med" len="med"/>
+                    </a:lnL>
+                    <a:lnR w="12700" cap="flat" cmpd="sng" algn="ctr">
+                      <a:solidFill>
+                        <a:schemeClr val="bg2"/>
+                      </a:solidFill>
+                      <a:prstDash val="solid"/>
+                      <a:round/>
+                      <a:headEnd type="none" w="med" len="med"/>
+                      <a:tailEnd type="none" w="med" len="med"/>
+                    </a:lnR>
+                    <a:lnT w="12700" cap="flat" cmpd="sng" algn="ctr">
+                      <a:solidFill>
+                        <a:schemeClr val="bg2"/>
+                      </a:solidFill>
+                      <a:prstDash val="solid"/>
+                      <a:round/>
+                      <a:headEnd type="none" w="med" len="med"/>
+                      <a:tailEnd type="none" w="med" len="med"/>
+                    </a:lnT>
+                    <a:lnB w="12700" cap="flat" cmpd="sng" algn="ctr">
+                      <a:solidFill>
+                        <a:schemeClr val="bg2"/>
+                      </a:solidFill>
+                      <a:prstDash val="solid"/>
+                      <a:round/>
+                      <a:headEnd type="none" w="med" len="med"/>
+                      <a:tailEnd type="none" w="med" len="med"/>
+                    </a:lnB>
+                  </a:tcPr>
+                </a:tc>
+                <a:tc>
+                  <a:txBody>
+                    <a:bodyPr/>
+                    <a:lstStyle/>
+                    <a:p>
+                      <a:endParaRPr lang="zh-CN" altLang="en-US" dirty="0">
+                        <a:solidFill>
+                          <a:schemeClr val="bg2"/>
+                        </a:solidFill>
+                      </a:endParaRPr>
+                    </a:p>
+                  </a:txBody>
+                  <a:tcPr>
+                    <a:lnL w="12700" cap="flat" cmpd="sng" algn="ctr">
+                      <a:solidFill>
+                        <a:schemeClr val="bg2"/>
+                      </a:solidFill>
+                      <a:prstDash val="solid"/>
+                      <a:round/>
+                      <a:headEnd type="none" w="med" len="med"/>
+                      <a:tailEnd type="none" w="med" len="med"/>
+                    </a:lnL>
+                    <a:lnR w="12700" cap="flat" cmpd="sng" algn="ctr">
+                      <a:solidFill>
+                        <a:schemeClr val="bg2"/>
+                      </a:solidFill>
+                      <a:prstDash val="solid"/>
+                      <a:round/>
+                      <a:headEnd type="none" w="med" len="med"/>
+                      <a:tailEnd type="none" w="med" len="med"/>
+                    </a:lnR>
+                    <a:lnT w="12700" cap="flat" cmpd="sng" algn="ctr">
+                      <a:solidFill>
+                        <a:schemeClr val="bg2"/>
+                      </a:solidFill>
+                      <a:prstDash val="solid"/>
+                      <a:round/>
+                      <a:headEnd type="none" w="med" len="med"/>
+                      <a:tailEnd type="none" w="med" len="med"/>
+                    </a:lnT>
+                    <a:lnB w="12700" cap="flat" cmpd="sng" algn="ctr">
+                      <a:solidFill>
+                        <a:schemeClr val="bg2"/>
+                      </a:solidFill>
+                      <a:prstDash val="solid"/>
+                      <a:round/>
+                      <a:headEnd type="none" w="med" len="med"/>
+                      <a:tailEnd type="none" w="med" len="med"/>
+                    </a:lnB>
+                  </a:tcPr>
+                </a:tc>
+                <a:extLst>
+                  <a:ext uri="{0D108BD9-81ED-4DB2-BD59-A6C34878D82A}">
+                    <a16:rowId xmlns:a16="http://schemas.microsoft.com/office/drawing/2014/main" val="1666674231"/>
+                  </a:ext>
+                </a:extLst>
+              </a:tr>
+            </a:tbl>
+          </a:graphicData>
+        </a:graphic>
+      </p:graphicFrame>
     </p:spTree>
     <p:extLst>
       <p:ext uri="{BB962C8B-B14F-4D97-AF65-F5344CB8AC3E}">
@@ -21579,7 +23241,7 @@
 </p:sld>
 </file>
 
-<file path=ppt/slides/slide7.xml><?xml version="1.0" encoding="utf-8"?>
+<file path=ppt/slides/slide8.xml><?xml version="1.0" encoding="utf-8"?>
 <p:sld xmlns:a="http://schemas.openxmlformats.org/drawingml/2006/main" xmlns:r="http://schemas.openxmlformats.org/officeDocument/2006/relationships" xmlns:p="http://schemas.openxmlformats.org/presentationml/2006/main">
   <p:cSld>
     <p:spTree>
@@ -21620,7 +23282,7 @@
         </p:nvSpPr>
         <p:spPr>
           <a:xfrm>
-            <a:off x="0" y="8526"/>
+            <a:off x="1524001" y="8526"/>
             <a:ext cx="9013371" cy="792162"/>
           </a:xfrm>
         </p:spPr>
@@ -21652,8 +23314,8 @@
         </p:nvSpPr>
         <p:spPr>
           <a:xfrm>
-            <a:off x="317665" y="846748"/>
-            <a:ext cx="8508670" cy="662489"/>
+            <a:off x="244699" y="846749"/>
+            <a:ext cx="10105636" cy="662489"/>
           </a:xfrm>
           <a:prstGeom prst="rect">
             <a:avLst/>
@@ -21725,8 +23387,8 @@
         </p:nvSpPr>
         <p:spPr>
           <a:xfrm>
-            <a:off x="448628" y="1559656"/>
-            <a:ext cx="8377707" cy="4448654"/>
+            <a:off x="425003" y="1559656"/>
+            <a:ext cx="11108028" cy="4448654"/>
           </a:xfrm>
           <a:prstGeom prst="rect">
             <a:avLst/>
@@ -21745,87 +23407,79 @@
               </a:lnSpc>
             </a:pPr>
             <a:r>
-              <a:rPr lang="zh-CN" altLang="en-US" sz="2500" b="1" i="0" dirty="0">
+              <a:rPr lang="zh-CN" altLang="en-US" sz="2500" b="1" dirty="0">
                 <a:solidFill>
                   <a:schemeClr val="bg2"/>
                 </a:solidFill>
-                <a:effectLst/>
                 <a:latin typeface="+mn-ea"/>
                 <a:ea typeface="+mn-ea"/>
               </a:rPr>
               <a:t>定义</a:t>
             </a:r>
             <a:r>
-              <a:rPr lang="en-US" altLang="zh-CN" sz="2500" b="0" i="0" dirty="0">
+              <a:rPr lang="en-US" altLang="zh-CN" sz="2500" dirty="0">
                 <a:solidFill>
                   <a:schemeClr val="bg2"/>
                 </a:solidFill>
-                <a:effectLst/>
                 <a:latin typeface="+mn-ea"/>
                 <a:ea typeface="+mn-ea"/>
               </a:rPr>
               <a:t>: </a:t>
             </a:r>
             <a:r>
-              <a:rPr lang="zh-CN" altLang="en-US" sz="2500" b="0" i="0" dirty="0">
+              <a:rPr lang="zh-CN" altLang="en-US" sz="2500" dirty="0">
                 <a:solidFill>
                   <a:schemeClr val="bg2"/>
                 </a:solidFill>
-                <a:effectLst/>
                 <a:latin typeface="+mn-ea"/>
                 <a:ea typeface="+mn-ea"/>
               </a:rPr>
               <a:t>基于</a:t>
             </a:r>
             <a:r>
-              <a:rPr lang="en-US" altLang="zh-CN" sz="2500" b="0" i="0" dirty="0">
+              <a:rPr lang="en-US" altLang="zh-CN" sz="2500" dirty="0">
                 <a:solidFill>
                   <a:schemeClr val="bg2"/>
                 </a:solidFill>
-                <a:effectLst/>
                 <a:latin typeface="+mn-ea"/>
                 <a:ea typeface="+mn-ea"/>
               </a:rPr>
               <a:t>GDAL</a:t>
             </a:r>
             <a:r>
-              <a:rPr lang="zh-CN" altLang="en-US" sz="2500" b="0" i="0" dirty="0">
+              <a:rPr lang="zh-CN" altLang="en-US" sz="2500" dirty="0">
                 <a:solidFill>
                   <a:schemeClr val="bg2"/>
                 </a:solidFill>
-                <a:effectLst/>
                 <a:latin typeface="+mn-ea"/>
                 <a:ea typeface="+mn-ea"/>
               </a:rPr>
               <a:t>的</a:t>
             </a:r>
             <a:r>
-              <a:rPr lang="en-US" altLang="zh-CN" sz="2500" b="0" i="0" dirty="0">
+              <a:rPr lang="en-US" altLang="zh-CN" sz="2500" dirty="0">
                 <a:solidFill>
                   <a:schemeClr val="bg2"/>
                 </a:solidFill>
-                <a:effectLst/>
                 <a:latin typeface="+mn-ea"/>
                 <a:ea typeface="+mn-ea"/>
               </a:rPr>
               <a:t>Python</a:t>
             </a:r>
             <a:r>
-              <a:rPr lang="zh-CN" altLang="en-US" sz="2500" b="0" i="0" dirty="0">
+              <a:rPr lang="zh-CN" altLang="en-US" sz="2500" dirty="0">
                 <a:solidFill>
                   <a:schemeClr val="bg2"/>
                 </a:solidFill>
-                <a:effectLst/>
                 <a:latin typeface="+mn-ea"/>
                 <a:ea typeface="+mn-ea"/>
               </a:rPr>
               <a:t>库，专注栅格数据的读写与处理</a:t>
             </a:r>
-            <a:endParaRPr lang="en-US" altLang="zh-CN" sz="2500" b="0" i="0" dirty="0">
+            <a:endParaRPr lang="en-US" altLang="zh-CN" sz="2500" dirty="0">
               <a:solidFill>
                 <a:schemeClr val="bg2"/>
               </a:solidFill>
-              <a:effectLst/>
               <a:latin typeface="+mn-ea"/>
               <a:ea typeface="+mn-ea"/>
             </a:endParaRPr>
@@ -21837,22 +23491,20 @@
               </a:lnSpc>
             </a:pPr>
             <a:r>
-              <a:rPr lang="zh-CN" altLang="en-US" sz="2500" b="1" i="0" dirty="0">
+              <a:rPr lang="zh-CN" altLang="en-US" sz="2500" b="1" dirty="0">
                 <a:solidFill>
                   <a:schemeClr val="bg2"/>
                 </a:solidFill>
-                <a:effectLst/>
                 <a:latin typeface="+mn-ea"/>
                 <a:ea typeface="+mn-ea"/>
               </a:rPr>
               <a:t>核心优势</a:t>
             </a:r>
             <a:r>
-              <a:rPr lang="en-US" altLang="zh-CN" sz="2500" b="0" i="0" dirty="0">
+              <a:rPr lang="en-US" altLang="zh-CN" sz="2500" dirty="0">
                 <a:solidFill>
                   <a:schemeClr val="bg2"/>
                 </a:solidFill>
-                <a:effectLst/>
                 <a:latin typeface="+mn-ea"/>
                 <a:ea typeface="+mn-ea"/>
               </a:rPr>
@@ -21893,68 +23545,52 @@
                 <a:latin typeface="+mn-ea"/>
                 <a:ea typeface="+mn-ea"/>
               </a:rPr>
-              <a:t>）</a:t>
-            </a:r>
-            <a:r>
-              <a:rPr lang="zh-CN" altLang="en-US" sz="2500" b="0" i="0" dirty="0">
+              <a:t>）简洁的</a:t>
+            </a:r>
+            <a:r>
+              <a:rPr lang="en-US" altLang="zh-CN" sz="2500" dirty="0">
                 <a:solidFill>
                   <a:schemeClr val="bg2"/>
                 </a:solidFill>
-                <a:effectLst/>
-                <a:latin typeface="+mn-ea"/>
-                <a:ea typeface="+mn-ea"/>
-              </a:rPr>
-              <a:t>简洁的</a:t>
-            </a:r>
-            <a:r>
-              <a:rPr lang="en-US" altLang="zh-CN" sz="2500" b="0" i="0" dirty="0">
-                <a:solidFill>
-                  <a:schemeClr val="bg2"/>
-                </a:solidFill>
-                <a:effectLst/>
                 <a:latin typeface="+mn-ea"/>
                 <a:ea typeface="+mn-ea"/>
               </a:rPr>
               <a:t>API</a:t>
             </a:r>
             <a:r>
-              <a:rPr lang="zh-CN" altLang="en-US" sz="2500" b="0" i="0" dirty="0">
+              <a:rPr lang="zh-CN" altLang="en-US" sz="2500" dirty="0">
                 <a:solidFill>
                   <a:schemeClr val="bg2"/>
                 </a:solidFill>
-                <a:effectLst/>
                 <a:latin typeface="+mn-ea"/>
                 <a:ea typeface="+mn-ea"/>
               </a:rPr>
               <a:t>设计（告别</a:t>
             </a:r>
             <a:r>
-              <a:rPr lang="en-US" altLang="zh-CN" sz="2500" b="0" i="0" dirty="0">
+              <a:rPr lang="en-US" altLang="zh-CN" sz="2500" dirty="0">
                 <a:solidFill>
                   <a:schemeClr val="bg2"/>
                 </a:solidFill>
-                <a:effectLst/>
                 <a:latin typeface="+mn-ea"/>
                 <a:ea typeface="+mn-ea"/>
               </a:rPr>
               <a:t>GDAL</a:t>
             </a:r>
             <a:r>
-              <a:rPr lang="zh-CN" altLang="en-US" sz="2500" b="0" i="0" dirty="0">
+              <a:rPr lang="zh-CN" altLang="en-US" sz="2500" dirty="0">
                 <a:solidFill>
                   <a:schemeClr val="bg2"/>
                 </a:solidFill>
-                <a:effectLst/>
                 <a:latin typeface="+mn-ea"/>
                 <a:ea typeface="+mn-ea"/>
               </a:rPr>
               <a:t>复杂接口）；</a:t>
             </a:r>
-            <a:endParaRPr lang="en-US" altLang="zh-CN" sz="2500" b="0" i="0" dirty="0">
+            <a:endParaRPr lang="en-US" altLang="zh-CN" sz="2500" dirty="0">
               <a:solidFill>
                 <a:schemeClr val="bg2"/>
               </a:solidFill>
-              <a:effectLst/>
               <a:latin typeface="+mn-ea"/>
               <a:ea typeface="+mn-ea"/>
             </a:endParaRPr>
@@ -21966,43 +23602,39 @@
               </a:lnSpc>
             </a:pPr>
             <a:r>
-              <a:rPr lang="zh-CN" altLang="en-US" sz="2500" b="0" i="0" dirty="0">
+              <a:rPr lang="zh-CN" altLang="en-US" sz="2500" dirty="0">
                 <a:solidFill>
                   <a:schemeClr val="bg2"/>
                 </a:solidFill>
-                <a:effectLst/>
                 <a:latin typeface="+mn-ea"/>
                 <a:ea typeface="+mn-ea"/>
               </a:rPr>
               <a:t>（</a:t>
             </a:r>
             <a:r>
-              <a:rPr lang="en-US" altLang="zh-CN" sz="2500" b="0" i="0" dirty="0">
+              <a:rPr lang="en-US" altLang="zh-CN" sz="2500" dirty="0">
                 <a:solidFill>
                   <a:schemeClr val="bg2"/>
                 </a:solidFill>
-                <a:effectLst/>
                 <a:latin typeface="+mn-ea"/>
                 <a:ea typeface="+mn-ea"/>
               </a:rPr>
               <a:t>2</a:t>
             </a:r>
             <a:r>
-              <a:rPr lang="zh-CN" altLang="en-US" sz="2500" b="0" i="0" dirty="0">
+              <a:rPr lang="zh-CN" altLang="en-US" sz="2500" dirty="0">
                 <a:solidFill>
                   <a:schemeClr val="bg2"/>
                 </a:solidFill>
-                <a:effectLst/>
                 <a:latin typeface="+mn-ea"/>
                 <a:ea typeface="+mn-ea"/>
               </a:rPr>
               <a:t>）高性能内存管理（处理大型数据集）；</a:t>
             </a:r>
-            <a:endParaRPr lang="en-US" altLang="zh-CN" sz="2500" b="0" i="0" dirty="0">
+            <a:endParaRPr lang="en-US" altLang="zh-CN" sz="2500" dirty="0">
               <a:solidFill>
                 <a:schemeClr val="bg2"/>
               </a:solidFill>
-              <a:effectLst/>
               <a:latin typeface="+mn-ea"/>
               <a:ea typeface="+mn-ea"/>
             </a:endParaRPr>
@@ -22014,87 +23646,79 @@
               </a:lnSpc>
             </a:pPr>
             <a:r>
-              <a:rPr lang="zh-CN" altLang="en-US" sz="2500" b="0" i="0" dirty="0">
+              <a:rPr lang="zh-CN" altLang="en-US" sz="2500" dirty="0">
                 <a:solidFill>
                   <a:schemeClr val="bg2"/>
                 </a:solidFill>
-                <a:effectLst/>
                 <a:latin typeface="+mn-ea"/>
                 <a:ea typeface="+mn-ea"/>
               </a:rPr>
               <a:t>（</a:t>
             </a:r>
             <a:r>
-              <a:rPr lang="en-US" altLang="zh-CN" sz="2500" b="0" i="0" dirty="0">
+              <a:rPr lang="en-US" altLang="zh-CN" sz="2500" dirty="0">
                 <a:solidFill>
                   <a:schemeClr val="bg2"/>
                 </a:solidFill>
-                <a:effectLst/>
                 <a:latin typeface="+mn-ea"/>
                 <a:ea typeface="+mn-ea"/>
               </a:rPr>
               <a:t>3</a:t>
             </a:r>
             <a:r>
-              <a:rPr lang="zh-CN" altLang="en-US" sz="2500" b="0" i="0" dirty="0">
+              <a:rPr lang="zh-CN" altLang="en-US" sz="2500" dirty="0">
                 <a:solidFill>
                   <a:schemeClr val="bg2"/>
                 </a:solidFill>
-                <a:effectLst/>
                 <a:latin typeface="+mn-ea"/>
                 <a:ea typeface="+mn-ea"/>
               </a:rPr>
               <a:t>）无缝集成</a:t>
             </a:r>
             <a:r>
-              <a:rPr lang="en-US" altLang="zh-CN" sz="2500" b="0" i="0" dirty="0">
+              <a:rPr lang="en-US" altLang="zh-CN" sz="2500" dirty="0">
                 <a:solidFill>
                   <a:schemeClr val="bg2"/>
                 </a:solidFill>
-                <a:effectLst/>
                 <a:latin typeface="+mn-ea"/>
                 <a:ea typeface="+mn-ea"/>
               </a:rPr>
               <a:t>NumPy</a:t>
             </a:r>
             <a:r>
-              <a:rPr lang="zh-CN" altLang="en-US" sz="2500" b="0" i="0" dirty="0">
+              <a:rPr lang="zh-CN" altLang="en-US" sz="2500" dirty="0">
                 <a:solidFill>
                   <a:schemeClr val="bg2"/>
                 </a:solidFill>
-                <a:effectLst/>
                 <a:latin typeface="+mn-ea"/>
                 <a:ea typeface="+mn-ea"/>
               </a:rPr>
               <a:t>、</a:t>
             </a:r>
             <a:r>
-              <a:rPr lang="en-US" altLang="zh-CN" sz="2500" b="0" i="0" dirty="0">
+              <a:rPr lang="en-US" altLang="zh-CN" sz="2500" dirty="0">
                 <a:solidFill>
                   <a:schemeClr val="bg2"/>
                 </a:solidFill>
-                <a:effectLst/>
                 <a:latin typeface="+mn-ea"/>
                 <a:ea typeface="+mn-ea"/>
               </a:rPr>
               <a:t>Pandas</a:t>
             </a:r>
             <a:r>
-              <a:rPr lang="zh-CN" altLang="en-US" sz="2500" b="0" i="0" dirty="0">
+              <a:rPr lang="zh-CN" altLang="en-US" sz="2500" dirty="0">
                 <a:solidFill>
                   <a:schemeClr val="bg2"/>
                 </a:solidFill>
-                <a:effectLst/>
                 <a:latin typeface="+mn-ea"/>
                 <a:ea typeface="+mn-ea"/>
               </a:rPr>
               <a:t>等科学计算库。</a:t>
             </a:r>
-            <a:endParaRPr lang="en-US" altLang="zh-CN" sz="2500" b="0" i="0" dirty="0">
+            <a:endParaRPr lang="en-US" altLang="zh-CN" sz="2500" dirty="0">
               <a:solidFill>
                 <a:schemeClr val="bg2"/>
               </a:solidFill>
-              <a:effectLst/>
               <a:latin typeface="+mn-ea"/>
               <a:ea typeface="+mn-ea"/>
             </a:endParaRPr>
@@ -22159,7 +23783,7 @@
         </p:nvSpPr>
         <p:spPr>
           <a:xfrm>
-            <a:off x="573109" y="6226143"/>
+            <a:off x="2097109" y="6226144"/>
             <a:ext cx="8055736" cy="461665"/>
           </a:xfrm>
           <a:prstGeom prst="rect">
@@ -22174,40 +23798,36 @@
           <a:lstStyle/>
           <a:p>
             <a:r>
-              <a:rPr lang="zh-CN" altLang="en-US" i="0" dirty="0">
+              <a:rPr lang="zh-CN" altLang="en-US" dirty="0">
                 <a:solidFill>
                   <a:schemeClr val="bg2"/>
                 </a:solidFill>
-                <a:effectLst/>
                 <a:latin typeface="+mn-ea"/>
                 <a:ea typeface="+mn-ea"/>
               </a:rPr>
               <a:t>官方文档</a:t>
             </a:r>
             <a:r>
-              <a:rPr lang="zh-CN" altLang="en-US" b="1" i="0" dirty="0">
+              <a:rPr lang="zh-CN" altLang="en-US" b="1" dirty="0">
                 <a:solidFill>
                   <a:schemeClr val="bg2"/>
                 </a:solidFill>
-                <a:effectLst/>
                 <a:latin typeface="+mn-ea"/>
                 <a:ea typeface="+mn-ea"/>
               </a:rPr>
               <a:t>：</a:t>
             </a:r>
             <a:r>
-              <a:rPr lang="en-US" altLang="zh-CN" b="0" i="0" dirty="0">
+              <a:rPr lang="en-US" altLang="zh-CN" dirty="0">
                 <a:solidFill>
                   <a:srgbClr val="333333"/>
                 </a:solidFill>
-                <a:effectLst/>
                 <a:latin typeface="Roboto" panose="02000000000000000000" pitchFamily="2" charset="0"/>
                 <a:hlinkClick r:id="rId3"/>
               </a:rPr>
               <a:t>https://rasterio.readthedocs.io</a:t>
             </a:r>
-            <a:endParaRPr lang="en-US" altLang="zh-CN" b="0" i="0" dirty="0">
-              <a:effectLst/>
+            <a:endParaRPr lang="en-US" altLang="zh-CN" dirty="0">
               <a:latin typeface="Roboto" panose="02000000000000000000" pitchFamily="2" charset="0"/>
             </a:endParaRPr>
           </a:p>
@@ -22229,7 +23849,7 @@
 </p:sld>
 </file>
 
-<file path=ppt/slides/slide8.xml><?xml version="1.0" encoding="utf-8"?>
+<file path=ppt/slides/slide9.xml><?xml version="1.0" encoding="utf-8"?>
 <p:sld xmlns:a="http://schemas.openxmlformats.org/drawingml/2006/main" xmlns:r="http://schemas.openxmlformats.org/officeDocument/2006/relationships" xmlns:p="http://schemas.openxmlformats.org/presentationml/2006/main">
   <p:cSld>
     <p:spTree>
@@ -22270,8 +23890,8 @@
         </p:nvSpPr>
         <p:spPr>
           <a:xfrm>
-            <a:off x="0" y="8526"/>
-            <a:ext cx="9013371" cy="792162"/>
+            <a:off x="1" y="8526"/>
+            <a:ext cx="10537372" cy="792162"/>
           </a:xfrm>
         </p:spPr>
         <p:txBody>
@@ -22302,8 +23922,8 @@
         </p:nvSpPr>
         <p:spPr>
           <a:xfrm>
-            <a:off x="317665" y="846748"/>
-            <a:ext cx="8508670" cy="662489"/>
+            <a:off x="270456" y="846749"/>
+            <a:ext cx="10079879" cy="662489"/>
           </a:xfrm>
           <a:prstGeom prst="rect">
             <a:avLst/>
@@ -22365,8 +23985,8 @@
         </p:nvSpPr>
         <p:spPr>
           <a:xfrm>
-            <a:off x="476517" y="1613663"/>
-            <a:ext cx="8349817" cy="5067349"/>
+            <a:off x="286708" y="1490446"/>
+            <a:ext cx="11487955" cy="5197705"/>
           </a:xfrm>
           <a:prstGeom prst="rect">
             <a:avLst/>
@@ -22388,7 +24008,7 @@
               </a:spcBef>
             </a:pPr>
             <a:r>
-              <a:rPr lang="zh-CN" altLang="en-US" sz="2500" b="1" dirty="0">
+              <a:rPr lang="zh-CN" altLang="en-US" sz="2800" b="1" dirty="0">
                 <a:solidFill>
                   <a:schemeClr val="bg2"/>
                 </a:solidFill>
@@ -22397,7 +24017,7 @@
               </a:rPr>
               <a:t>主要步骤：</a:t>
             </a:r>
-            <a:endParaRPr lang="en-US" altLang="zh-CN" sz="2500" b="1" dirty="0">
+            <a:endParaRPr lang="en-US" altLang="zh-CN" sz="2800" b="1" dirty="0">
               <a:solidFill>
                 <a:schemeClr val="bg2"/>
               </a:solidFill>
@@ -22416,16 +24036,16 @@
               <a:buAutoNum type="arabicPeriod"/>
             </a:pPr>
             <a:r>
-              <a:rPr lang="zh-CN" altLang="en-US" sz="2100" dirty="0">
+              <a:rPr lang="zh-CN" altLang="en-US" dirty="0">
                 <a:solidFill>
                   <a:schemeClr val="bg2"/>
                 </a:solidFill>
                 <a:latin typeface="+mn-ea"/>
                 <a:ea typeface="+mn-ea"/>
               </a:rPr>
-              <a:t>将二值图像转为几何图形顶点坐标序列；</a:t>
-            </a:r>
-            <a:endParaRPr lang="en-US" altLang="zh-CN" sz="2100" dirty="0">
+              <a:t>将图像按像元值转为几何图形顶点坐标序列；</a:t>
+            </a:r>
+            <a:endParaRPr lang="en-US" altLang="zh-CN" dirty="0">
               <a:solidFill>
                 <a:schemeClr val="bg2"/>
               </a:solidFill>
@@ -22444,16 +24064,16 @@
               <a:buAutoNum type="arabicPeriod"/>
             </a:pPr>
             <a:r>
-              <a:rPr lang="zh-CN" altLang="en-US" sz="2100" dirty="0">
+              <a:rPr lang="zh-CN" altLang="en-US" dirty="0">
                 <a:solidFill>
                   <a:schemeClr val="bg2"/>
                 </a:solidFill>
                 <a:latin typeface="+mn-ea"/>
                 <a:ea typeface="+mn-ea"/>
               </a:rPr>
-              <a:t>利用所得顶点坐标创建多面几何；</a:t>
-            </a:r>
-            <a:endParaRPr lang="en-US" altLang="zh-CN" sz="2100" dirty="0">
+              <a:t>利用所得顶点坐标创建面几何；</a:t>
+            </a:r>
+            <a:endParaRPr lang="en-US" altLang="zh-CN" dirty="0">
               <a:solidFill>
                 <a:schemeClr val="bg2"/>
               </a:solidFill>
@@ -22471,7 +24091,7 @@
               </a:spcBef>
             </a:pPr>
             <a:r>
-              <a:rPr lang="en-US" altLang="zh-CN" sz="2100" dirty="0">
+              <a:rPr lang="en-US" altLang="zh-CN" dirty="0">
                 <a:solidFill>
                   <a:schemeClr val="bg2"/>
                 </a:solidFill>
@@ -22481,7 +24101,7 @@
               <a:t>3.  </a:t>
             </a:r>
             <a:r>
-              <a:rPr lang="zh-CN" altLang="en-US" sz="2100" dirty="0">
+              <a:rPr lang="zh-CN" altLang="en-US" dirty="0">
                 <a:solidFill>
                   <a:schemeClr val="bg2"/>
                 </a:solidFill>
@@ -22491,7 +24111,7 @@
               <a:t>利用</a:t>
             </a:r>
             <a:r>
-              <a:rPr lang="en-US" altLang="zh-CN" sz="2100" dirty="0" err="1">
+              <a:rPr lang="en-US" altLang="zh-CN" dirty="0" err="1">
                 <a:solidFill>
                   <a:schemeClr val="bg2"/>
                 </a:solidFill>
@@ -22501,7 +24121,7 @@
               <a:t>geopandas</a:t>
             </a:r>
             <a:r>
-              <a:rPr lang="zh-CN" altLang="en-US" sz="2100" dirty="0">
+              <a:rPr lang="zh-CN" altLang="en-US" dirty="0">
                 <a:solidFill>
                   <a:schemeClr val="bg2"/>
                 </a:solidFill>
@@ -22511,7 +24131,7 @@
               <a:t>库创建</a:t>
             </a:r>
             <a:r>
-              <a:rPr lang="en-US" altLang="zh-CN" sz="2100" dirty="0" err="1">
+              <a:rPr lang="en-US" altLang="zh-CN" dirty="0" err="1">
                 <a:solidFill>
                   <a:schemeClr val="bg2"/>
                 </a:solidFill>
@@ -22521,7 +24141,7 @@
               <a:t>GeoDataFrame</a:t>
             </a:r>
             <a:r>
-              <a:rPr lang="zh-CN" altLang="en-US" sz="2100" dirty="0">
+              <a:rPr lang="zh-CN" altLang="en-US" dirty="0">
                 <a:solidFill>
                   <a:schemeClr val="bg2"/>
                 </a:solidFill>
@@ -22530,7 +24150,7 @@
               </a:rPr>
               <a:t>数据类型，并将其写出为矢量数据。</a:t>
             </a:r>
-            <a:endParaRPr lang="en-US" altLang="zh-CN" sz="2100" dirty="0">
+            <a:endParaRPr lang="en-US" altLang="zh-CN" dirty="0">
               <a:solidFill>
                 <a:schemeClr val="bg2"/>
               </a:solidFill>
@@ -22539,22 +24159,16 @@
             </a:endParaRPr>
           </a:p>
           <a:p>
-            <a:pPr marL="0" marR="0" lvl="0" indent="0" algn="l" defTabSz="914400" rtl="0" eaLnBrk="0" fontAlgn="base" latinLnBrk="0" hangingPunct="0">
+            <a:pPr algn="l" eaLnBrk="0" hangingPunct="0">
               <a:lnSpc>
                 <a:spcPct val="150000"/>
               </a:lnSpc>
               <a:spcBef>
                 <a:spcPct val="0"/>
               </a:spcBef>
-              <a:spcAft>
-                <a:spcPct val="0"/>
-              </a:spcAft>
-              <a:buClrTx/>
-              <a:buSzTx/>
-              <a:tabLst/>
             </a:pPr>
             <a:r>
-              <a:rPr lang="zh-CN" altLang="en-US" sz="2500" b="1" dirty="0">
+              <a:rPr lang="zh-CN" altLang="en-US" sz="2800" b="1" dirty="0">
                 <a:solidFill>
                   <a:schemeClr val="bg2"/>
                 </a:solidFill>
@@ -22564,48 +24178,34 @@
               <a:t>主要功能</a:t>
             </a:r>
             <a:r>
-              <a:rPr kumimoji="0" lang="zh-CN" altLang="zh-CN" sz="2500" b="0" i="0" u="none" strike="noStrike" cap="none" normalizeH="0" baseline="0" dirty="0">
-                <a:ln>
-                  <a:noFill/>
-                </a:ln>
+              <a:rPr lang="zh-CN" altLang="zh-CN" sz="2800" dirty="0">
                 <a:solidFill>
                   <a:schemeClr val="bg2"/>
                 </a:solidFill>
-                <a:effectLst/>
                 <a:latin typeface="+mn-ea"/>
                 <a:ea typeface="+mn-ea"/>
               </a:rPr>
               <a:t>:</a:t>
             </a:r>
-            <a:endParaRPr kumimoji="0" lang="en-US" altLang="zh-CN" sz="2500" b="0" i="0" u="none" strike="noStrike" cap="none" normalizeH="0" baseline="0" dirty="0">
-              <a:ln>
-                <a:noFill/>
-              </a:ln>
+            <a:endParaRPr lang="en-US" altLang="zh-CN" sz="2800" dirty="0">
               <a:solidFill>
                 <a:schemeClr val="bg2"/>
               </a:solidFill>
-              <a:effectLst/>
               <a:latin typeface="+mn-ea"/>
               <a:ea typeface="+mn-ea"/>
             </a:endParaRPr>
           </a:p>
           <a:p>
-            <a:pPr marL="0" marR="0" lvl="0" indent="0" algn="l" defTabSz="914400" rtl="0" eaLnBrk="0" fontAlgn="base" latinLnBrk="0" hangingPunct="0">
+            <a:pPr algn="l" eaLnBrk="0" hangingPunct="0">
               <a:lnSpc>
                 <a:spcPct val="150000"/>
               </a:lnSpc>
               <a:spcBef>
                 <a:spcPct val="0"/>
               </a:spcBef>
-              <a:spcAft>
-                <a:spcPct val="0"/>
-              </a:spcAft>
-              <a:buClrTx/>
-              <a:buSzTx/>
-              <a:tabLst/>
             </a:pPr>
             <a:r>
-              <a:rPr lang="en-US" altLang="zh-CN" sz="2100" dirty="0" err="1">
+              <a:rPr lang="en-US" altLang="zh-CN" dirty="0" err="1">
                 <a:solidFill>
                   <a:schemeClr val="bg2"/>
                 </a:solidFill>
@@ -22615,7 +24215,7 @@
               <a:t>rasterio.open</a:t>
             </a:r>
             <a:r>
-              <a:rPr lang="en-US" altLang="zh-CN" sz="2100" dirty="0">
+              <a:rPr lang="en-US" altLang="zh-CN" dirty="0">
                 <a:solidFill>
                   <a:schemeClr val="bg2"/>
                 </a:solidFill>
@@ -22625,7 +24225,7 @@
               <a:t>()  ## </a:t>
             </a:r>
             <a:r>
-              <a:rPr lang="zh-CN" altLang="en-US" sz="2100" dirty="0">
+              <a:rPr lang="zh-CN" altLang="en-US" dirty="0">
                 <a:solidFill>
                   <a:schemeClr val="bg2"/>
                 </a:solidFill>
@@ -22634,7 +24234,7 @@
               </a:rPr>
               <a:t>读入</a:t>
             </a:r>
-            <a:endParaRPr lang="en-US" altLang="zh-CN" sz="2100" dirty="0">
+            <a:endParaRPr lang="en-US" altLang="zh-CN" dirty="0">
               <a:solidFill>
                 <a:schemeClr val="bg2"/>
               </a:solidFill>
@@ -22643,70 +24243,36 @@
             </a:endParaRPr>
           </a:p>
           <a:p>
-            <a:pPr marL="0" marR="0" lvl="0" indent="0" algn="l" defTabSz="914400" rtl="0" eaLnBrk="0" fontAlgn="base" latinLnBrk="0" hangingPunct="0">
+            <a:pPr algn="l" eaLnBrk="0" hangingPunct="0">
               <a:lnSpc>
                 <a:spcPct val="150000"/>
               </a:lnSpc>
               <a:spcBef>
                 <a:spcPct val="0"/>
               </a:spcBef>
-              <a:spcAft>
-                <a:spcPct val="0"/>
-              </a:spcAft>
-              <a:buClrTx/>
-              <a:buSzTx/>
-              <a:tabLst/>
             </a:pPr>
             <a:r>
-              <a:rPr lang="en-US" altLang="zh-CN" sz="2100" dirty="0" err="1">
+              <a:rPr lang="en-US" altLang="zh-CN" dirty="0" err="1">
                 <a:solidFill>
                   <a:schemeClr val="bg2"/>
                 </a:solidFill>
                 <a:latin typeface="+mn-ea"/>
                 <a:ea typeface="+mn-ea"/>
               </a:rPr>
-              <a:t>r</a:t>
-            </a:r>
-            <a:r>
-              <a:rPr kumimoji="0" lang="en-US" altLang="zh-CN" sz="2100" b="0" i="0" u="none" strike="noStrike" cap="none" normalizeH="0" baseline="0" dirty="0" err="1">
-                <a:ln>
-                  <a:noFill/>
-                </a:ln>
-                <a:solidFill>
-                  <a:schemeClr val="bg2"/>
-                </a:solidFill>
-                <a:effectLst/>
-                <a:latin typeface="+mn-ea"/>
-                <a:ea typeface="+mn-ea"/>
-              </a:rPr>
-              <a:t>asterio.features.shapes</a:t>
-            </a:r>
-            <a:r>
-              <a:rPr kumimoji="0" lang="en-US" altLang="zh-CN" sz="2100" b="0" i="0" u="none" strike="noStrike" cap="none" normalizeH="0" baseline="0" dirty="0">
-                <a:ln>
-                  <a:noFill/>
-                </a:ln>
-                <a:solidFill>
-                  <a:schemeClr val="bg2"/>
-                </a:solidFill>
-                <a:effectLst/>
-                <a:latin typeface="+mn-ea"/>
-                <a:ea typeface="+mn-ea"/>
-              </a:rPr>
-              <a:t>() </a:t>
-            </a:r>
-            <a:r>
-              <a:rPr lang="en-US" altLang="zh-CN" sz="2100" dirty="0">
+              <a:t>rasterio.features.shapes</a:t>
+            </a:r>
+            <a:r>
+              <a:rPr lang="en-US" altLang="zh-CN" dirty="0">
                 <a:solidFill>
                   <a:schemeClr val="bg2"/>
                 </a:solidFill>
                 <a:latin typeface="+mn-ea"/>
                 <a:ea typeface="+mn-ea"/>
               </a:rPr>
-              <a:t># </a:t>
-            </a:r>
-            <a:r>
-              <a:rPr lang="zh-CN" altLang="en-US" sz="2100" dirty="0">
+              <a:t>() # </a:t>
+            </a:r>
+            <a:r>
+              <a:rPr lang="zh-CN" altLang="en-US" dirty="0">
                 <a:solidFill>
                   <a:schemeClr val="bg2"/>
                 </a:solidFill>
@@ -22715,7 +24281,7 @@
               </a:rPr>
               <a:t>二值图像转为几何顶点序列</a:t>
             </a:r>
-            <a:endParaRPr lang="en-US" altLang="zh-CN" sz="2100" dirty="0">
+            <a:endParaRPr lang="en-US" altLang="zh-CN" dirty="0">
               <a:solidFill>
                 <a:schemeClr val="bg2"/>
               </a:solidFill>
@@ -22724,22 +24290,16 @@
             </a:endParaRPr>
           </a:p>
           <a:p>
-            <a:pPr marL="0" marR="0" lvl="0" indent="0" algn="l" defTabSz="914400" rtl="0" eaLnBrk="0" fontAlgn="base" latinLnBrk="0" hangingPunct="0">
+            <a:pPr algn="l" eaLnBrk="0" hangingPunct="0">
               <a:lnSpc>
                 <a:spcPct val="150000"/>
               </a:lnSpc>
               <a:spcBef>
                 <a:spcPct val="0"/>
               </a:spcBef>
-              <a:spcAft>
-                <a:spcPct val="0"/>
-              </a:spcAft>
-              <a:buClrTx/>
-              <a:buSzTx/>
-              <a:tabLst/>
             </a:pPr>
             <a:r>
-              <a:rPr lang="en-US" altLang="zh-CN" sz="2100" dirty="0" err="1">
+              <a:rPr lang="en-US" altLang="zh-CN" dirty="0" err="1">
                 <a:solidFill>
                   <a:schemeClr val="bg2"/>
                 </a:solidFill>
@@ -22749,7 +24309,7 @@
               <a:t>Shapely.Polygon</a:t>
             </a:r>
             <a:r>
-              <a:rPr lang="en-US" altLang="zh-CN" sz="2100" dirty="0">
+              <a:rPr lang="en-US" altLang="zh-CN" dirty="0">
                 <a:solidFill>
                   <a:schemeClr val="bg2"/>
                 </a:solidFill>
@@ -22759,7 +24319,7 @@
               <a:t>()  # </a:t>
             </a:r>
             <a:r>
-              <a:rPr lang="zh-CN" altLang="en-US" sz="2100" dirty="0">
+              <a:rPr lang="zh-CN" altLang="en-US" dirty="0">
                 <a:solidFill>
                   <a:schemeClr val="bg2"/>
                 </a:solidFill>
@@ -22768,7 +24328,7 @@
               </a:rPr>
               <a:t>将几何顶点序列创建为矢量几何面</a:t>
             </a:r>
-            <a:endParaRPr lang="en-US" altLang="zh-CN" sz="2100" dirty="0">
+            <a:endParaRPr lang="en-US" altLang="zh-CN" dirty="0">
               <a:solidFill>
                 <a:schemeClr val="bg2"/>
               </a:solidFill>
@@ -22777,43 +24337,29 @@
             </a:endParaRPr>
           </a:p>
           <a:p>
-            <a:pPr marL="0" marR="0" lvl="0" indent="0" algn="l" defTabSz="914400" rtl="0" eaLnBrk="0" fontAlgn="base" latinLnBrk="0" hangingPunct="0">
+            <a:pPr algn="l" eaLnBrk="0" hangingPunct="0">
               <a:lnSpc>
                 <a:spcPct val="150000"/>
               </a:lnSpc>
               <a:spcBef>
                 <a:spcPct val="0"/>
               </a:spcBef>
-              <a:spcAft>
-                <a:spcPct val="0"/>
-              </a:spcAft>
-              <a:buClrTx/>
-              <a:buSzTx/>
-              <a:tabLst/>
             </a:pPr>
             <a:r>
-              <a:rPr kumimoji="0" lang="en-US" altLang="zh-CN" sz="2100" b="0" i="0" u="none" strike="noStrike" cap="none" normalizeH="0" baseline="0" dirty="0" err="1">
-                <a:ln>
-                  <a:noFill/>
-                </a:ln>
+              <a:rPr lang="en-US" altLang="zh-CN" dirty="0" err="1">
                 <a:solidFill>
                   <a:schemeClr val="bg2"/>
                 </a:solidFill>
-                <a:effectLst/>
                 <a:latin typeface="+mn-ea"/>
                 <a:ea typeface="+mn-ea"/>
               </a:rPr>
               <a:t>Geopandas.GeoDataFrame</a:t>
             </a:r>
             <a:r>
-              <a:rPr kumimoji="0" lang="en-US" altLang="zh-CN" sz="2100" b="0" i="0" u="none" strike="noStrike" cap="none" normalizeH="0" baseline="0" dirty="0">
-                <a:ln>
-                  <a:noFill/>
-                </a:ln>
+              <a:rPr lang="en-US" altLang="zh-CN" dirty="0">
                 <a:solidFill>
                   <a:schemeClr val="bg2"/>
                 </a:solidFill>
-                <a:effectLst/>
                 <a:latin typeface="+mn-ea"/>
                 <a:ea typeface="+mn-ea"/>
               </a:rPr>
@@ -22836,7 +24382,7 @@
         </p:nvSpPr>
         <p:spPr>
           <a:xfrm>
-            <a:off x="6149662" y="6188296"/>
+            <a:off x="8781245" y="6226486"/>
             <a:ext cx="2736760" cy="461665"/>
           </a:xfrm>
           <a:prstGeom prst="rect">
@@ -22878,154 +24424,6 @@
     <p:extLst>
       <p:ext uri="{BB962C8B-B14F-4D97-AF65-F5344CB8AC3E}">
         <p14:creationId xmlns:p14="http://schemas.microsoft.com/office/powerpoint/2010/main" val="1285362562"/>
-      </p:ext>
-    </p:extLst>
-  </p:cSld>
-  <p:clrMapOvr>
-    <a:masterClrMapping/>
-  </p:clrMapOvr>
-  <p:transition>
-    <p:fade/>
-  </p:transition>
-</p:sld>
-</file>
-
-<file path=ppt/slides/slide9.xml><?xml version="1.0" encoding="utf-8"?>
-<p:sld xmlns:a="http://schemas.openxmlformats.org/drawingml/2006/main" xmlns:r="http://schemas.openxmlformats.org/officeDocument/2006/relationships" xmlns:p="http://schemas.openxmlformats.org/presentationml/2006/main">
-  <p:cSld>
-    <p:spTree>
-      <p:nvGrpSpPr>
-        <p:cNvPr id="1" name=""/>
-        <p:cNvGrpSpPr/>
-        <p:nvPr/>
-      </p:nvGrpSpPr>
-      <p:grpSpPr>
-        <a:xfrm>
-          <a:off x="0" y="0"/>
-          <a:ext cx="0" cy="0"/>
-          <a:chOff x="0" y="0"/>
-          <a:chExt cx="0" cy="0"/>
-        </a:xfrm>
-      </p:grpSpPr>
-      <p:sp>
-        <p:nvSpPr>
-          <p:cNvPr id="3" name="矩形 2"/>
-          <p:cNvSpPr/>
-          <p:nvPr/>
-        </p:nvSpPr>
-        <p:spPr>
-          <a:xfrm>
-            <a:off x="0" y="3471863"/>
-            <a:ext cx="9144000" cy="1543050"/>
-          </a:xfrm>
-          <a:prstGeom prst="rect">
-            <a:avLst/>
-          </a:prstGeom>
-          <a:solidFill>
-            <a:schemeClr val="accent1"/>
-          </a:solidFill>
-          <a:ln>
-            <a:noFill/>
-          </a:ln>
-        </p:spPr>
-        <p:txBody>
-          <a:bodyPr wrap="square" lIns="0" rtlCol="0" anchor="ctr">
-            <a:noAutofit/>
-          </a:bodyPr>
-          <a:lstStyle/>
-          <a:p>
-            <a:pPr algn="l"/>
-            <a:endParaRPr lang="zh-CN" altLang="en-US" b="1">
-              <a:solidFill>
-                <a:srgbClr val="FF0000"/>
-              </a:solidFill>
-              <a:latin typeface="微软雅黑" pitchFamily="34" charset="-122"/>
-              <a:ea typeface="微软雅黑" pitchFamily="34" charset="-122"/>
-            </a:endParaRPr>
-          </a:p>
-        </p:txBody>
-      </p:sp>
-      <p:sp>
-        <p:nvSpPr>
-          <p:cNvPr id="7" name="矩形 6"/>
-          <p:cNvSpPr/>
-          <p:nvPr/>
-        </p:nvSpPr>
-        <p:spPr>
-          <a:xfrm>
-            <a:off x="189064" y="3868892"/>
-            <a:ext cx="8753057" cy="707886"/>
-          </a:xfrm>
-          <a:prstGeom prst="rect">
-            <a:avLst/>
-          </a:prstGeom>
-        </p:spPr>
-        <p:txBody>
-          <a:bodyPr wrap="square">
-            <a:spAutoFit/>
-          </a:bodyPr>
-          <a:lstStyle/>
-          <a:p>
-            <a:pPr algn="l" fontAlgn="auto">
-              <a:spcBef>
-                <a:spcPts val="0"/>
-              </a:spcBef>
-              <a:spcAft>
-                <a:spcPts val="0"/>
-              </a:spcAft>
-            </a:pPr>
-            <a:r>
-              <a:rPr lang="zh-CN" altLang="en-US" sz="4000" b="1" dirty="0">
-                <a:latin typeface="微软雅黑" pitchFamily="34" charset="-122"/>
-                <a:ea typeface="微软雅黑" pitchFamily="34" charset="-122"/>
-              </a:rPr>
-              <a:t>二、矢量数据栅格化</a:t>
-            </a:r>
-          </a:p>
-        </p:txBody>
-      </p:sp>
-      <p:sp>
-        <p:nvSpPr>
-          <p:cNvPr id="8" name="矩形 7"/>
-          <p:cNvSpPr/>
-          <p:nvPr/>
-        </p:nvSpPr>
-        <p:spPr>
-          <a:xfrm>
-            <a:off x="0" y="5014912"/>
-            <a:ext cx="9144000" cy="72000"/>
-          </a:xfrm>
-          <a:prstGeom prst="rect">
-            <a:avLst/>
-          </a:prstGeom>
-          <a:solidFill>
-            <a:schemeClr val="tx1">
-              <a:lumMod val="75000"/>
-            </a:schemeClr>
-          </a:solidFill>
-          <a:effectLst/>
-        </p:spPr>
-        <p:txBody>
-          <a:bodyPr wrap="square" lIns="0" rtlCol="0" anchor="ctr">
-            <a:noAutofit/>
-          </a:bodyPr>
-          <a:lstStyle/>
-          <a:p>
-            <a:pPr algn="l"/>
-            <a:endParaRPr lang="zh-CN" altLang="en-US" b="1">
-              <a:solidFill>
-                <a:srgbClr val="FF0000"/>
-              </a:solidFill>
-              <a:latin typeface="微软雅黑" pitchFamily="34" charset="-122"/>
-              <a:ea typeface="微软雅黑" pitchFamily="34" charset="-122"/>
-            </a:endParaRPr>
-          </a:p>
-        </p:txBody>
-      </p:sp>
-    </p:spTree>
-    <p:extLst>
-      <p:ext uri="{BB962C8B-B14F-4D97-AF65-F5344CB8AC3E}">
-        <p14:creationId xmlns:p14="http://schemas.microsoft.com/office/powerpoint/2010/main" val="755382699"/>
       </p:ext>
     </p:extLst>
   </p:cSld>
